--- a/第十週(11-12)/第十週_第1節_簡報.pptx
+++ b/第十週(11-12)/第十週_第1節_簡報.pptx
@@ -461,7 +461,7 @@
                 <a:ea typeface="Arial Unicode MS"/>
                 <a:cs typeface="Arial Unicode MS"/>
               </a:rPr>
-              <a:t>讓大家知道，模型開始訓練之前，資料要先準備好：照片要標註，標註要存成固定的格式，照片要分成三組，而且還要用資料增強，讓一張照片變出很多種樣子。
+              <a:t>讓大家知道一個模型是怎麼教出來的：照片要先標註、分成三組，然後一輪一輪地訓練；而且練得愈久不一定愈好，要用模擬考挑出最好的一輪。
 </a:t>
             </a:r>
           </a:p>
@@ -593,7 +593,7 @@
                 <a:ea typeface="Arial Unicode MS"/>
                 <a:cs typeface="Arial Unicode MS"/>
               </a:rPr>
-              <a:t>這一節先講準備工作：照片怎麼標、標完存成什麼樣子、照片怎麼分組，以及一張照片怎麼變出很多張。第二節講訓練本身。第三節講練好的模型怎麼用，以及怎麼替它打分數。</a:t>
+              <a:t>這一節先講準備工作：照片怎麼標、照片怎麼分組；接著講訓練：模型怎麼一輪一輪變好，以及什麼時候該停。第二節講練好的模型怎麼用，以及怎麼替它打分數。第三節講追蹤：車子怎麼知道這一張的人，就是上一張的那個人。</a:t>
             </a:r>
           </a:p>
         </p:txBody>
@@ -702,11 +702,11 @@
                 <a:spcPts val="0"/>
               </a:spcBef>
               <a:spcAft>
-                <a:spcPts val="267"/>
+                <a:spcPts val="250"/>
               </a:spcAft>
             </a:pPr>
             <a:r>
-              <a:rPr sz="1600" b="1" lang="zh-TW" dirty="0">
+              <a:rPr sz="1500" b="1" lang="zh-TW" dirty="0">
                 <a:solidFill>
                   <a:srgbClr val="000000"/>
                 </a:solidFill>
@@ -717,15 +717,15 @@
               <a:t>這一張的目的：</a:t>
             </a:r>
             <a:r>
-              <a:rPr sz="1600" lang="zh-TW" dirty="0">
-                <a:solidFill>
-                  <a:srgbClr val="000000"/>
-                </a:solidFill>
-                <a:latin typeface="Arial Unicode MS"/>
-                <a:ea typeface="Arial Unicode MS"/>
-                <a:cs typeface="Arial Unicode MS"/>
-              </a:rPr>
-              <a:t>讓大家看到真正訓練時，送進模型的照片長什麼樣子：好幾種增強會隨機地同時發生，跟原本的照片已經很不一樣。
+              <a:rPr sz="1500" lang="zh-TW" dirty="0">
+                <a:solidFill>
+                  <a:srgbClr val="000000"/>
+                </a:solidFill>
+                <a:latin typeface="Arial Unicode MS"/>
+                <a:ea typeface="Arial Unicode MS"/>
+                <a:cs typeface="Arial Unicode MS"/>
+              </a:rPr>
+              <a:t>讓大家看懂訓練時最常看的兩條曲線：訓練組的損失會一直往下，可是驗證組的成績會先變好、再變差；所以要留驗證組成績最好的那一輪，而不是最後一輪。
 </a:t>
             </a:r>
           </a:p>
@@ -735,41 +735,19 @@
                 <a:spcPts val="0"/>
               </a:spcBef>
               <a:spcAft>
-                <a:spcPts val="267"/>
+                <a:spcPts val="250"/>
               </a:spcAft>
             </a:pPr>
             <a:r>
-              <a:rPr sz="1600" lang="zh-TW" dirty="0">
-                <a:solidFill>
-                  <a:srgbClr val="000000"/>
-                </a:solidFill>
-                <a:latin typeface="Arial Unicode MS"/>
-                <a:ea typeface="Arial Unicode MS"/>
-                <a:cs typeface="Arial Unicode MS"/>
-              </a:rPr>
-              <a:t>上一張的動畫是我一個一個做給大家看的。這一張是</a:t>
-            </a:r>
-            <a:r>
-              <a:rPr sz="1600" b="1" lang="zh-TW" dirty="0">
-                <a:solidFill>
-                  <a:srgbClr val="000000"/>
-                </a:solidFill>
-                <a:latin typeface="Arial Unicode MS"/>
-                <a:ea typeface="Arial Unicode MS"/>
-                <a:cs typeface="Arial Unicode MS"/>
-              </a:rPr>
-              <a:t>真的訓練時</a:t>
-            </a:r>
-            <a:r>
-              <a:rPr sz="1600" lang="zh-TW" dirty="0">
-                <a:solidFill>
-                  <a:srgbClr val="000000"/>
-                </a:solidFill>
-                <a:latin typeface="Arial Unicode MS"/>
-                <a:ea typeface="Arial Unicode MS"/>
-                <a:cs typeface="Arial Unicode MS"/>
-              </a:rPr>
-              <a:t>，軟體自動存下來的第一批照片。
+              <a:rPr sz="1500" lang="zh-TW" dirty="0">
+                <a:solidFill>
+                  <a:srgbClr val="000000"/>
+                </a:solidFill>
+                <a:latin typeface="Arial Unicode MS"/>
+                <a:ea typeface="Arial Unicode MS"/>
+                <a:cs typeface="Arial Unicode MS"/>
+              </a:rPr>
+              <a:t>這是訓練時軟體自動記下來的兩條曲線。
 </a:t>
             </a:r>
           </a:p>
@@ -779,19 +757,52 @@
                 <a:spcPts val="0"/>
               </a:spcBef>
               <a:spcAft>
-                <a:spcPts val="267"/>
+                <a:spcPts val="250"/>
               </a:spcAft>
             </a:pPr>
             <a:r>
-              <a:rPr sz="1600" lang="zh-TW" dirty="0">
-                <a:solidFill>
-                  <a:srgbClr val="000000"/>
-                </a:solidFill>
-                <a:latin typeface="Arial Unicode MS"/>
-                <a:ea typeface="Arial Unicode MS"/>
-                <a:cs typeface="Arial Unicode MS"/>
-              </a:rPr>
-              <a:t>一批有四格。看左上那一格：一張照片被縮小、往右下移，旁邊拼上了另一張照片的一角，灰色的部分是補上去的空白。右下那一格，又是四張小照片拼在一起。藍色的框是標註，旁邊的 0 就是三角錐。
+              <a:rPr sz="1500" b="1" lang="zh-TW" dirty="0">
+                <a:solidFill>
+                  <a:srgbClr val="000000"/>
+                </a:solidFill>
+                <a:latin typeface="Arial Unicode MS"/>
+                <a:ea typeface="Arial Unicode MS"/>
+                <a:cs typeface="Arial Unicode MS"/>
+              </a:rPr>
+              <a:t>左邊，訓練組的損失</a:t>
+            </a:r>
+            <a:r>
+              <a:rPr sz="1500" lang="zh-TW" dirty="0">
+                <a:solidFill>
+                  <a:srgbClr val="000000"/>
+                </a:solidFill>
+                <a:latin typeface="Arial Unicode MS"/>
+                <a:ea typeface="Arial Unicode MS"/>
+                <a:cs typeface="Arial Unicode MS"/>
+              </a:rPr>
+              <a:t>，就是練習題錯多少。第 1 輪是 17.6，第 20 輪 3.2，第 50 輪 2.3，</a:t>
+            </a:r>
+            <a:r>
+              <a:rPr sz="1500" b="1" lang="zh-TW" dirty="0">
+                <a:solidFill>
+                  <a:srgbClr val="000000"/>
+                </a:solidFill>
+                <a:latin typeface="Arial Unicode MS"/>
+                <a:ea typeface="Arial Unicode MS"/>
+                <a:cs typeface="Arial Unicode MS"/>
+              </a:rPr>
+              <a:t>一路往下</a:t>
+            </a:r>
+            <a:r>
+              <a:rPr sz="1500" lang="zh-TW" dirty="0">
+                <a:solidFill>
+                  <a:srgbClr val="000000"/>
+                </a:solidFill>
+                <a:latin typeface="Arial Unicode MS"/>
+                <a:ea typeface="Arial Unicode MS"/>
+                <a:cs typeface="Arial Unicode MS"/>
+              </a:rPr>
+              <a:t>。練習題愈做愈熟。
 </a:t>
             </a:r>
           </a:p>
@@ -801,19 +812,118 @@
                 <a:spcPts val="0"/>
               </a:spcBef>
               <a:spcAft>
-                <a:spcPts val="267"/>
+                <a:spcPts val="250"/>
               </a:spcAft>
             </a:pPr>
             <a:r>
-              <a:rPr sz="1600" lang="zh-TW" dirty="0">
-                <a:solidFill>
-                  <a:srgbClr val="000000"/>
-                </a:solidFill>
-                <a:latin typeface="Arial Unicode MS"/>
-                <a:ea typeface="Arial Unicode MS"/>
-                <a:cs typeface="Arial Unicode MS"/>
-              </a:rPr>
-              <a:t>四張拼一張、翻轉、變色、縮放，全部是隨機的，而且同時發生。所以模型練的時候，看到的照片常常比真實的路況還要奇怪。這是故意的：練習時題目變化多一點、難一點，正式上路碰到沒看過的樣子，才比較不會慌。</a:t>
+              <a:rPr sz="1500" b="1" lang="zh-TW" dirty="0">
+                <a:solidFill>
+                  <a:srgbClr val="000000"/>
+                </a:solidFill>
+                <a:latin typeface="Arial Unicode MS"/>
+                <a:ea typeface="Arial Unicode MS"/>
+                <a:cs typeface="Arial Unicode MS"/>
+              </a:rPr>
+              <a:t>右邊，驗證組的成績</a:t>
+            </a:r>
+            <a:r>
+              <a:rPr sz="1500" lang="zh-TW" dirty="0">
+                <a:solidFill>
+                  <a:srgbClr val="000000"/>
+                </a:solidFill>
+                <a:latin typeface="Arial Unicode MS"/>
+                <a:ea typeface="Arial Unicode MS"/>
+                <a:cs typeface="Arial Unicode MS"/>
+              </a:rPr>
+              <a:t>，就是模擬考。驗證組有 13 個三角錐，這條線是每一輪找到幾成。一開始兩、三成，中間有幾輪掉到 0，後來慢慢往上，</a:t>
+            </a:r>
+            <a:r>
+              <a:rPr sz="1500" b="1" lang="zh-TW" dirty="0">
+                <a:solidFill>
+                  <a:srgbClr val="000000"/>
+                </a:solidFill>
+                <a:latin typeface="Arial Unicode MS"/>
+                <a:ea typeface="Arial Unicode MS"/>
+                <a:cs typeface="Arial Unicode MS"/>
+              </a:rPr>
+              <a:t>第 35 到 38 輪最高，54%</a:t>
+            </a:r>
+            <a:r>
+              <a:rPr sz="1500" lang="zh-TW" dirty="0">
+                <a:solidFill>
+                  <a:srgbClr val="000000"/>
+                </a:solidFill>
+                <a:latin typeface="Arial Unicode MS"/>
+                <a:ea typeface="Arial Unicode MS"/>
+                <a:cs typeface="Arial Unicode MS"/>
+              </a:rPr>
+              <a:t>。可是再練下去，反而往下掉，第 50 輪只剩 15%。
+</a:t>
+            </a:r>
+          </a:p>
+          <a:p>
+            <a:pPr algn="l">
+              <a:spcBef>
+                <a:spcPts val="0"/>
+              </a:spcBef>
+              <a:spcAft>
+                <a:spcPts val="250"/>
+              </a:spcAft>
+            </a:pPr>
+            <a:r>
+              <a:rPr sz="1500" lang="zh-TW" dirty="0">
+                <a:solidFill>
+                  <a:srgbClr val="000000"/>
+                </a:solidFill>
+                <a:latin typeface="Arial Unicode MS"/>
+                <a:ea typeface="Arial Unicode MS"/>
+                <a:cs typeface="Arial Unicode MS"/>
+              </a:rPr>
+              <a:t>為什麼練習題一直進步，模擬考反而退步？下一張說。
+</a:t>
+            </a:r>
+          </a:p>
+          <a:p>
+            <a:pPr algn="l">
+              <a:spcBef>
+                <a:spcPts val="0"/>
+              </a:spcBef>
+              <a:spcAft>
+                <a:spcPts val="250"/>
+              </a:spcAft>
+            </a:pPr>
+            <a:r>
+              <a:rPr sz="1500" lang="zh-TW" dirty="0">
+                <a:solidFill>
+                  <a:srgbClr val="000000"/>
+                </a:solidFill>
+                <a:latin typeface="Arial Unicode MS"/>
+                <a:ea typeface="Arial Unicode MS"/>
+                <a:cs typeface="Arial Unicode MS"/>
+              </a:rPr>
+              <a:t>先看那條白線：第 35 輪。軟體每一輪都會算驗證組的綜合分數，自動把分數最高那一輪存起來，就是第 35 輪。第二節用的模型，就是這一輪。
+</a:t>
+            </a:r>
+          </a:p>
+          <a:p>
+            <a:pPr algn="l">
+              <a:spcBef>
+                <a:spcPts val="0"/>
+              </a:spcBef>
+              <a:spcAft>
+                <a:spcPts val="250"/>
+              </a:spcAft>
+            </a:pPr>
+            <a:r>
+              <a:rPr sz="1500" lang="zh-TW" dirty="0">
+                <a:solidFill>
+                  <a:srgbClr val="000000"/>
+                </a:solidFill>
+                <a:latin typeface="Arial Unicode MS"/>
+                <a:ea typeface="Arial Unicode MS"/>
+                <a:cs typeface="Arial Unicode MS"/>
+              </a:rPr>
+              <a:t>這裡要提醒一點：驗證組只有 13 個三角錐，多找到或少找到一個，成績就差 8%，所以這條線跳得很厲害。驗證組太小，是這次實驗的限制；真正做的時候，驗證組要大很多。</a:t>
             </a:r>
           </a:p>
         </p:txBody>
@@ -945,7 +1055,7 @@
                 <a:ea typeface="Arial Unicode MS"/>
                 <a:cs typeface="Arial Unicode MS"/>
               </a:rPr>
-              <a:t>讓大家自己想一想，資料增強不是變得愈多愈好；變化要合理，要是真的上路時可能碰到的樣子。
+              <a:t>讓大家知道什麼是「練過頭」：模型把訓練照片的細節背了起來，換成沒看過的照片反而做得比較差；這也是為什麼要用驗證組挑出最好的一輪。
 </a:t>
             </a:r>
           </a:p>
@@ -967,7 +1077,7 @@
                 <a:ea typeface="Arial Unicode MS"/>
                 <a:cs typeface="Arial Unicode MS"/>
               </a:rPr>
-              <a:t>請大家想三個問題，我會請幾位同學回答。
+              <a:t>上一張的問題：練習題一直進步，模擬考為什麼退步？
 </a:t>
             </a:r>
           </a:p>
@@ -981,17 +1091,6 @@
               </a:spcAft>
             </a:pPr>
             <a:r>
-              <a:rPr sz="1600" b="1" lang="zh-TW" dirty="0">
-                <a:solidFill>
-                  <a:srgbClr val="000000"/>
-                </a:solidFill>
-                <a:latin typeface="Arial Unicode MS"/>
-                <a:ea typeface="Arial Unicode MS"/>
-                <a:cs typeface="Arial Unicode MS"/>
-              </a:rPr>
-              <a:t>第一題，左右翻轉。</a:t>
-            </a:r>
-            <a:r>
               <a:rPr sz="1600" lang="zh-TW" dirty="0">
                 <a:solidFill>
                   <a:srgbClr val="000000"/>
@@ -1000,29 +1099,7 @@
                 <a:ea typeface="Arial Unicode MS"/>
                 <a:cs typeface="Arial Unicode MS"/>
               </a:rPr>
-              <a:t>教三角錐，翻過來沒有問題：三角錐左右是對稱的，翻過來還是三角錐。我們要模型學的是「三角錐長什麼樣子」，不是車子靠哪一邊開。可是如果要教的是</a:t>
-            </a:r>
-            <a:r>
-              <a:rPr sz="1600" b="1" lang="zh-TW" dirty="0">
-                <a:solidFill>
-                  <a:srgbClr val="000000"/>
-                </a:solidFill>
-                <a:latin typeface="Arial Unicode MS"/>
-                <a:ea typeface="Arial Unicode MS"/>
-                <a:cs typeface="Arial Unicode MS"/>
-              </a:rPr>
-              <a:t>交通標誌</a:t>
-            </a:r>
-            <a:r>
-              <a:rPr sz="1600" lang="zh-TW" dirty="0">
-                <a:solidFill>
-                  <a:srgbClr val="000000"/>
-                </a:solidFill>
-                <a:latin typeface="Arial Unicode MS"/>
-                <a:ea typeface="Arial Unicode MS"/>
-                <a:cs typeface="Arial Unicode MS"/>
-              </a:rPr>
-              <a:t>，就要小心：「左轉」的箭頭翻過來，就變成「右轉」；標誌上的字翻過來，也變成反的。那就等於教錯了。所以要不要翻轉，要看你教的是什麼。
+              <a:t>想像一個同學準備考試，只寫同一本考古題。寫第一遍，他學到觀念；寫到第十遍，他已經記得「第 3 題答案是 B」「第 7 題答案是 C」。考古題他每一題都對，可是期中考換了新題目，他反而不會，因為他記的是答案，不是觀念。
 </a:t>
             </a:r>
           </a:p>
@@ -1036,6 +1113,17 @@
               </a:spcAft>
             </a:pPr>
             <a:r>
+              <a:rPr sz="1600" lang="zh-TW" dirty="0">
+                <a:solidFill>
+                  <a:srgbClr val="000000"/>
+                </a:solidFill>
+                <a:latin typeface="Arial Unicode MS"/>
+                <a:ea typeface="Arial Unicode MS"/>
+                <a:cs typeface="Arial Unicode MS"/>
+              </a:rPr>
+              <a:t>模型也會這樣。30 張照片看了 50 次以後，它開始記住這 30 張照片的細節：新加坡那段路的顏色、那幾個三角錐擺的位置。它在練習題上錯得愈來愈少，可是換到波士頓的照片，就認不太出來了。這叫</a:t>
+            </a:r>
+            <a:r>
               <a:rPr sz="1600" b="1" lang="zh-TW" dirty="0">
                 <a:solidFill>
                   <a:srgbClr val="000000"/>
@@ -1044,7 +1132,7 @@
                 <a:ea typeface="Arial Unicode MS"/>
                 <a:cs typeface="Arial Unicode MS"/>
               </a:rPr>
-              <a:t>第二題，上下翻轉。</a:t>
+              <a:t>過度擬合</a:t>
             </a:r>
             <a:r>
               <a:rPr sz="1600" lang="zh-TW" dirty="0">
@@ -1055,7 +1143,7 @@
                 <a:ea typeface="Arial Unicode MS"/>
                 <a:cs typeface="Arial Unicode MS"/>
               </a:rPr>
-              <a:t>不合理。車上的相機永遠是正的，天空在上、馬路在下，真的上路不會看到倒過來的世界。用這種照片練習，只是浪費模型的力氣。Ultralytics 的預設也是不做上下翻轉。
+              <a:t>，英文叫 overfitting。
 </a:t>
             </a:r>
           </a:p>
@@ -1069,6 +1157,17 @@
               </a:spcAft>
             </a:pPr>
             <a:r>
+              <a:rPr sz="1600" lang="zh-TW" dirty="0">
+                <a:solidFill>
+                  <a:srgbClr val="000000"/>
+                </a:solidFill>
+                <a:latin typeface="Arial Unicode MS"/>
+                <a:ea typeface="Arial Unicode MS"/>
+                <a:cs typeface="Arial Unicode MS"/>
+              </a:rPr>
+              <a:t>所以我們留</a:t>
+            </a:r>
+            <a:r>
               <a:rPr sz="1600" b="1" lang="zh-TW" dirty="0">
                 <a:solidFill>
                   <a:srgbClr val="000000"/>
@@ -1077,7 +1176,7 @@
                 <a:ea typeface="Arial Unicode MS"/>
                 <a:cs typeface="Arial Unicode MS"/>
               </a:rPr>
-              <a:t>第三題，調暗。</a:t>
+              <a:t>第 35 輪</a:t>
             </a:r>
             <a:r>
               <a:rPr sz="1600" lang="zh-TW" dirty="0">
@@ -1088,7 +1187,51 @@
                 <a:ea typeface="Arial Unicode MS"/>
                 <a:cs typeface="Arial Unicode MS"/>
               </a:rPr>
-              <a:t>有一點幫助，但是不能取代真的晚上拍的照片。第六週和第八週看過夜間的照片：晚上有車燈的眩光、路燈的反光、照片的雜訊，這些不是把白天的照片調暗就會出現的。所以真正要模型晚上也認得，還是要去收晚上的照片。
+              <a:t>，不留最後一輪。拿測試照片驗證一下：90 個三角錐，第 35 輪框對 </a:t>
+            </a:r>
+            <a:r>
+              <a:rPr sz="1600" b="1" lang="zh-TW" dirty="0">
+                <a:solidFill>
+                  <a:srgbClr val="000000"/>
+                </a:solidFill>
+                <a:latin typeface="Arial Unicode MS"/>
+                <a:ea typeface="Arial Unicode MS"/>
+                <a:cs typeface="Arial Unicode MS"/>
+              </a:rPr>
+              <a:t>80 個</a:t>
+            </a:r>
+            <a:r>
+              <a:rPr sz="1600" lang="zh-TW" dirty="0">
+                <a:solidFill>
+                  <a:srgbClr val="000000"/>
+                </a:solidFill>
+                <a:latin typeface="Arial Unicode MS"/>
+                <a:ea typeface="Arial Unicode MS"/>
+                <a:cs typeface="Arial Unicode MS"/>
+              </a:rPr>
+              <a:t>，第 49 輪只框對 </a:t>
+            </a:r>
+            <a:r>
+              <a:rPr sz="1600" b="1" lang="zh-TW" dirty="0">
+                <a:solidFill>
+                  <a:srgbClr val="000000"/>
+                </a:solidFill>
+                <a:latin typeface="Arial Unicode MS"/>
+                <a:ea typeface="Arial Unicode MS"/>
+                <a:cs typeface="Arial Unicode MS"/>
+              </a:rPr>
+              <a:t>66 個</a:t>
+            </a:r>
+            <a:r>
+              <a:rPr sz="1600" lang="zh-TW" dirty="0">
+                <a:solidFill>
+                  <a:srgbClr val="000000"/>
+                </a:solidFill>
+                <a:latin typeface="Arial Unicode MS"/>
+                <a:ea typeface="Arial Unicode MS"/>
+                <a:cs typeface="Arial Unicode MS"/>
+              </a:rPr>
+              <a:t>。不過也要老實說，第 49 輪多框的也比較少，從 72 個降到 28 個，它變得比較保守：沒把握的就不框。這種「框得少、也漏得多」的取捨，第二節會再談。
 </a:t>
             </a:r>
           </a:p>
@@ -1110,7 +1253,7 @@
                 <a:ea typeface="Arial Unicode MS"/>
                 <a:cs typeface="Arial Unicode MS"/>
               </a:rPr>
-              <a:t>結論：增強是讓模型多看幾種「真的可能出現」的樣子，不是亂變。</a:t>
+              <a:t>防止練過頭的方法：照片多一點、資料增強多一點、用驗證組看什麼時候該停。</a:t>
             </a:r>
           </a:p>
         </p:txBody>
@@ -1275,7 +1418,7 @@
                 <a:ea typeface="Arial Unicode MS"/>
                 <a:cs typeface="Arial Unicode MS"/>
               </a:rPr>
-              <a:t>一個東西一個框，一個框存成一行五個數字</a:t>
+              <a:t>一個東西一個框，照片要整段影片分成三組。</a:t>
             </a:r>
             <a:r>
               <a:rPr sz="1600" lang="zh-TW" dirty="0">
@@ -1286,7 +1429,7 @@
                 <a:ea typeface="Arial Unicode MS"/>
                 <a:cs typeface="Arial Unicode MS"/>
               </a:rPr>
-              <a:t>：類別、中心 x、中心 y、寬、高。後面四個都除以照片的寬和高。
+              <a:t>訓練組是練習題，驗證組是模擬考，測試組是期中考；期中考的照片訓練時不能看，最後只考一次。
 </a:t>
             </a:r>
           </a:p>
@@ -1319,7 +1462,7 @@
                 <a:ea typeface="Arial Unicode MS"/>
                 <a:cs typeface="Arial Unicode MS"/>
               </a:rPr>
-              <a:t>照片要整段影片分成三組。</a:t>
+              <a:t>不要從零開始。</a:t>
             </a:r>
             <a:r>
               <a:rPr sz="1600" lang="zh-TW" dirty="0">
@@ -1330,7 +1473,7 @@
                 <a:ea typeface="Arial Unicode MS"/>
                 <a:cs typeface="Arial Unicode MS"/>
               </a:rPr>
-              <a:t>訓練組是練習題，驗證組是模擬考，測試組是期中考，期中考的照片訓練時不能看，最後只考一次。
+              <a:t>從一個已經用大量照片練好的模型開始，再教它新的東西。每一輪做三件事：猜、對答案、改一點點。
 </a:t>
             </a:r>
           </a:p>
@@ -1363,7 +1506,7 @@
                 <a:ea typeface="Arial Unicode MS"/>
                 <a:cs typeface="Arial Unicode MS"/>
               </a:rPr>
-              <a:t>資料增強</a:t>
+              <a:t>練過頭就是背答案。</a:t>
             </a:r>
             <a:r>
               <a:rPr sz="1600" lang="zh-TW" dirty="0">
@@ -1374,7 +1517,7 @@
                 <a:ea typeface="Arial Unicode MS"/>
                 <a:cs typeface="Arial Unicode MS"/>
               </a:rPr>
-              <a:t>讓一張照片變出很多種樣子：翻轉、調暗、改顏色、放大、拼圖。框要跟著照片一起變，變化也要是真的上路會碰到的。
+              <a:t>練習題愈來愈好，模擬考反而變差。所以留驗證組成績最好的那一輪，今天是第 35 輪。
 </a:t>
             </a:r>
           </a:p>
@@ -1396,7 +1539,7 @@
                 <a:ea typeface="Arial Unicode MS"/>
                 <a:cs typeface="Arial Unicode MS"/>
               </a:rPr>
-              <a:t>課本準備好了。休息十分鐘，第二節開始訓練。</a:t>
+              <a:t>模型練好了。休息十分鐘，第二節拿它來框新的照片，替它打分數。</a:t>
             </a:r>
           </a:p>
         </p:txBody>
@@ -1572,7 +1715,7 @@
                 <a:ea typeface="Arial Unicode MS"/>
                 <a:cs typeface="Arial Unicode MS"/>
               </a:rPr>
-              <a:t>，準備課本：照片怎麼標註，標完存成什麼樣子，照片要分成哪三組，一張照片怎麼變出很多張。</a:t>
+              <a:t>，準備資料和訓練：照片怎麼標註，要分成哪三組；模型怎麼一輪一輪學，練了 50 輪以後，要留哪一輪。</a:t>
             </a:r>
             <a:r>
               <a:rPr sz="1600" b="1" lang="zh-TW" dirty="0">
@@ -1594,7 +1737,7 @@
                 <a:ea typeface="Arial Unicode MS"/>
                 <a:cs typeface="Arial Unicode MS"/>
               </a:rPr>
-              <a:t>，訓練：模型怎麼猜、怎麼對答案、怎麼改，以及練了 50 輪以後，要留哪一輪。</a:t>
+              <a:t>，推論和打分數：一張新照片進來，模型怎麼框出東西；框得好不好，要怎麼算。</a:t>
             </a:r>
             <a:r>
               <a:rPr sz="1600" b="1" lang="zh-TW" dirty="0">
@@ -1616,7 +1759,7 @@
                 <a:ea typeface="Arial Unicode MS"/>
                 <a:cs typeface="Arial Unicode MS"/>
               </a:rPr>
-              <a:t>，推論和打分數：一張新照片進來，模型怎麼框出東西；框得好不好，要怎麼算。
+              <a:t>，追蹤：車上的相機一秒拍十幾張，車子要知道這一張的行人，就是上一張的那一個，才算得出他往哪裡走、走多快。
 </a:t>
             </a:r>
           </a:p>
@@ -1791,11 +1934,11 @@
                 <a:spcPts val="0"/>
               </a:spcBef>
               <a:spcAft>
-                <a:spcPts val="250"/>
+                <a:spcPts val="233"/>
               </a:spcAft>
             </a:pPr>
             <a:r>
-              <a:rPr sz="1500" b="1" lang="zh-TW" dirty="0">
+              <a:rPr sz="1400" b="1" lang="zh-TW" dirty="0">
                 <a:solidFill>
                   <a:srgbClr val="000000"/>
                 </a:solidFill>
@@ -1806,7 +1949,7 @@
               <a:t>這一張的目的：</a:t>
             </a:r>
             <a:r>
-              <a:rPr sz="1500" lang="zh-TW" dirty="0">
+              <a:rPr sz="1400" lang="zh-TW" dirty="0">
                 <a:solidFill>
                   <a:srgbClr val="000000"/>
                 </a:solidFill>
@@ -1824,11 +1967,11 @@
                 <a:spcPts val="0"/>
               </a:spcBef>
               <a:spcAft>
-                <a:spcPts val="250"/>
+                <a:spcPts val="233"/>
               </a:spcAft>
             </a:pPr>
             <a:r>
-              <a:rPr sz="1500" lang="zh-TW" dirty="0">
+              <a:rPr sz="1400" lang="zh-TW" dirty="0">
                 <a:solidFill>
                   <a:srgbClr val="000000"/>
                 </a:solidFill>
@@ -1846,11 +1989,11 @@
                 <a:spcPts val="0"/>
               </a:spcBef>
               <a:spcAft>
-                <a:spcPts val="250"/>
+                <a:spcPts val="233"/>
               </a:spcAft>
             </a:pPr>
             <a:r>
-              <a:rPr sz="1500" b="1" lang="zh-TW" dirty="0">
+              <a:rPr sz="1400" b="1" lang="zh-TW" dirty="0">
                 <a:solidFill>
                   <a:srgbClr val="000000"/>
                 </a:solidFill>
@@ -1861,7 +2004,7 @@
               <a:t>第一步，收照片。</a:t>
             </a:r>
             <a:r>
-              <a:rPr sz="1500" lang="zh-TW" dirty="0">
+              <a:rPr sz="1400" lang="zh-TW" dirty="0">
                 <a:solidFill>
                   <a:srgbClr val="000000"/>
                 </a:solidFill>
@@ -1872,7 +2015,7 @@
               <a:t>要教小朋友認三角錐，要先找很多張有三角錐的照片。</a:t>
             </a:r>
             <a:r>
-              <a:rPr sz="1500" b="1" lang="zh-TW" dirty="0">
+              <a:rPr sz="1400" b="1" lang="zh-TW" dirty="0">
                 <a:solidFill>
                   <a:srgbClr val="000000"/>
                 </a:solidFill>
@@ -1883,7 +2026,7 @@
               <a:t>第二步，標註。</a:t>
             </a:r>
             <a:r>
-              <a:rPr sz="1500" lang="zh-TW" dirty="0">
+              <a:rPr sz="1400" lang="zh-TW" dirty="0">
                 <a:solidFill>
                   <a:srgbClr val="000000"/>
                 </a:solidFill>
@@ -1901,11 +2044,11 @@
                 <a:spcPts val="0"/>
               </a:spcBef>
               <a:spcAft>
-                <a:spcPts val="250"/>
+                <a:spcPts val="233"/>
               </a:spcAft>
             </a:pPr>
             <a:r>
-              <a:rPr sz="1500" b="1" lang="zh-TW" dirty="0">
+              <a:rPr sz="1400" b="1" lang="zh-TW" dirty="0">
                 <a:solidFill>
                   <a:srgbClr val="000000"/>
                 </a:solidFill>
@@ -1916,7 +2059,7 @@
               <a:t>第三步，分三組。</a:t>
             </a:r>
             <a:r>
-              <a:rPr sz="1500" lang="zh-TW" dirty="0">
+              <a:rPr sz="1400" lang="zh-TW" dirty="0">
                 <a:solidFill>
                   <a:srgbClr val="000000"/>
                 </a:solidFill>
@@ -1927,7 +2070,7 @@
               <a:t>照片不能全部拿來練習，要留一些當模擬考，留一些當期中考。</a:t>
             </a:r>
             <a:r>
-              <a:rPr sz="1500" b="1" lang="zh-TW" dirty="0">
+              <a:rPr sz="1400" b="1" lang="zh-TW" dirty="0">
                 <a:solidFill>
                   <a:srgbClr val="000000"/>
                 </a:solidFill>
@@ -1938,15 +2081,15 @@
               <a:t>第四步，資料增強。</a:t>
             </a:r>
             <a:r>
-              <a:rPr sz="1500" lang="zh-TW" dirty="0">
-                <a:solidFill>
-                  <a:srgbClr val="000000"/>
-                </a:solidFill>
-                <a:latin typeface="Arial Unicode MS"/>
-                <a:ea typeface="Arial Unicode MS"/>
-                <a:cs typeface="Arial Unicode MS"/>
-              </a:rPr>
-              <a:t>同一張照片，翻過來、調暗一點、放大一點，讓他看到同一個東西的很多種樣子。
+              <a:rPr sz="1400" lang="zh-TW" dirty="0">
+                <a:solidFill>
+                  <a:srgbClr val="000000"/>
+                </a:solidFill>
+                <a:latin typeface="Arial Unicode MS"/>
+                <a:ea typeface="Arial Unicode MS"/>
+                <a:cs typeface="Arial Unicode MS"/>
+              </a:rPr>
+              <a:t>同一張照片，翻過來、調暗一點、放大一點，讓他看到同一個東西的很多種樣子。這一步今天不細講，做法放在第二節的附錄。
 </a:t>
             </a:r>
           </a:p>
@@ -1956,11 +2099,11 @@
                 <a:spcPts val="0"/>
               </a:spcBef>
               <a:spcAft>
-                <a:spcPts val="250"/>
+                <a:spcPts val="233"/>
               </a:spcAft>
             </a:pPr>
             <a:r>
-              <a:rPr sz="1500" b="1" lang="zh-TW" dirty="0">
+              <a:rPr sz="1400" b="1" lang="zh-TW" dirty="0">
                 <a:solidFill>
                   <a:srgbClr val="000000"/>
                 </a:solidFill>
@@ -1971,15 +2114,15 @@
               <a:t>第五步，訓練。</a:t>
             </a:r>
             <a:r>
-              <a:rPr sz="1500" lang="zh-TW" dirty="0">
-                <a:solidFill>
-                  <a:srgbClr val="000000"/>
-                </a:solidFill>
-                <a:latin typeface="Arial Unicode MS"/>
-                <a:ea typeface="Arial Unicode MS"/>
-                <a:cs typeface="Arial Unicode MS"/>
-              </a:rPr>
-              <a:t>這是第二節的主題：模型一次又一次地猜、對答案、修正。
+              <a:rPr sz="1400" lang="zh-TW" dirty="0">
+                <a:solidFill>
+                  <a:srgbClr val="000000"/>
+                </a:solidFill>
+                <a:latin typeface="Arial Unicode MS"/>
+                <a:ea typeface="Arial Unicode MS"/>
+                <a:cs typeface="Arial Unicode MS"/>
+              </a:rPr>
+              <a:t>模型一次又一次地猜、對答案、修正。前五步就是這一節的內容。
 </a:t>
             </a:r>
           </a:p>
@@ -1989,11 +2132,11 @@
                 <a:spcPts val="0"/>
               </a:spcBef>
               <a:spcAft>
-                <a:spcPts val="250"/>
+                <a:spcPts val="233"/>
               </a:spcAft>
             </a:pPr>
             <a:r>
-              <a:rPr sz="1500" b="1" lang="zh-TW" dirty="0">
+              <a:rPr sz="1400" b="1" lang="zh-TW" dirty="0">
                 <a:solidFill>
                   <a:srgbClr val="000000"/>
                 </a:solidFill>
@@ -2004,7 +2147,7 @@
               <a:t>第六步，推論。</a:t>
             </a:r>
             <a:r>
-              <a:rPr sz="1500" lang="zh-TW" dirty="0">
+              <a:rPr sz="1400" lang="zh-TW" dirty="0">
                 <a:solidFill>
                   <a:srgbClr val="000000"/>
                 </a:solidFill>
@@ -2015,7 +2158,7 @@
               <a:t>練好以後，給它一張從來沒看過的照片，它要自己框出三角錐。</a:t>
             </a:r>
             <a:r>
-              <a:rPr sz="1500" b="1" lang="zh-TW" dirty="0">
+              <a:rPr sz="1400" b="1" lang="zh-TW" dirty="0">
                 <a:solidFill>
                   <a:srgbClr val="000000"/>
                 </a:solidFill>
@@ -2026,15 +2169,15 @@
               <a:t>第七步，評估。</a:t>
             </a:r>
             <a:r>
-              <a:rPr sz="1500" lang="zh-TW" dirty="0">
-                <a:solidFill>
-                  <a:srgbClr val="000000"/>
-                </a:solidFill>
-                <a:latin typeface="Arial Unicode MS"/>
-                <a:ea typeface="Arial Unicode MS"/>
-                <a:cs typeface="Arial Unicode MS"/>
-              </a:rPr>
-              <a:t>拿標準答案對一對，算它框對幾個、多框幾個、漏掉幾個。這兩步是第三節的主題。
+              <a:rPr sz="1400" lang="zh-TW" dirty="0">
+                <a:solidFill>
+                  <a:srgbClr val="000000"/>
+                </a:solidFill>
+                <a:latin typeface="Arial Unicode MS"/>
+                <a:ea typeface="Arial Unicode MS"/>
+                <a:cs typeface="Arial Unicode MS"/>
+              </a:rPr>
+              <a:t>拿標準答案對一對，算它框對幾個、多框幾個、漏掉幾個。這兩步是第二節的主題。
 </a:t>
             </a:r>
           </a:p>
@@ -2044,22 +2187,22 @@
                 <a:spcPts val="0"/>
               </a:spcBef>
               <a:spcAft>
-                <a:spcPts val="250"/>
+                <a:spcPts val="233"/>
               </a:spcAft>
             </a:pPr>
             <a:r>
-              <a:rPr sz="1500" lang="zh-TW" dirty="0">
-                <a:solidFill>
-                  <a:srgbClr val="000000"/>
-                </a:solidFill>
-                <a:latin typeface="Arial Unicode MS"/>
-                <a:ea typeface="Arial Unicode MS"/>
-                <a:cs typeface="Arial Unicode MS"/>
-              </a:rPr>
-              <a:t>最後請看上面那條往回走的箭頭。評估完，一定會找到模型錯的地方：某一種照片它老是認錯。那就</a:t>
-            </a:r>
-            <a:r>
-              <a:rPr sz="1500" b="1" lang="zh-TW" dirty="0">
+              <a:rPr sz="1400" lang="zh-TW" dirty="0">
+                <a:solidFill>
+                  <a:srgbClr val="000000"/>
+                </a:solidFill>
+                <a:latin typeface="Arial Unicode MS"/>
+                <a:ea typeface="Arial Unicode MS"/>
+                <a:cs typeface="Arial Unicode MS"/>
+              </a:rPr>
+              <a:t>請看上面那條往回走的箭頭。評估完，一定會找到模型錯的地方：某一種照片它老是認錯。那就</a:t>
+            </a:r>
+            <a:r>
+              <a:rPr sz="1400" b="1" lang="zh-TW" dirty="0">
                 <a:solidFill>
                   <a:srgbClr val="000000"/>
                 </a:solidFill>
@@ -2070,15 +2213,37 @@
               <a:t>回到第一步</a:t>
             </a:r>
             <a:r>
-              <a:rPr sz="1500" lang="zh-TW" dirty="0">
-                <a:solidFill>
-                  <a:srgbClr val="000000"/>
-                </a:solidFill>
-                <a:latin typeface="Arial Unicode MS"/>
-                <a:ea typeface="Arial Unicode MS"/>
-                <a:cs typeface="Arial Unicode MS"/>
-              </a:rPr>
-              <a:t>，多收那一種照片、標好、再練一次。這個循環，業界叫它「資料引擎」，第三節最後會再講。</a:t>
+              <a:rPr sz="1400" lang="zh-TW" dirty="0">
+                <a:solidFill>
+                  <a:srgbClr val="000000"/>
+                </a:solidFill>
+                <a:latin typeface="Arial Unicode MS"/>
+                <a:ea typeface="Arial Unicode MS"/>
+                <a:cs typeface="Arial Unicode MS"/>
+              </a:rPr>
+              <a:t>，多收那一種照片、標好、再練一次。這個循環，業界叫它「資料引擎」，第二節最後會再講。
+</a:t>
+            </a:r>
+          </a:p>
+          <a:p>
+            <a:pPr algn="l">
+              <a:spcBef>
+                <a:spcPts val="0"/>
+              </a:spcBef>
+              <a:spcAft>
+                <a:spcPts val="233"/>
+              </a:spcAft>
+            </a:pPr>
+            <a:r>
+              <a:rPr sz="1400" lang="zh-TW" dirty="0">
+                <a:solidFill>
+                  <a:srgbClr val="000000"/>
+                </a:solidFill>
+                <a:latin typeface="Arial Unicode MS"/>
+                <a:ea typeface="Arial Unicode MS"/>
+                <a:cs typeface="Arial Unicode MS"/>
+              </a:rPr>
+              <a:t>最底下那一行是第三節：前面七步都是一張照片一張照片地做，第三節要把一張一張的結果串起來，叫做追蹤。</a:t>
             </a:r>
           </a:p>
         </p:txBody>
@@ -2650,7 +2815,7 @@
                 <a:ea typeface="Arial Unicode MS"/>
                 <a:cs typeface="Arial Unicode MS"/>
               </a:rPr>
-              <a:t>。第八週練習台最後那個「自己的照片」，按「下載標註」，下載下來的文字檔就是這種格式。
+              <a:t>。第八週練習台最後那個「自己的照片」，按「下載標註」，下載下來的文字檔就是這種格式。每一行有五個數字：第一個是類別，三角錐就是 0；後面四個是框的中心在哪裡、框有多寬多高。這四個數字怎麼算出來的，放在第二節最後的附錄，有興趣的同學可以自己看。
 </a:t>
             </a:r>
           </a:p>
@@ -2803,11 +2968,11 @@
                 <a:spcPts val="0"/>
               </a:spcBef>
               <a:spcAft>
-                <a:spcPts val="267"/>
+                <a:spcPts val="250"/>
               </a:spcAft>
             </a:pPr>
             <a:r>
-              <a:rPr sz="1600" b="1" lang="zh-TW" dirty="0">
+              <a:rPr sz="1500" b="1" lang="zh-TW" dirty="0">
                 <a:solidFill>
                   <a:srgbClr val="000000"/>
                 </a:solidFill>
@@ -2818,15 +2983,15 @@
               <a:t>這一張的目的：</a:t>
             </a:r>
             <a:r>
-              <a:rPr sz="1600" lang="zh-TW" dirty="0">
-                <a:solidFill>
-                  <a:srgbClr val="000000"/>
-                </a:solidFill>
-                <a:latin typeface="Arial Unicode MS"/>
-                <a:ea typeface="Arial Unicode MS"/>
-                <a:cs typeface="Arial Unicode MS"/>
-              </a:rPr>
-              <a:t>讓大家看懂一行標註裡的五個數字各是什麼，以及為什麼後面四個都是 0 到 1 之間的小數。
+              <a:rPr sz="1500" lang="zh-TW" dirty="0">
+                <a:solidFill>
+                  <a:srgbClr val="000000"/>
+                </a:solidFill>
+                <a:latin typeface="Arial Unicode MS"/>
+                <a:ea typeface="Arial Unicode MS"/>
+                <a:cs typeface="Arial Unicode MS"/>
+              </a:rPr>
+              <a:t>讓大家知道照片要分成訓練、驗證、測試三組，以及每一組的用途；最重要的是，測試組的照片在訓練時完全不能看。
 </a:t>
             </a:r>
           </a:p>
@@ -2836,19 +3001,19 @@
                 <a:spcPts val="0"/>
               </a:spcBef>
               <a:spcAft>
-                <a:spcPts val="267"/>
+                <a:spcPts val="250"/>
               </a:spcAft>
             </a:pPr>
             <a:r>
-              <a:rPr sz="1600" lang="zh-TW" dirty="0">
-                <a:solidFill>
-                  <a:srgbClr val="000000"/>
-                </a:solidFill>
-                <a:latin typeface="Arial Unicode MS"/>
-                <a:ea typeface="Arial Unicode MS"/>
-                <a:cs typeface="Arial Unicode MS"/>
-              </a:rPr>
-              <a:t>把上一張中間那個三角錐放大來看。它存成一行五個數字。
+              <a:rPr sz="1500" lang="zh-TW" dirty="0">
+                <a:solidFill>
+                  <a:srgbClr val="000000"/>
+                </a:solidFill>
+                <a:latin typeface="Arial Unicode MS"/>
+                <a:ea typeface="Arial Unicode MS"/>
+                <a:cs typeface="Arial Unicode MS"/>
+              </a:rPr>
+              <a:t>大家上週剛考完期中考，正好拿來比喻。
 </a:t>
             </a:r>
           </a:p>
@@ -2858,30 +3023,30 @@
                 <a:spcPts val="0"/>
               </a:spcBef>
               <a:spcAft>
-                <a:spcPts val="267"/>
+                <a:spcPts val="250"/>
               </a:spcAft>
             </a:pPr>
             <a:r>
-              <a:rPr sz="1600" b="1" lang="zh-TW" dirty="0">
-                <a:solidFill>
-                  <a:srgbClr val="000000"/>
-                </a:solidFill>
-                <a:latin typeface="Arial Unicode MS"/>
-                <a:ea typeface="Arial Unicode MS"/>
-                <a:cs typeface="Arial Unicode MS"/>
-              </a:rPr>
-              <a:t>第一個數字是類別。</a:t>
-            </a:r>
-            <a:r>
-              <a:rPr sz="1600" lang="zh-TW" dirty="0">
-                <a:solidFill>
-                  <a:srgbClr val="000000"/>
-                </a:solidFill>
-                <a:latin typeface="Arial Unicode MS"/>
-                <a:ea typeface="Arial Unicode MS"/>
-                <a:cs typeface="Arial Unicode MS"/>
-              </a:rPr>
-              <a:t>今天只教一種東西，三角錐就是 0。如果同時教車、行人、三角錐，就可以編成 0、1、2。
+              <a:rPr sz="1500" b="1" lang="zh-TW" dirty="0">
+                <a:solidFill>
+                  <a:srgbClr val="000000"/>
+                </a:solidFill>
+                <a:latin typeface="Arial Unicode MS"/>
+                <a:ea typeface="Arial Unicode MS"/>
+                <a:cs typeface="Arial Unicode MS"/>
+              </a:rPr>
+              <a:t>第一組，訓練組，就是練習題。</a:t>
+            </a:r>
+            <a:r>
+              <a:rPr sz="1500" lang="zh-TW" dirty="0">
+                <a:solidFill>
+                  <a:srgbClr val="000000"/>
+                </a:solidFill>
+                <a:latin typeface="Arial Unicode MS"/>
+                <a:ea typeface="Arial Unicode MS"/>
+                <a:cs typeface="Arial Unicode MS"/>
+              </a:rPr>
+              <a:t>30 張，全部是新加坡那一段施工路段。模型就是從這 30 張學的。
 </a:t>
             </a:r>
           </a:p>
@@ -2891,30 +3056,30 @@
                 <a:spcPts val="0"/>
               </a:spcBef>
               <a:spcAft>
-                <a:spcPts val="267"/>
+                <a:spcPts val="250"/>
               </a:spcAft>
             </a:pPr>
             <a:r>
-              <a:rPr sz="1600" b="1" lang="zh-TW" dirty="0">
-                <a:solidFill>
-                  <a:srgbClr val="000000"/>
-                </a:solidFill>
-                <a:latin typeface="Arial Unicode MS"/>
-                <a:ea typeface="Arial Unicode MS"/>
-                <a:cs typeface="Arial Unicode MS"/>
-              </a:rPr>
-              <a:t>第二、第三個數字，是框的中心</a:t>
-            </a:r>
-            <a:r>
-              <a:rPr sz="1600" lang="zh-TW" dirty="0">
-                <a:solidFill>
-                  <a:srgbClr val="000000"/>
-                </a:solidFill>
-                <a:latin typeface="Arial Unicode MS"/>
-                <a:ea typeface="Arial Unicode MS"/>
-                <a:cs typeface="Arial Unicode MS"/>
-              </a:rPr>
-              <a:t>，也就是右上角那個紅點的位置。這張照片寬 1600 個像素，紅點在左邊數過來第 787 個像素；787 除以 1600，等於 0.492。高度方向，紅點在第 625 個像素，照片高 900，625 除以 900，等於 0.695。
+              <a:rPr sz="1500" b="1" lang="zh-TW" dirty="0">
+                <a:solidFill>
+                  <a:srgbClr val="000000"/>
+                </a:solidFill>
+                <a:latin typeface="Arial Unicode MS"/>
+                <a:ea typeface="Arial Unicode MS"/>
+                <a:cs typeface="Arial Unicode MS"/>
+              </a:rPr>
+              <a:t>第二組，驗證組，就是模擬考。</a:t>
+            </a:r>
+            <a:r>
+              <a:rPr sz="1500" lang="zh-TW" dirty="0">
+                <a:solidFill>
+                  <a:srgbClr val="000000"/>
+                </a:solidFill>
+                <a:latin typeface="Arial Unicode MS"/>
+                <a:ea typeface="Arial Unicode MS"/>
+                <a:cs typeface="Arial Unicode MS"/>
+              </a:rPr>
+              <a:t>8 張，在波士頓拍的。第八週我們做過一份模擬考，用來知道自己準備得怎麼樣。模型也一樣：每練完一輪，就考一次模擬考，看它現在的程度。練了 50 輪以後，留模擬考成績最好的那一輪。
 </a:t>
             </a:r>
           </a:p>
@@ -2924,30 +3089,52 @@
                 <a:spcPts val="0"/>
               </a:spcBef>
               <a:spcAft>
-                <a:spcPts val="267"/>
+                <a:spcPts val="250"/>
               </a:spcAft>
             </a:pPr>
             <a:r>
-              <a:rPr sz="1600" b="1" lang="zh-TW" dirty="0">
-                <a:solidFill>
-                  <a:srgbClr val="000000"/>
-                </a:solidFill>
-                <a:latin typeface="Arial Unicode MS"/>
-                <a:ea typeface="Arial Unicode MS"/>
-                <a:cs typeface="Arial Unicode MS"/>
-              </a:rPr>
-              <a:t>第四、第五個數字，是框的寬和高。</a:t>
-            </a:r>
-            <a:r>
-              <a:rPr sz="1600" lang="zh-TW" dirty="0">
-                <a:solidFill>
-                  <a:srgbClr val="000000"/>
-                </a:solidFill>
-                <a:latin typeface="Arial Unicode MS"/>
-                <a:ea typeface="Arial Unicode MS"/>
-                <a:cs typeface="Arial Unicode MS"/>
-              </a:rPr>
-              <a:t>寬 86 個像素，除以 1600，是 0.054；高 103 個像素，除以 900，是 0.114。
+              <a:rPr sz="1500" b="1" lang="zh-TW" dirty="0">
+                <a:solidFill>
+                  <a:srgbClr val="000000"/>
+                </a:solidFill>
+                <a:latin typeface="Arial Unicode MS"/>
+                <a:ea typeface="Arial Unicode MS"/>
+                <a:cs typeface="Arial Unicode MS"/>
+              </a:rPr>
+              <a:t>第三組，測試組，就是期中考。</a:t>
+            </a:r>
+            <a:r>
+              <a:rPr sz="1500" lang="zh-TW" dirty="0">
+                <a:solidFill>
+                  <a:srgbClr val="000000"/>
+                </a:solidFill>
+                <a:latin typeface="Arial Unicode MS"/>
+                <a:ea typeface="Arial Unicode MS"/>
+                <a:cs typeface="Arial Unicode MS"/>
+              </a:rPr>
+              <a:t>17 張，也在波士頓，可是跟模擬考是不同的時間、不同的路段。這 17 張在訓練的時候，</a:t>
+            </a:r>
+            <a:r>
+              <a:rPr sz="1500" b="1" lang="zh-TW" dirty="0">
+                <a:solidFill>
+                  <a:srgbClr val="000000"/>
+                </a:solidFill>
+                <a:latin typeface="Arial Unicode MS"/>
+                <a:ea typeface="Arial Unicode MS"/>
+                <a:cs typeface="Arial Unicode MS"/>
+              </a:rPr>
+              <a:t>模型一張都沒看過</a:t>
+            </a:r>
+            <a:r>
+              <a:rPr sz="1500" lang="zh-TW" dirty="0">
+                <a:solidFill>
+                  <a:srgbClr val="000000"/>
+                </a:solidFill>
+                <a:latin typeface="Arial Unicode MS"/>
+                <a:ea typeface="Arial Unicode MS"/>
+                <a:cs typeface="Arial Unicode MS"/>
+              </a:rPr>
+              <a:t>，最後才拿出來考一次。
 </a:t>
             </a:r>
           </a:p>
@@ -2957,19 +3144,41 @@
                 <a:spcPts val="0"/>
               </a:spcBef>
               <a:spcAft>
-                <a:spcPts val="267"/>
+                <a:spcPts val="250"/>
               </a:spcAft>
             </a:pPr>
             <a:r>
-              <a:rPr sz="1600" lang="zh-TW" dirty="0">
-                <a:solidFill>
-                  <a:srgbClr val="000000"/>
-                </a:solidFill>
-                <a:latin typeface="Arial Unicode MS"/>
-                <a:ea typeface="Arial Unicode MS"/>
-                <a:cs typeface="Arial Unicode MS"/>
-              </a:rPr>
-              <a:t>為什麼都要除以照片的寬和高？因為訓練的時候，照片會被縮小、放大。如果記的是像素，照片一縮小，數字就全部不對了。記成比例，就像說「紅點在照片寬度的一半左右」，照片放多大，這句話都還是對的。</a:t>
+              <a:rPr sz="1500" lang="zh-TW" dirty="0">
+                <a:solidFill>
+                  <a:srgbClr val="000000"/>
+                </a:solidFill>
+                <a:latin typeface="Arial Unicode MS"/>
+                <a:ea typeface="Arial Unicode MS"/>
+                <a:cs typeface="Arial Unicode MS"/>
+              </a:rPr>
+              <a:t>為什麼期中考的題目不能先給大家看？因為看過了，考出來的分數就不能代表你真的會。模型也一樣：考它看過的照片，它可能只是背起來了。所以測試組只能在最後用，而且只能用一次。
+</a:t>
+            </a:r>
+          </a:p>
+          <a:p>
+            <a:pPr algn="l">
+              <a:spcBef>
+                <a:spcPts val="0"/>
+              </a:spcBef>
+              <a:spcAft>
+                <a:spcPts val="250"/>
+              </a:spcAft>
+            </a:pPr>
+            <a:r>
+              <a:rPr sz="1500" lang="zh-TW" dirty="0">
+                <a:solidFill>
+                  <a:srgbClr val="000000"/>
+                </a:solidFill>
+                <a:latin typeface="Arial Unicode MS"/>
+                <a:ea typeface="Arial Unicode MS"/>
+                <a:cs typeface="Arial Unicode MS"/>
+              </a:rPr>
+              <a:t>還有一點：練習題在新加坡，考試在波士頓。兩個城市的路、天氣、三角錐擺的方式都不一樣。這樣考，才知道模型換了地方還行不行。</a:t>
             </a:r>
           </a:p>
         </p:txBody>
@@ -3078,11 +3287,11 @@
                 <a:spcPts val="0"/>
               </a:spcBef>
               <a:spcAft>
-                <a:spcPts val="250"/>
+                <a:spcPts val="267"/>
               </a:spcAft>
             </a:pPr>
             <a:r>
-              <a:rPr sz="1500" b="1" lang="zh-TW" dirty="0">
+              <a:rPr sz="1600" b="1" lang="zh-TW" dirty="0">
                 <a:solidFill>
                   <a:srgbClr val="000000"/>
                 </a:solidFill>
@@ -3093,15 +3302,15 @@
               <a:t>這一張的目的：</a:t>
             </a:r>
             <a:r>
-              <a:rPr sz="1500" lang="zh-TW" dirty="0">
-                <a:solidFill>
-                  <a:srgbClr val="000000"/>
-                </a:solidFill>
-                <a:latin typeface="Arial Unicode MS"/>
-                <a:ea typeface="Arial Unicode MS"/>
-                <a:cs typeface="Arial Unicode MS"/>
-              </a:rPr>
-              <a:t>讓大家知道照片要分成訓練、驗證、測試三組，以及每一組的用途；最重要的是，測試組的照片在訓練時完全不能看。
+              <a:rPr sz="1600" lang="zh-TW" dirty="0">
+                <a:solidFill>
+                  <a:srgbClr val="000000"/>
+                </a:solidFill>
+                <a:latin typeface="Arial Unicode MS"/>
+                <a:ea typeface="Arial Unicode MS"/>
+                <a:cs typeface="Arial Unicode MS"/>
+              </a:rPr>
+              <a:t>讓大家知道分組的時候，同一段影片的照片要放在同一組；如果把照片打散了隨便分，考試成績會比真正的程度好看很多。
 </a:t>
             </a:r>
           </a:p>
@@ -3111,19 +3320,63 @@
                 <a:spcPts val="0"/>
               </a:spcBef>
               <a:spcAft>
-                <a:spcPts val="250"/>
+                <a:spcPts val="267"/>
               </a:spcAft>
             </a:pPr>
             <a:r>
-              <a:rPr sz="1500" lang="zh-TW" dirty="0">
-                <a:solidFill>
-                  <a:srgbClr val="000000"/>
-                </a:solidFill>
-                <a:latin typeface="Arial Unicode MS"/>
-                <a:ea typeface="Arial Unicode MS"/>
-                <a:cs typeface="Arial Unicode MS"/>
-              </a:rPr>
-              <a:t>大家上週剛考完期中考，正好拿來比喻。
+              <a:rPr sz="1600" lang="zh-TW" dirty="0">
+                <a:solidFill>
+                  <a:srgbClr val="000000"/>
+                </a:solidFill>
+                <a:latin typeface="Arial Unicode MS"/>
+                <a:ea typeface="Arial Unicode MS"/>
+                <a:cs typeface="Arial Unicode MS"/>
+              </a:rPr>
+              <a:t>看這兩張照片。左邊是 scene-0061 的第 21 個畫面，右邊是第 22 個畫面。nuScenes 每 </a:t>
+            </a:r>
+            <a:r>
+              <a:rPr sz="1600" b="1" lang="zh-TW" dirty="0">
+                <a:solidFill>
+                  <a:srgbClr val="000000"/>
+                </a:solidFill>
+                <a:latin typeface="Arial Unicode MS"/>
+                <a:ea typeface="Arial Unicode MS"/>
+                <a:cs typeface="Arial Unicode MS"/>
+              </a:rPr>
+              <a:t>0.5 秒</a:t>
+            </a:r>
+            <a:r>
+              <a:rPr sz="1600" lang="zh-TW" dirty="0">
+                <a:solidFill>
+                  <a:srgbClr val="000000"/>
+                </a:solidFill>
+                <a:latin typeface="Arial Unicode MS"/>
+                <a:ea typeface="Arial Unicode MS"/>
+                <a:cs typeface="Arial Unicode MS"/>
+              </a:rPr>
+              <a:t>標一次，所以這兩張只差半秒。車子往前開了幾公尺，三角錐還是那些三角錐，</a:t>
+            </a:r>
+            <a:r>
+              <a:rPr sz="1600" b="1" lang="zh-TW" dirty="0">
+                <a:solidFill>
+                  <a:srgbClr val="000000"/>
+                </a:solidFill>
+                <a:latin typeface="Arial Unicode MS"/>
+                <a:ea typeface="Arial Unicode MS"/>
+                <a:cs typeface="Arial Unicode MS"/>
+              </a:rPr>
+              <a:t>幾乎一模一樣。</a:t>
+            </a:r>
+            <a:r>
+              <a:rPr sz="1600" lang="zh-TW" dirty="0">
+                <a:solidFill>
+                  <a:srgbClr val="000000"/>
+                </a:solidFill>
+                <a:latin typeface="Arial Unicode MS"/>
+                <a:ea typeface="Arial Unicode MS"/>
+                <a:cs typeface="Arial Unicode MS"/>
+              </a:rPr>
+              <a:t>
 </a:t>
             </a:r>
           </a:p>
@@ -3133,30 +3386,19 @@
                 <a:spcPts val="0"/>
               </a:spcBef>
               <a:spcAft>
-                <a:spcPts val="250"/>
+                <a:spcPts val="267"/>
               </a:spcAft>
             </a:pPr>
             <a:r>
-              <a:rPr sz="1500" b="1" lang="zh-TW" dirty="0">
-                <a:solidFill>
-                  <a:srgbClr val="000000"/>
-                </a:solidFill>
-                <a:latin typeface="Arial Unicode MS"/>
-                <a:ea typeface="Arial Unicode MS"/>
-                <a:cs typeface="Arial Unicode MS"/>
-              </a:rPr>
-              <a:t>第一組，訓練組，就是練習題。</a:t>
-            </a:r>
-            <a:r>
-              <a:rPr sz="1500" lang="zh-TW" dirty="0">
-                <a:solidFill>
-                  <a:srgbClr val="000000"/>
-                </a:solidFill>
-                <a:latin typeface="Arial Unicode MS"/>
-                <a:ea typeface="Arial Unicode MS"/>
-                <a:cs typeface="Arial Unicode MS"/>
-              </a:rPr>
-              <a:t>30 張，全部是新加坡那一段施工路段。模型就是從這 30 張學的。
+              <a:rPr sz="1600" lang="zh-TW" dirty="0">
+                <a:solidFill>
+                  <a:srgbClr val="000000"/>
+                </a:solidFill>
+                <a:latin typeface="Arial Unicode MS"/>
+                <a:ea typeface="Arial Unicode MS"/>
+                <a:cs typeface="Arial Unicode MS"/>
+              </a:rPr>
+              <a:t>假設我把這一段影片的照片打散，隨便抽幾張當練習題，剩下的當考題。那第 21 個畫面在練習題，第 22 個畫面在考卷上。模型考到第 22 個畫面，其實等於在考它練習過的題目。成績當然很好，可是那不是真的會，只是看過。
 </a:t>
             </a:r>
           </a:p>
@@ -3166,30 +3408,19 @@
                 <a:spcPts val="0"/>
               </a:spcBef>
               <a:spcAft>
-                <a:spcPts val="250"/>
+                <a:spcPts val="267"/>
               </a:spcAft>
             </a:pPr>
             <a:r>
-              <a:rPr sz="1500" b="1" lang="zh-TW" dirty="0">
-                <a:solidFill>
-                  <a:srgbClr val="000000"/>
-                </a:solidFill>
-                <a:latin typeface="Arial Unicode MS"/>
-                <a:ea typeface="Arial Unicode MS"/>
-                <a:cs typeface="Arial Unicode MS"/>
-              </a:rPr>
-              <a:t>第二組，驗證組，就是模擬考。</a:t>
-            </a:r>
-            <a:r>
-              <a:rPr sz="1500" lang="zh-TW" dirty="0">
-                <a:solidFill>
-                  <a:srgbClr val="000000"/>
-                </a:solidFill>
-                <a:latin typeface="Arial Unicode MS"/>
-                <a:ea typeface="Arial Unicode MS"/>
-                <a:cs typeface="Arial Unicode MS"/>
-              </a:rPr>
-              <a:t>8 張，在波士頓拍的。第八週我們做過一份模擬考，用來知道自己準備得怎麼樣。模型也一樣：每練完一輪，就考一次模擬考，看它現在的程度。練了 50 輪以後，留模擬考成績最好的那一輪。
+              <a:rPr sz="1600" lang="zh-TW" dirty="0">
+                <a:solidFill>
+                  <a:srgbClr val="000000"/>
+                </a:solidFill>
+                <a:latin typeface="Arial Unicode MS"/>
+                <a:ea typeface="Arial Unicode MS"/>
+                <a:cs typeface="Arial Unicode MS"/>
+              </a:rPr>
+              <a:t>這就像老師出期中考，把練習題改一個數字就拿來考，大家都考很好，但是換一題真的新的就不會。
 </a:t>
             </a:r>
           </a:p>
@@ -3199,96 +3430,41 @@
                 <a:spcPts val="0"/>
               </a:spcBef>
               <a:spcAft>
-                <a:spcPts val="250"/>
+                <a:spcPts val="267"/>
               </a:spcAft>
             </a:pPr>
             <a:r>
-              <a:rPr sz="1500" b="1" lang="zh-TW" dirty="0">
-                <a:solidFill>
-                  <a:srgbClr val="000000"/>
-                </a:solidFill>
-                <a:latin typeface="Arial Unicode MS"/>
-                <a:ea typeface="Arial Unicode MS"/>
-                <a:cs typeface="Arial Unicode MS"/>
-              </a:rPr>
-              <a:t>第三組，測試組，就是期中考。</a:t>
-            </a:r>
-            <a:r>
-              <a:rPr sz="1500" lang="zh-TW" dirty="0">
-                <a:solidFill>
-                  <a:srgbClr val="000000"/>
-                </a:solidFill>
-                <a:latin typeface="Arial Unicode MS"/>
-                <a:ea typeface="Arial Unicode MS"/>
-                <a:cs typeface="Arial Unicode MS"/>
-              </a:rPr>
-              <a:t>17 張，也在波士頓，可是跟模擬考是不同的時間、不同的路段。這 17 張在訓練的時候，</a:t>
-            </a:r>
-            <a:r>
-              <a:rPr sz="1500" b="1" lang="zh-TW" dirty="0">
-                <a:solidFill>
-                  <a:srgbClr val="000000"/>
-                </a:solidFill>
-                <a:latin typeface="Arial Unicode MS"/>
-                <a:ea typeface="Arial Unicode MS"/>
-                <a:cs typeface="Arial Unicode MS"/>
-              </a:rPr>
-              <a:t>模型一張都沒看過</a:t>
-            </a:r>
-            <a:r>
-              <a:rPr sz="1500" lang="zh-TW" dirty="0">
-                <a:solidFill>
-                  <a:srgbClr val="000000"/>
-                </a:solidFill>
-                <a:latin typeface="Arial Unicode MS"/>
-                <a:ea typeface="Arial Unicode MS"/>
-                <a:cs typeface="Arial Unicode MS"/>
-              </a:rPr>
-              <a:t>，最後才拿出來考一次。
-</a:t>
-            </a:r>
-          </a:p>
-          <a:p>
-            <a:pPr algn="l">
-              <a:spcBef>
-                <a:spcPts val="0"/>
-              </a:spcBef>
-              <a:spcAft>
-                <a:spcPts val="250"/>
-              </a:spcAft>
-            </a:pPr>
-            <a:r>
-              <a:rPr sz="1500" lang="zh-TW" dirty="0">
-                <a:solidFill>
-                  <a:srgbClr val="000000"/>
-                </a:solidFill>
-                <a:latin typeface="Arial Unicode MS"/>
-                <a:ea typeface="Arial Unicode MS"/>
-                <a:cs typeface="Arial Unicode MS"/>
-              </a:rPr>
-              <a:t>為什麼期中考的題目不能先給大家看？因為看過了，考出來的分數就不能代表你真的會。模型也一樣：考它看過的照片，它可能只是背起來了。所以測試組只能在最後用，而且只能用一次。
-</a:t>
-            </a:r>
-          </a:p>
-          <a:p>
-            <a:pPr algn="l">
-              <a:spcBef>
-                <a:spcPts val="0"/>
-              </a:spcBef>
-              <a:spcAft>
-                <a:spcPts val="250"/>
-              </a:spcAft>
-            </a:pPr>
-            <a:r>
-              <a:rPr sz="1500" lang="zh-TW" dirty="0">
-                <a:solidFill>
-                  <a:srgbClr val="000000"/>
-                </a:solidFill>
-                <a:latin typeface="Arial Unicode MS"/>
-                <a:ea typeface="Arial Unicode MS"/>
-                <a:cs typeface="Arial Unicode MS"/>
-              </a:rPr>
-              <a:t>還有一點：練習題在新加坡，考試在波士頓。兩個城市的路、天氣、三角錐擺的方式都不一樣。這樣考，才知道模型換了地方還行不行。</a:t>
+              <a:rPr sz="1600" lang="zh-TW" dirty="0">
+                <a:solidFill>
+                  <a:srgbClr val="000000"/>
+                </a:solidFill>
+                <a:latin typeface="Arial Unicode MS"/>
+                <a:ea typeface="Arial Unicode MS"/>
+                <a:cs typeface="Arial Unicode MS"/>
+              </a:rPr>
+              <a:t>所以今天的做法是：</a:t>
+            </a:r>
+            <a:r>
+              <a:rPr sz="1600" b="1" lang="zh-TW" dirty="0">
+                <a:solidFill>
+                  <a:srgbClr val="000000"/>
+                </a:solidFill>
+                <a:latin typeface="Arial Unicode MS"/>
+                <a:ea typeface="Arial Unicode MS"/>
+                <a:cs typeface="Arial Unicode MS"/>
+              </a:rPr>
+              <a:t>整段影片分在同一組。</a:t>
+            </a:r>
+            <a:r>
+              <a:rPr sz="1600" lang="zh-TW" dirty="0">
+                <a:solidFill>
+                  <a:srgbClr val="000000"/>
+                </a:solidFill>
+                <a:latin typeface="Arial Unicode MS"/>
+                <a:ea typeface="Arial Unicode MS"/>
+                <a:cs typeface="Arial Unicode MS"/>
+              </a:rPr>
+              <a:t>新加坡那一整段是練習題，波士頓那一段拿來考。真正的研究和公司也都這樣做，nuScenes 官方提供的訓練組、測試組，也是整段影片分開的。</a:t>
             </a:r>
           </a:p>
         </p:txBody>
@@ -3420,7 +3596,7 @@
                 <a:ea typeface="Arial Unicode MS"/>
                 <a:cs typeface="Arial Unicode MS"/>
               </a:rPr>
-              <a:t>讓大家知道分組的時候，同一段影片的照片要放在同一組；如果把照片打散了隨便分，考試成績會比真正的程度好看很多。
+              <a:t>讓大家知道，30 張照片從零開始練，模型什麼都學不會；所以實際的做法，是從一個已經用大量照片練好的模型開始，再教它新的東西。
 </a:t>
             </a:r>
           </a:p>
@@ -3442,51 +3618,7 @@
                 <a:ea typeface="Arial Unicode MS"/>
                 <a:cs typeface="Arial Unicode MS"/>
               </a:rPr>
-              <a:t>看這兩張照片。左邊是 scene-0061 的第 21 個畫面，右邊是第 22 個畫面。nuScenes 每 </a:t>
-            </a:r>
-            <a:r>
-              <a:rPr sz="1600" b="1" lang="zh-TW" dirty="0">
-                <a:solidFill>
-                  <a:srgbClr val="000000"/>
-                </a:solidFill>
-                <a:latin typeface="Arial Unicode MS"/>
-                <a:ea typeface="Arial Unicode MS"/>
-                <a:cs typeface="Arial Unicode MS"/>
-              </a:rPr>
-              <a:t>0.5 秒</a:t>
-            </a:r>
-            <a:r>
-              <a:rPr sz="1600" lang="zh-TW" dirty="0">
-                <a:solidFill>
-                  <a:srgbClr val="000000"/>
-                </a:solidFill>
-                <a:latin typeface="Arial Unicode MS"/>
-                <a:ea typeface="Arial Unicode MS"/>
-                <a:cs typeface="Arial Unicode MS"/>
-              </a:rPr>
-              <a:t>標一次，所以這兩張只差半秒。車子往前開了幾公尺，三角錐還是那些三角錐，</a:t>
-            </a:r>
-            <a:r>
-              <a:rPr sz="1600" b="1" lang="zh-TW" dirty="0">
-                <a:solidFill>
-                  <a:srgbClr val="000000"/>
-                </a:solidFill>
-                <a:latin typeface="Arial Unicode MS"/>
-                <a:ea typeface="Arial Unicode MS"/>
-                <a:cs typeface="Arial Unicode MS"/>
-              </a:rPr>
-              <a:t>幾乎一模一樣。</a:t>
-            </a:r>
-            <a:r>
-              <a:rPr sz="1600" lang="zh-TW" dirty="0">
-                <a:solidFill>
-                  <a:srgbClr val="000000"/>
-                </a:solidFill>
-                <a:latin typeface="Arial Unicode MS"/>
-                <a:ea typeface="Arial Unicode MS"/>
-                <a:cs typeface="Arial Unicode MS"/>
-              </a:rPr>
-              <a:t>
+              <a:t>課本準備好了，接下來開始訓練。先回答一個問題：只有 30 張照片，夠嗎？
 </a:t>
             </a:r>
           </a:p>
@@ -3508,7 +3640,51 @@
                 <a:ea typeface="Arial Unicode MS"/>
                 <a:cs typeface="Arial Unicode MS"/>
               </a:rPr>
-              <a:t>假設我把這一段影片的照片打散，隨便抽幾張當練習題，剩下的當考題。那第 21 個畫面在練習題，第 22 個畫面在考卷上。模型考到第 22 個畫面，其實等於在考它練習過的題目。成績當然很好，可是那不是真的會，只是看過。
+              <a:t>我真的試過。拿一個</a:t>
+            </a:r>
+            <a:r>
+              <a:rPr sz="1600" b="1" lang="zh-TW" dirty="0">
+                <a:solidFill>
+                  <a:srgbClr val="000000"/>
+                </a:solidFill>
+                <a:latin typeface="Arial Unicode MS"/>
+                <a:ea typeface="Arial Unicode MS"/>
+                <a:cs typeface="Arial Unicode MS"/>
+              </a:rPr>
+              <a:t>從零開始</a:t>
+            </a:r>
+            <a:r>
+              <a:rPr sz="1600" lang="zh-TW" dirty="0">
+                <a:solidFill>
+                  <a:srgbClr val="000000"/>
+                </a:solidFill>
+                <a:latin typeface="Arial Unicode MS"/>
+                <a:ea typeface="Arial Unicode MS"/>
+                <a:cs typeface="Arial Unicode MS"/>
+              </a:rPr>
+              <a:t>的模型，也就是裡面的參數全部是亂數，什麼都還沒學過，用 30 張照片教它認車和行人，練 50 輪。然後拿 10 張它沒看過的照片考它，照片裡車、行人、機車和腳踏車一共 53 個。結果，</a:t>
+            </a:r>
+            <a:r>
+              <a:rPr sz="1600" b="1" lang="zh-TW" dirty="0">
+                <a:solidFill>
+                  <a:srgbClr val="000000"/>
+                </a:solidFill>
+                <a:latin typeface="Arial Unicode MS"/>
+                <a:ea typeface="Arial Unicode MS"/>
+                <a:cs typeface="Arial Unicode MS"/>
+              </a:rPr>
+              <a:t>框對 0 個。</a:t>
+            </a:r>
+            <a:r>
+              <a:rPr sz="1600" lang="zh-TW" dirty="0">
+                <a:solidFill>
+                  <a:srgbClr val="000000"/>
+                </a:solidFill>
+                <a:latin typeface="Arial Unicode MS"/>
+                <a:ea typeface="Arial Unicode MS"/>
+                <a:cs typeface="Arial Unicode MS"/>
+              </a:rPr>
+              <a:t>30 張照片，對一個什麼都不會的模型來說太少了。
 </a:t>
             </a:r>
           </a:p>
@@ -3530,7 +3706,7 @@
                 <a:ea typeface="Arial Unicode MS"/>
                 <a:cs typeface="Arial Unicode MS"/>
               </a:rPr>
-              <a:t>這就像老師出期中考，把練習題改一個數字就拿來考，大家都考很好，但是換一題真的新的就不會。
+              <a:t>第八週講過，模型的第一層學的是最小的「筆畫」：邊、角、顏色；後面的層再把筆畫組成輪子、車窗、人的形狀。這些筆畫，要看過非常多張照片才學得起來。
 </a:t>
             </a:r>
           </a:p>
@@ -3552,7 +3728,7 @@
                 <a:ea typeface="Arial Unicode MS"/>
                 <a:cs typeface="Arial Unicode MS"/>
               </a:rPr>
-              <a:t>所以今天的做法是：</a:t>
+              <a:t>所以實際的做法是</a:t>
             </a:r>
             <a:r>
               <a:rPr sz="1600" b="1" lang="zh-TW" dirty="0">
@@ -3563,7 +3739,7 @@
                 <a:ea typeface="Arial Unicode MS"/>
                 <a:cs typeface="Arial Unicode MS"/>
               </a:rPr>
-              <a:t>整段影片分在同一組。</a:t>
+              <a:t>借</a:t>
             </a:r>
             <a:r>
               <a:rPr sz="1600" lang="zh-TW" dirty="0">
@@ -3574,7 +3750,73 @@
                 <a:ea typeface="Arial Unicode MS"/>
                 <a:cs typeface="Arial Unicode MS"/>
               </a:rPr>
-              <a:t>新加坡那一整段是練習題，波士頓那一段拿來考。真正的研究和公司也都這樣做，nuScenes 官方提供的訓練組、測試組，也是整段影片分開的。</a:t>
+              <a:t>。第四張那個原版模型，已經用 COCO 的十一萬多張照片練過，邊、角、顏色、形狀它都會看了。我們從它開始，只要再教它一樣新東西：三角錐。這個做法叫</a:t>
+            </a:r>
+            <a:r>
+              <a:rPr sz="1600" b="1" lang="zh-TW" dirty="0">
+                <a:solidFill>
+                  <a:srgbClr val="000000"/>
+                </a:solidFill>
+                <a:latin typeface="Arial Unicode MS"/>
+                <a:ea typeface="Arial Unicode MS"/>
+                <a:cs typeface="Arial Unicode MS"/>
+              </a:rPr>
+              <a:t>遷移學習</a:t>
+            </a:r>
+            <a:r>
+              <a:rPr sz="1600" lang="zh-TW" dirty="0">
+                <a:solidFill>
+                  <a:srgbClr val="000000"/>
+                </a:solidFill>
+                <a:latin typeface="Arial Unicode MS"/>
+                <a:ea typeface="Arial Unicode MS"/>
+                <a:cs typeface="Arial Unicode MS"/>
+              </a:rPr>
+              <a:t>，也有人叫</a:t>
+            </a:r>
+            <a:r>
+              <a:rPr sz="1600" b="1" lang="zh-TW" dirty="0">
+                <a:solidFill>
+                  <a:srgbClr val="000000"/>
+                </a:solidFill>
+                <a:latin typeface="Arial Unicode MS"/>
+                <a:ea typeface="Arial Unicode MS"/>
+                <a:cs typeface="Arial Unicode MS"/>
+              </a:rPr>
+              <a:t>微調</a:t>
+            </a:r>
+            <a:r>
+              <a:rPr sz="1600" lang="zh-TW" dirty="0">
+                <a:solidFill>
+                  <a:srgbClr val="000000"/>
+                </a:solidFill>
+                <a:latin typeface="Arial Unicode MS"/>
+                <a:ea typeface="Arial Unicode MS"/>
+                <a:cs typeface="Arial Unicode MS"/>
+              </a:rPr>
+              <a:t>。
+</a:t>
+            </a:r>
+          </a:p>
+          <a:p>
+            <a:pPr algn="l">
+              <a:spcBef>
+                <a:spcPts val="0"/>
+              </a:spcBef>
+              <a:spcAft>
+                <a:spcPts val="267"/>
+              </a:spcAft>
+            </a:pPr>
+            <a:r>
+              <a:rPr sz="1600" lang="zh-TW" dirty="0">
+                <a:solidFill>
+                  <a:srgbClr val="000000"/>
+                </a:solidFill>
+                <a:latin typeface="Arial Unicode MS"/>
+                <a:ea typeface="Arial Unicode MS"/>
+                <a:cs typeface="Arial Unicode MS"/>
+              </a:rPr>
+              <a:t>就像學騎機車。一個從來沒騎過腳踏車的人，要先學平衡、學轉彎，學很久。一個會騎腳踏車的人，平衡已經會了，只要再學油門和煞車，很快就上手。</a:t>
             </a:r>
           </a:p>
         </p:txBody>
@@ -3683,11 +3925,11 @@
                 <a:spcPts val="0"/>
               </a:spcBef>
               <a:spcAft>
-                <a:spcPts val="267"/>
+                <a:spcPts val="233"/>
               </a:spcAft>
             </a:pPr>
             <a:r>
-              <a:rPr sz="1600" b="1" lang="zh-TW" dirty="0">
+              <a:rPr sz="1400" b="1" lang="zh-TW" dirty="0">
                 <a:solidFill>
                   <a:srgbClr val="000000"/>
                 </a:solidFill>
@@ -3698,15 +3940,15 @@
               <a:t>這一張的目的：</a:t>
             </a:r>
             <a:r>
-              <a:rPr sz="1600" lang="zh-TW" dirty="0">
-                <a:solidFill>
-                  <a:srgbClr val="000000"/>
-                </a:solidFill>
-                <a:latin typeface="Arial Unicode MS"/>
-                <a:ea typeface="Arial Unicode MS"/>
-                <a:cs typeface="Arial Unicode MS"/>
-              </a:rPr>
-              <a:t>讓大家知道資料增強在做什麼：把同一張照片做各種變化，讓模型看到同一個東西的很多種樣子；照片怎麼變，標註的框就跟著怎麼變。
+              <a:rPr sz="1400" lang="zh-TW" dirty="0">
+                <a:solidFill>
+                  <a:srgbClr val="000000"/>
+                </a:solidFill>
+                <a:latin typeface="Arial Unicode MS"/>
+                <a:ea typeface="Arial Unicode MS"/>
+                <a:cs typeface="Arial Unicode MS"/>
+              </a:rPr>
+              <a:t>讓大家親眼看到，模型是怎麼一輪一輪變好的：一開始亂框一通，中間忽好忽壞，練到後面才穩定下來。
 </a:t>
             </a:r>
           </a:p>
@@ -3716,41 +3958,41 @@
                 <a:spcPts val="0"/>
               </a:spcBef>
               <a:spcAft>
-                <a:spcPts val="267"/>
+                <a:spcPts val="233"/>
               </a:spcAft>
             </a:pPr>
             <a:r>
-              <a:rPr sz="1600" lang="zh-TW" dirty="0">
-                <a:solidFill>
-                  <a:srgbClr val="000000"/>
-                </a:solidFill>
-                <a:latin typeface="Arial Unicode MS"/>
-                <a:ea typeface="Arial Unicode MS"/>
-                <a:cs typeface="Arial Unicode MS"/>
-              </a:rPr>
-              <a:t>只有 30 張照片，太少了。有一個辦法可以讓 30 張變成很多張，叫</a:t>
-            </a:r>
-            <a:r>
-              <a:rPr sz="1600" b="1" lang="zh-TW" dirty="0">
-                <a:solidFill>
-                  <a:srgbClr val="000000"/>
-                </a:solidFill>
-                <a:latin typeface="Arial Unicode MS"/>
-                <a:ea typeface="Arial Unicode MS"/>
-                <a:cs typeface="Arial Unicode MS"/>
-              </a:rPr>
-              <a:t>資料增強</a:t>
-            </a:r>
-            <a:r>
-              <a:rPr sz="1600" lang="zh-TW" dirty="0">
-                <a:solidFill>
-                  <a:srgbClr val="000000"/>
-                </a:solidFill>
-                <a:latin typeface="Arial Unicode MS"/>
-                <a:ea typeface="Arial Unicode MS"/>
-                <a:cs typeface="Arial Unicode MS"/>
-              </a:rPr>
-              <a:t>。看動畫，右邊的名稱一個一個亮。
+              <a:rPr sz="1400" lang="zh-TW" dirty="0">
+                <a:solidFill>
+                  <a:srgbClr val="000000"/>
+                </a:solidFill>
+                <a:latin typeface="Arial Unicode MS"/>
+                <a:ea typeface="Arial Unicode MS"/>
+                <a:cs typeface="Arial Unicode MS"/>
+              </a:rPr>
+              <a:t>先說一輪在做什麼。第八週講過，機器學習就是「猜、對答案、改一點點，重複很多次」。每一輪，30 張訓練照片全部看一遍：模型先在每一張照片上猜框；再跟標準答案比，算出錯了多少，這個「錯多少」叫做</a:t>
+            </a:r>
+            <a:r>
+              <a:rPr sz="1400" b="1" lang="zh-TW" dirty="0">
+                <a:solidFill>
+                  <a:srgbClr val="000000"/>
+                </a:solidFill>
+                <a:latin typeface="Arial Unicode MS"/>
+                <a:ea typeface="Arial Unicode MS"/>
+                <a:cs typeface="Arial Unicode MS"/>
+              </a:rPr>
+              <a:t>損失</a:t>
+            </a:r>
+            <a:r>
+              <a:rPr sz="1400" lang="zh-TW" dirty="0">
+                <a:solidFill>
+                  <a:srgbClr val="000000"/>
+                </a:solidFill>
+                <a:latin typeface="Arial Unicode MS"/>
+                <a:ea typeface="Arial Unicode MS"/>
+                <a:cs typeface="Arial Unicode MS"/>
+              </a:rPr>
+              <a:t>；然後把模型裡面兩百六十萬個數字，每一個都往錯少一點的方向改一點點，就像第八週大霧裡下山的那顆球。這三件事的細節，放在第二節最後的附錄。
 </a:t>
             </a:r>
           </a:p>
@@ -3760,118 +4002,19 @@
                 <a:spcPts val="0"/>
               </a:spcBef>
               <a:spcAft>
-                <a:spcPts val="267"/>
+                <a:spcPts val="233"/>
               </a:spcAft>
             </a:pPr>
             <a:r>
-              <a:rPr sz="1600" b="1" lang="zh-TW" dirty="0">
-                <a:solidFill>
-                  <a:srgbClr val="000000"/>
-                </a:solidFill>
-                <a:latin typeface="Arial Unicode MS"/>
-                <a:ea typeface="Arial Unicode MS"/>
-                <a:cs typeface="Arial Unicode MS"/>
-              </a:rPr>
-              <a:t>左右翻轉</a:t>
-            </a:r>
-            <a:r>
-              <a:rPr sz="1600" lang="zh-TW" dirty="0">
-                <a:solidFill>
-                  <a:srgbClr val="000000"/>
-                </a:solidFill>
-                <a:latin typeface="Arial Unicode MS"/>
-                <a:ea typeface="Arial Unicode MS"/>
-                <a:cs typeface="Arial Unicode MS"/>
-              </a:rPr>
-              <a:t>：照片像照鏡子一樣翻過來，三角錐還是三角錐。</a:t>
-            </a:r>
-            <a:r>
-              <a:rPr sz="1600" b="1" lang="zh-TW" dirty="0">
-                <a:solidFill>
-                  <a:srgbClr val="000000"/>
-                </a:solidFill>
-                <a:latin typeface="Arial Unicode MS"/>
-                <a:ea typeface="Arial Unicode MS"/>
-                <a:cs typeface="Arial Unicode MS"/>
-              </a:rPr>
-              <a:t>調暗</a:t>
-            </a:r>
-            <a:r>
-              <a:rPr sz="1600" lang="zh-TW" dirty="0">
-                <a:solidFill>
-                  <a:srgbClr val="000000"/>
-                </a:solidFill>
-                <a:latin typeface="Arial Unicode MS"/>
-                <a:ea typeface="Arial Unicode MS"/>
-                <a:cs typeface="Arial Unicode MS"/>
-              </a:rPr>
-              <a:t>：像傍晚或陰天拍的。</a:t>
-            </a:r>
-            <a:r>
-              <a:rPr sz="1600" b="1" lang="zh-TW" dirty="0">
-                <a:solidFill>
-                  <a:srgbClr val="000000"/>
-                </a:solidFill>
-                <a:latin typeface="Arial Unicode MS"/>
-                <a:ea typeface="Arial Unicode MS"/>
-                <a:cs typeface="Arial Unicode MS"/>
-              </a:rPr>
-              <a:t>改顏色</a:t>
-            </a:r>
-            <a:r>
-              <a:rPr sz="1600" lang="zh-TW" dirty="0">
-                <a:solidFill>
-                  <a:srgbClr val="000000"/>
-                </a:solidFill>
-                <a:latin typeface="Arial Unicode MS"/>
-                <a:ea typeface="Arial Unicode MS"/>
-                <a:cs typeface="Arial Unicode MS"/>
-              </a:rPr>
-              <a:t>：像換了一台相機拍的，顏色偏一點。</a:t>
-            </a:r>
-            <a:r>
-              <a:rPr sz="1600" b="1" lang="zh-TW" dirty="0">
-                <a:solidFill>
-                  <a:srgbClr val="000000"/>
-                </a:solidFill>
-                <a:latin typeface="Arial Unicode MS"/>
-                <a:ea typeface="Arial Unicode MS"/>
-                <a:cs typeface="Arial Unicode MS"/>
-              </a:rPr>
-              <a:t>放大、移動</a:t>
-            </a:r>
-            <a:r>
-              <a:rPr sz="1600" lang="zh-TW" dirty="0">
-                <a:solidFill>
-                  <a:srgbClr val="000000"/>
-                </a:solidFill>
-                <a:latin typeface="Arial Unicode MS"/>
-                <a:ea typeface="Arial Unicode MS"/>
-                <a:cs typeface="Arial Unicode MS"/>
-              </a:rPr>
-              <a:t>：像車子開得比較近。</a:t>
-            </a:r>
-            <a:r>
-              <a:rPr sz="1600" b="1" lang="zh-TW" dirty="0">
-                <a:solidFill>
-                  <a:srgbClr val="000000"/>
-                </a:solidFill>
-                <a:latin typeface="Arial Unicode MS"/>
-                <a:ea typeface="Arial Unicode MS"/>
-                <a:cs typeface="Arial Unicode MS"/>
-              </a:rPr>
-              <a:t>四張拼一張</a:t>
-            </a:r>
-            <a:r>
-              <a:rPr sz="1600" lang="zh-TW" dirty="0">
-                <a:solidFill>
-                  <a:srgbClr val="000000"/>
-                </a:solidFill>
-                <a:latin typeface="Arial Unicode MS"/>
-                <a:ea typeface="Arial Unicode MS"/>
-                <a:cs typeface="Arial Unicode MS"/>
-              </a:rPr>
-              <a:t>：把四張照片各縮小一半，拼成一張；三角錐變小了，也搬到新的位置。
+              <a:rPr sz="1400" lang="zh-TW" dirty="0">
+                <a:solidFill>
+                  <a:srgbClr val="000000"/>
+                </a:solidFill>
+                <a:latin typeface="Arial Unicode MS"/>
+                <a:ea typeface="Arial Unicode MS"/>
+                <a:cs typeface="Arial Unicode MS"/>
+              </a:rPr>
+              <a:t>這是波士頓的一張測試照片，模型訓練的時候從來沒看過。動畫裡，我把每一輪練完的模型都拿來框這一張。白色虛線是答案，有 8 個三角錐；綠框是框對的，紅框是多框的。
 </a:t>
             </a:r>
           </a:p>
@@ -3881,41 +4024,52 @@
                 <a:spcPts val="0"/>
               </a:spcBef>
               <a:spcAft>
-                <a:spcPts val="267"/>
+                <a:spcPts val="233"/>
               </a:spcAft>
             </a:pPr>
             <a:r>
-              <a:rPr sz="1600" lang="zh-TW" dirty="0">
-                <a:solidFill>
-                  <a:srgbClr val="000000"/>
-                </a:solidFill>
-                <a:latin typeface="Arial Unicode MS"/>
-                <a:ea typeface="Arial Unicode MS"/>
-                <a:cs typeface="Arial Unicode MS"/>
-              </a:rPr>
-              <a:t>請注意每一個變化裡的</a:t>
-            </a:r>
-            <a:r>
-              <a:rPr sz="1600" b="1" lang="zh-TW" dirty="0">
-                <a:solidFill>
-                  <a:srgbClr val="000000"/>
-                </a:solidFill>
-                <a:latin typeface="Arial Unicode MS"/>
-                <a:ea typeface="Arial Unicode MS"/>
-                <a:cs typeface="Arial Unicode MS"/>
-              </a:rPr>
-              <a:t>框</a:t>
-            </a:r>
-            <a:r>
-              <a:rPr sz="1600" lang="zh-TW" dirty="0">
-                <a:solidFill>
-                  <a:srgbClr val="000000"/>
-                </a:solidFill>
-                <a:latin typeface="Arial Unicode MS"/>
-                <a:ea typeface="Arial Unicode MS"/>
-                <a:cs typeface="Arial Unicode MS"/>
-              </a:rPr>
-              <a:t>：照片翻過來，框也翻過來；照片放大，框也跟著放大、跟著移動。框一定要跟著照片一起變，不然答案就錯了。
+              <a:rPr sz="1400" b="1" lang="zh-TW" dirty="0">
+                <a:solidFill>
+                  <a:srgbClr val="000000"/>
+                </a:solidFill>
+                <a:latin typeface="Arial Unicode MS"/>
+                <a:ea typeface="Arial Unicode MS"/>
+                <a:cs typeface="Arial Unicode MS"/>
+              </a:rPr>
+              <a:t>第 1 輪</a:t>
+            </a:r>
+            <a:r>
+              <a:rPr sz="1400" lang="zh-TW" dirty="0">
+                <a:solidFill>
+                  <a:srgbClr val="000000"/>
+                </a:solidFill>
+                <a:latin typeface="Arial Unicode MS"/>
+                <a:ea typeface="Arial Unicode MS"/>
+                <a:cs typeface="Arial Unicode MS"/>
+              </a:rPr>
+              <a:t>：照片上到處都是紅框，連路面、樹都框。右邊看 17 張測試照片的總數：多框了 </a:t>
+            </a:r>
+            <a:r>
+              <a:rPr sz="1400" b="1" lang="zh-TW" dirty="0">
+                <a:solidFill>
+                  <a:srgbClr val="000000"/>
+                </a:solidFill>
+                <a:latin typeface="Arial Unicode MS"/>
+                <a:ea typeface="Arial Unicode MS"/>
+                <a:cs typeface="Arial Unicode MS"/>
+              </a:rPr>
+              <a:t>3,030 個</a:t>
+            </a:r>
+            <a:r>
+              <a:rPr sz="1400" lang="zh-TW" dirty="0">
+                <a:solidFill>
+                  <a:srgbClr val="000000"/>
+                </a:solidFill>
+                <a:latin typeface="Arial Unicode MS"/>
+                <a:ea typeface="Arial Unicode MS"/>
+                <a:cs typeface="Arial Unicode MS"/>
+              </a:rPr>
+              <a:t>。它剛開始學，只知道「橘色、尖尖的可能是」，就到處亂猜。
 </a:t>
             </a:r>
           </a:p>
@@ -3925,19 +4079,107 @@
                 <a:spcPts val="0"/>
               </a:spcBef>
               <a:spcAft>
-                <a:spcPts val="267"/>
+                <a:spcPts val="233"/>
               </a:spcAft>
             </a:pPr>
             <a:r>
-              <a:rPr sz="1600" lang="zh-TW" dirty="0">
-                <a:solidFill>
-                  <a:srgbClr val="000000"/>
-                </a:solidFill>
-                <a:latin typeface="Arial Unicode MS"/>
-                <a:ea typeface="Arial Unicode MS"/>
-                <a:cs typeface="Arial Unicode MS"/>
-              </a:rPr>
-              <a:t>訓練的時候，每一輪都會隨機重新變一次。30 張照片練 50 輪，模型一共看了 1,500 次照片，每一次看到的都不太一樣。就像同一個觀念，老師換很多種題目考你，你才是真的懂，不是背下某一題的答案。</a:t>
+              <a:rPr sz="1400" b="1" lang="zh-TW" dirty="0">
+                <a:solidFill>
+                  <a:srgbClr val="000000"/>
+                </a:solidFill>
+                <a:latin typeface="Arial Unicode MS"/>
+                <a:ea typeface="Arial Unicode MS"/>
+                <a:cs typeface="Arial Unicode MS"/>
+              </a:rPr>
+              <a:t>中間幾輪</a:t>
+            </a:r>
+            <a:r>
+              <a:rPr sz="1400" lang="zh-TW" dirty="0">
+                <a:solidFill>
+                  <a:srgbClr val="000000"/>
+                </a:solidFill>
+                <a:latin typeface="Arial Unicode MS"/>
+                <a:ea typeface="Arial Unicode MS"/>
+                <a:cs typeface="Arial Unicode MS"/>
+              </a:rPr>
+              <a:t>：忽好忽壞。有幾輪幾乎什麼都不框，有幾輪又到處亂框。這是正常的，訓練不是每一輪都進步，整體往好的方向走就好。
+</a:t>
+            </a:r>
+          </a:p>
+          <a:p>
+            <a:pPr algn="l">
+              <a:spcBef>
+                <a:spcPts val="0"/>
+              </a:spcBef>
+              <a:spcAft>
+                <a:spcPts val="233"/>
+              </a:spcAft>
+            </a:pPr>
+            <a:r>
+              <a:rPr sz="1400" b="1" lang="zh-TW" dirty="0">
+                <a:solidFill>
+                  <a:srgbClr val="000000"/>
+                </a:solidFill>
+                <a:latin typeface="Arial Unicode MS"/>
+                <a:ea typeface="Arial Unicode MS"/>
+                <a:cs typeface="Arial Unicode MS"/>
+              </a:rPr>
+              <a:t>第 19 輪以後</a:t>
+            </a:r>
+            <a:r>
+              <a:rPr sz="1400" lang="zh-TW" dirty="0">
+                <a:solidFill>
+                  <a:srgbClr val="000000"/>
+                </a:solidFill>
+                <a:latin typeface="Arial Unicode MS"/>
+                <a:ea typeface="Arial Unicode MS"/>
+                <a:cs typeface="Arial Unicode MS"/>
+              </a:rPr>
+              <a:t>，慢慢穩定下來，紅框愈來愈少。</a:t>
+            </a:r>
+            <a:r>
+              <a:rPr sz="1400" b="1" lang="zh-TW" dirty="0">
+                <a:solidFill>
+                  <a:srgbClr val="000000"/>
+                </a:solidFill>
+                <a:latin typeface="Arial Unicode MS"/>
+                <a:ea typeface="Arial Unicode MS"/>
+                <a:cs typeface="Arial Unicode MS"/>
+              </a:rPr>
+              <a:t>第 35 輪</a:t>
+            </a:r>
+            <a:r>
+              <a:rPr sz="1400" lang="zh-TW" dirty="0">
+                <a:solidFill>
+                  <a:srgbClr val="000000"/>
+                </a:solidFill>
+                <a:latin typeface="Arial Unicode MS"/>
+                <a:ea typeface="Arial Unicode MS"/>
+                <a:cs typeface="Arial Unicode MS"/>
+              </a:rPr>
+              <a:t>：這一張 8 個三角錐全部框對，多框 4 個；17 張測試照片，90 個三角錐框對 80 個，多框 72 個。
+</a:t>
+            </a:r>
+          </a:p>
+          <a:p>
+            <a:pPr algn="l">
+              <a:spcBef>
+                <a:spcPts val="0"/>
+              </a:spcBef>
+              <a:spcAft>
+                <a:spcPts val="233"/>
+              </a:spcAft>
+            </a:pPr>
+            <a:r>
+              <a:rPr sz="1400" lang="zh-TW" dirty="0">
+                <a:solidFill>
+                  <a:srgbClr val="000000"/>
+                </a:solidFill>
+                <a:latin typeface="Arial Unicode MS"/>
+                <a:ea typeface="Arial Unicode MS"/>
+                <a:cs typeface="Arial Unicode MS"/>
+              </a:rPr>
+              <a:t>最後說明一件事：第六張說過，測試照片只能在最後用一次。這裡每一輪都拿來考，是為了上課讓大家看到過程。真正在做的時候，不能這樣做，每一輪只能看驗證組的成績，下一張就是。</a:t>
             </a:r>
           </a:p>
         </p:txBody>
@@ -4527,7 +4769,7 @@
                 <a:ea typeface="Arial" pitchFamily="34" charset="-122"/>
                 <a:cs typeface="Arial" pitchFamily="34" charset="-120"/>
               </a:rPr>
-              <a:t>Dạy mô hình nhận ra cọc tiêu — gán nhãn, chia ba nhóm, tăng cường dữ liệu</a:t>
+              <a:t>Dạy mô hình nhận ra cọc tiêu — gán nhãn, chia ba nhóm, học từng vòng</a:t>
             </a:r>
             <a:endParaRPr lang="en-US" sz="1450" dirty="0"/>
           </a:p>
@@ -4547,7 +4789,7 @@
                 <a:ea typeface="微軟正黑體" pitchFamily="34" charset="-122"/>
                 <a:cs typeface="微軟正黑體" pitchFamily="34" charset="-120"/>
               </a:rPr>
-              <a:t>教模型認三角錐：標註、分三組、資料增強</a:t>
+              <a:t>教模型認三角錐：標註、分三組、一輪一輪訓練</a:t>
             </a:r>
             <a:endParaRPr lang="en-US" sz="1450" dirty="0"/>
           </a:p>
@@ -4696,7 +4938,7 @@
                 <a:ea typeface="Arial" pitchFamily="34" charset="-122"/>
                 <a:cs typeface="Arial" pitchFamily="34" charset="-120"/>
               </a:rPr>
-              <a:t>Lúc huấn luyện thật · 真的訓練時</a:t>
+              <a:t>Bài tập và thi thử · 練習題和模擬考</a:t>
             </a:r>
             <a:endParaRPr lang="en-US" sz="1250" dirty="0"/>
           </a:p>
@@ -4738,7 +4980,7 @@
                 <a:ea typeface="Arial" pitchFamily="34" charset="-122"/>
                 <a:cs typeface="Arial" pitchFamily="34" charset="-120"/>
               </a:rPr>
-              <a:t>Lúc huấn luyện thật: ghép, lật, đổi màu — ngẫu nhiên, cùng lúc</a:t>
+              <a:t>Điểm bài tập cứ tốt lên; điểm thi thử tăng rồi lại giảm</a:t>
             </a:r>
             <a:endParaRPr lang="en-US" sz="1700" dirty="0"/>
           </a:p>
@@ -4758,7 +5000,7 @@
                 <a:ea typeface="微軟正黑體" pitchFamily="34" charset="-122"/>
                 <a:cs typeface="微軟正黑體" pitchFamily="34" charset="-120"/>
               </a:rPr>
-              <a:t>真的訓練時：拼圖、翻轉、變色，隨機一起來</a:t>
+              <a:t>練習題愈做愈好；模擬考成績先升、後降</a:t>
             </a:r>
             <a:endParaRPr lang="en-US" sz="1700" dirty="0"/>
           </a:p>
@@ -4772,8 +5014,8 @@
         </p:nvSpPr>
         <p:spPr>
           <a:xfrm>
-            <a:off x="3063240" y="1371600"/>
-            <a:ext cx="3017520" cy="3017520"/>
+            <a:off x="1020741" y="1371600"/>
+            <a:ext cx="7102517" cy="3017520"/>
           </a:xfrm>
           <a:prstGeom prst="rect">
             <a:avLst/>
@@ -4791,7 +5033,7 @@
       </p:sp>
       <p:pic>
         <p:nvPicPr>
-          <p:cNvPr id="5" name="Image 0" descr="/Users/tsengchenghsun/Class/carClass/Claude outputs/第十週(11-12)/src/img/w10_batch.jpg">    </p:cNvPr>
+          <p:cNvPr id="5" name="Image 0" descr="/Users/tsengchenghsun/Class/carClass/Claude outputs/第十週(11-12)/src/img/w10_curve.gif">    </p:cNvPr>
           <p:cNvPicPr>
             <a:picLocks noChangeAspect="1"/>
           </p:cNvPicPr>
@@ -4805,8 +5047,8 @@
         </p:blipFill>
         <p:spPr>
           <a:xfrm>
-            <a:off x="3081528" y="1389888"/>
-            <a:ext cx="2980944" cy="2980944"/>
+            <a:off x="1039029" y="1389888"/>
+            <a:ext cx="7065941" cy="2980944"/>
           </a:xfrm>
           <a:prstGeom prst="rect">
             <a:avLst/>
@@ -4846,7 +5088,7 @@
                 <a:ea typeface="Arial" pitchFamily="34" charset="-122"/>
                 <a:cs typeface="Arial" pitchFamily="34" charset="-120"/>
               </a:rPr>
-              <a:t>Ultralytics 訓練時自動存下的第一批（train_batch0.jpg）· 一批 4 張 · 藍框旁的 0＝三角錐 · 灰色是補上的空白</a:t>
+              <a:t>訓練紀錄（results.csv）：左＝訓練組的損失（框＋類別）；右＝驗證組 8 張、13 個三角錐，找到幾成（召回率）· 白線＝驗證組綜合分數最高的一輪</a:t>
             </a:r>
             <a:endParaRPr lang="en-US" sz="850" dirty="0"/>
           </a:p>
@@ -4965,13 +5207,6 @@
 <file path=ppt/slides/slide11.xml><?xml version="1.0" encoding="utf-8"?>
 <p:sld xmlns:a="http://schemas.openxmlformats.org/drawingml/2006/main" xmlns:r="http://schemas.openxmlformats.org/officeDocument/2006/relationships" xmlns:p="http://schemas.openxmlformats.org/presentationml/2006/main">
   <p:cSld name="Slide 11">
-    <p:bg>
-      <p:bgPr>
-        <a:solidFill>
-          <a:srgbClr val="0B1F3A"/>
-        </a:solidFill>
-      </p:bgPr>
-    </p:bg>
     <p:spTree>
       <p:nvGrpSpPr>
         <p:cNvPr id="1" name=""/>
@@ -4988,24 +5223,65 @@
       </p:grpSpPr>
       <p:sp>
         <p:nvSpPr>
-          <p:cNvPr id="2" name="Shape 0"/>
+          <p:cNvPr id="2" name="Text 0"/>
+          <p:cNvSpPr txBox="1"/>
+          <p:nvPr/>
+        </p:nvSpPr>
+        <p:spPr>
+          <a:xfrm>
+            <a:off x="502920" y="420624"/>
+            <a:ext cx="8138160" cy="274320"/>
+          </a:xfrm>
+          <a:prstGeom prst="rect">
+            <a:avLst/>
+          </a:prstGeom>
+          <a:noFill/>
+          <a:ln/>
+        </p:spPr>
+        <p:txBody>
+          <a:bodyPr wrap="square" lIns="0" tIns="0" rIns="0" bIns="0" rtlCol="0" anchor="ctr"/>
+          <a:lstStyle/>
+          <a:p>
+            <a:pPr indent="0" marL="0">
+              <a:buNone/>
+            </a:pPr>
+            <a:r>
+              <a:rPr lang="en-US" sz="1250" b="1" dirty="0">
+                <a:solidFill>
+                  <a:srgbClr val="007F72"/>
+                </a:solidFill>
+                <a:latin typeface="Arial" pitchFamily="34" charset="0"/>
+                <a:ea typeface="Arial" pitchFamily="34" charset="-122"/>
+                <a:cs typeface="Arial" pitchFamily="34" charset="-120"/>
+              </a:rPr>
+              <a:t>Học quá lâu · 練過頭</a:t>
+            </a:r>
+            <a:endParaRPr lang="en-US" sz="1250" dirty="0"/>
+          </a:p>
+        </p:txBody>
+      </p:sp>
+      <p:sp>
+        <p:nvSpPr>
+          <p:cNvPr id="3" name="Shape 1"/>
           <p:cNvSpPr/>
           <p:nvPr/>
         </p:nvSpPr>
         <p:spPr>
           <a:xfrm>
-            <a:off x="6766560" y="-1371600"/>
-            <a:ext cx="4206240" cy="4206240"/>
-          </a:xfrm>
-          <a:prstGeom prst="ellipse">
-            <a:avLst/>
+            <a:off x="502920" y="1412748"/>
+            <a:ext cx="2468880" cy="2514600"/>
+          </a:xfrm>
+          <a:prstGeom prst="roundRect">
+            <a:avLst>
+              <a:gd name="adj" fmla="val 4444"/>
+            </a:avLst>
           </a:prstGeom>
           <a:solidFill>
-            <a:srgbClr val="13314F"/>
+            <a:srgbClr val="F4F7FA"/>
           </a:solidFill>
           <a:ln w="12700">
             <a:solidFill>
-              <a:srgbClr val="13314F"/>
+              <a:srgbClr val="DBE3EA"/>
             </a:solidFill>
             <a:prstDash val="solid"/>
           </a:ln>
@@ -5013,21 +5289,50 @@
       </p:sp>
       <p:sp>
         <p:nvSpPr>
-          <p:cNvPr id="3" name="Shape 1"/>
+          <p:cNvPr id="4" name="Shape 2"/>
           <p:cNvSpPr/>
           <p:nvPr/>
         </p:nvSpPr>
         <p:spPr>
           <a:xfrm>
-            <a:off x="8138160" y="2103120"/>
-            <a:ext cx="2377440" cy="2377440"/>
-          </a:xfrm>
-          <a:prstGeom prst="ellipse">
-            <a:avLst/>
+            <a:off x="810524" y="2251619"/>
+            <a:ext cx="646664" cy="836859"/>
+          </a:xfrm>
+          <a:prstGeom prst="roundRect">
+            <a:avLst>
+              <a:gd name="adj" fmla="val 8484"/>
+            </a:avLst>
           </a:prstGeom>
           <a:solidFill>
-            <a:srgbClr val="007F72">
-              <a:alpha val="28000"/>
+            <a:srgbClr val="FFFFFF">
+              <a:alpha val="0"/>
+            </a:srgbClr>
+          </a:solidFill>
+          <a:ln w="31750">
+            <a:solidFill>
+              <a:srgbClr val="0B1F3A"/>
+            </a:solidFill>
+            <a:prstDash val="solid"/>
+          </a:ln>
+        </p:spPr>
+      </p:sp>
+      <p:sp>
+        <p:nvSpPr>
+          <p:cNvPr id="5" name="Shape 3"/>
+          <p:cNvSpPr/>
+          <p:nvPr/>
+        </p:nvSpPr>
+        <p:spPr>
+          <a:xfrm>
+            <a:off x="905622" y="2422794"/>
+            <a:ext cx="456468" cy="47549"/>
+          </a:xfrm>
+          <a:prstGeom prst="rect">
+            <a:avLst/>
+          </a:prstGeom>
+          <a:solidFill>
+            <a:srgbClr val="0B1F3A">
+              <a:alpha val="60000"/>
             </a:srgbClr>
           </a:solidFill>
           <a:ln/>
@@ -5035,14 +5340,100 @@
       </p:sp>
       <p:sp>
         <p:nvSpPr>
-          <p:cNvPr id="4" name="Text 2"/>
+          <p:cNvPr id="6" name="Shape 4"/>
+          <p:cNvSpPr/>
+          <p:nvPr/>
+        </p:nvSpPr>
+        <p:spPr>
+          <a:xfrm>
+            <a:off x="905622" y="2555931"/>
+            <a:ext cx="456468" cy="47549"/>
+          </a:xfrm>
+          <a:prstGeom prst="rect">
+            <a:avLst/>
+          </a:prstGeom>
+          <a:solidFill>
+            <a:srgbClr val="0B1F3A">
+              <a:alpha val="60000"/>
+            </a:srgbClr>
+          </a:solidFill>
+          <a:ln/>
+        </p:spPr>
+      </p:sp>
+      <p:sp>
+        <p:nvSpPr>
+          <p:cNvPr id="7" name="Shape 5"/>
+          <p:cNvSpPr/>
+          <p:nvPr/>
+        </p:nvSpPr>
+        <p:spPr>
+          <a:xfrm>
+            <a:off x="905622" y="2689068"/>
+            <a:ext cx="456468" cy="47549"/>
+          </a:xfrm>
+          <a:prstGeom prst="rect">
+            <a:avLst/>
+          </a:prstGeom>
+          <a:solidFill>
+            <a:srgbClr val="0B1F3A">
+              <a:alpha val="60000"/>
+            </a:srgbClr>
+          </a:solidFill>
+          <a:ln/>
+        </p:spPr>
+      </p:sp>
+      <p:sp>
+        <p:nvSpPr>
+          <p:cNvPr id="8" name="Shape 6"/>
+          <p:cNvSpPr/>
+          <p:nvPr/>
+        </p:nvSpPr>
+        <p:spPr>
+          <a:xfrm>
+            <a:off x="905622" y="2822204"/>
+            <a:ext cx="456468" cy="47549"/>
+          </a:xfrm>
+          <a:prstGeom prst="rect">
+            <a:avLst/>
+          </a:prstGeom>
+          <a:solidFill>
+            <a:srgbClr val="0B1F3A">
+              <a:alpha val="60000"/>
+            </a:srgbClr>
+          </a:solidFill>
+          <a:ln/>
+        </p:spPr>
+      </p:sp>
+      <p:sp>
+        <p:nvSpPr>
+          <p:cNvPr id="9" name="Shape 7"/>
+          <p:cNvSpPr/>
+          <p:nvPr/>
+        </p:nvSpPr>
+        <p:spPr>
+          <a:xfrm>
+            <a:off x="905622" y="2955341"/>
+            <a:ext cx="228234" cy="47549"/>
+          </a:xfrm>
+          <a:prstGeom prst="rect">
+            <a:avLst/>
+          </a:prstGeom>
+          <a:solidFill>
+            <a:srgbClr val="0B1F3A"/>
+          </a:solidFill>
+          <a:ln/>
+        </p:spPr>
+      </p:sp>
+      <p:sp>
+        <p:nvSpPr>
+          <p:cNvPr id="10" name="Text 8"/>
           <p:cNvSpPr txBox="1"/>
           <p:nvPr/>
         </p:nvSpPr>
         <p:spPr>
           <a:xfrm>
-            <a:off x="502920" y="475488"/>
-            <a:ext cx="6766560" cy="274320"/>
+            <a:off x="1609344" y="2487168"/>
+            <a:ext cx="256032" cy="365760"/>
           </a:xfrm>
           <a:prstGeom prst="rect">
             <a:avLst/>
@@ -5054,34 +5445,94 @@
           <a:bodyPr wrap="square" lIns="0" tIns="0" rIns="0" bIns="0" rtlCol="0" anchor="ctr"/>
           <a:lstStyle/>
           <a:p>
-            <a:pPr indent="0" marL="0">
-              <a:buNone/>
-            </a:pPr>
-            <a:r>
-              <a:rPr lang="en-US" sz="1250" b="1" dirty="0">
-                <a:solidFill>
-                  <a:srgbClr val="FFB020"/>
-                </a:solidFill>
-                <a:latin typeface="Arial" pitchFamily="34" charset="0"/>
-                <a:ea typeface="Arial" pitchFamily="34" charset="-122"/>
-                <a:cs typeface="Arial" pitchFamily="34" charset="-120"/>
-              </a:rPr>
-              <a:t>Thảo luận · 討論</a:t>
-            </a:r>
-            <a:endParaRPr lang="en-US" sz="1250" dirty="0"/>
+            <a:pPr algn="ctr" indent="0" marL="0">
+              <a:buNone/>
+            </a:pPr>
+            <a:r>
+              <a:rPr lang="en-US" sz="1700" b="1" dirty="0">
+                <a:solidFill>
+                  <a:srgbClr val="5F7183"/>
+                </a:solidFill>
+                <a:latin typeface="微軟正黑體" pitchFamily="34" charset="0"/>
+                <a:ea typeface="微軟正黑體" pitchFamily="34" charset="-122"/>
+                <a:cs typeface="微軟正黑體" pitchFamily="34" charset="-120"/>
+              </a:rPr>
+              <a:t>→</a:t>
+            </a:r>
+            <a:endParaRPr lang="en-US" sz="1700" dirty="0"/>
           </a:p>
         </p:txBody>
       </p:sp>
       <p:sp>
         <p:nvSpPr>
-          <p:cNvPr id="5" name="Text 3"/>
+          <p:cNvPr id="11" name="Shape 9"/>
+          <p:cNvSpPr/>
+          <p:nvPr/>
+        </p:nvSpPr>
+        <p:spPr>
+          <a:xfrm>
+            <a:off x="1903415" y="2289658"/>
+            <a:ext cx="874898" cy="760781"/>
+          </a:xfrm>
+          <a:prstGeom prst="triangle">
+            <a:avLst/>
+          </a:prstGeom>
+          <a:solidFill>
+            <a:srgbClr val="0B1F3A"/>
+          </a:solidFill>
+          <a:ln/>
+        </p:spPr>
+      </p:sp>
+      <p:sp>
+        <p:nvSpPr>
+          <p:cNvPr id="12" name="Shape 10"/>
+          <p:cNvSpPr/>
+          <p:nvPr/>
+        </p:nvSpPr>
+        <p:spPr>
+          <a:xfrm>
+            <a:off x="2302825" y="2555931"/>
+            <a:ext cx="76078" cy="247254"/>
+          </a:xfrm>
+          <a:prstGeom prst="rect">
+            <a:avLst/>
+          </a:prstGeom>
+          <a:solidFill>
+            <a:srgbClr val="FFFFFF"/>
+          </a:solidFill>
+          <a:ln/>
+        </p:spPr>
+      </p:sp>
+      <p:sp>
+        <p:nvSpPr>
+          <p:cNvPr id="13" name="Shape 11"/>
+          <p:cNvSpPr/>
+          <p:nvPr/>
+        </p:nvSpPr>
+        <p:spPr>
+          <a:xfrm>
+            <a:off x="2293315" y="2860243"/>
+            <a:ext cx="95098" cy="95098"/>
+          </a:xfrm>
+          <a:prstGeom prst="ellipse">
+            <a:avLst/>
+          </a:prstGeom>
+          <a:solidFill>
+            <a:srgbClr val="FFFFFF"/>
+          </a:solidFill>
+          <a:ln/>
+        </p:spPr>
+      </p:sp>
+      <p:sp>
+        <p:nvSpPr>
+          <p:cNvPr id="14" name="Text 12"/>
           <p:cNvSpPr txBox="1"/>
           <p:nvPr/>
         </p:nvSpPr>
         <p:spPr>
           <a:xfrm>
-            <a:off x="502920" y="786384"/>
-            <a:ext cx="8046720" cy="1225296"/>
+            <a:off x="3429000" y="914400"/>
+            <a:ext cx="5212080" cy="3511296"/>
           </a:xfrm>
           <a:prstGeom prst="rect">
             <a:avLst/>
@@ -5090,7 +5541,7 @@
           <a:ln/>
         </p:spPr>
         <p:txBody>
-          <a:bodyPr wrap="square" lIns="0" tIns="0" rIns="0" bIns="0" rtlCol="0" anchor="t"/>
+          <a:bodyPr wrap="square" lIns="0" tIns="0" rIns="0" bIns="0" rtlCol="0" anchor="ctr"/>
           <a:lstStyle/>
           <a:p>
             <a:pPr indent="0" marL="0">
@@ -5102,13 +5553,13 @@
             <a:r>
               <a:rPr lang="en-US" sz="2300" b="1" dirty="0">
                 <a:solidFill>
-                  <a:srgbClr val="FFFFFF"/>
+                  <a:srgbClr val="0B1F3A"/>
                 </a:solidFill>
                 <a:latin typeface="Arial" pitchFamily="34" charset="0"/>
                 <a:ea typeface="Arial" pitchFamily="34" charset="-122"/>
                 <a:cs typeface="Arial" pitchFamily="34" charset="-120"/>
               </a:rPr>
-              <a:t>Tăng cường nào hợp lý cho xe tự lái? Cái nào không?</a:t>
+              <a:t>Học quá lâu = học thuộc lòng: bài tập tốt hơn, đề mới lại kém đi</a:t>
             </a:r>
             <a:endParaRPr lang="en-US" sz="2300" dirty="0"/>
           </a:p>
@@ -5120,72 +5571,100 @@
               <a:buNone/>
             </a:pPr>
             <a:r>
-              <a:rPr lang="en-US" sz="1500" dirty="0">
-                <a:solidFill>
-                  <a:srgbClr val="AFC3D4"/>
+              <a:rPr lang="en-US" sz="1400" b="1" dirty="0">
+                <a:solidFill>
+                  <a:srgbClr val="007F72"/>
                 </a:solidFill>
                 <a:latin typeface="微軟正黑體" pitchFamily="34" charset="0"/>
                 <a:ea typeface="微軟正黑體" pitchFamily="34" charset="-122"/>
                 <a:cs typeface="微軟正黑體" pitchFamily="34" charset="-120"/>
               </a:rPr>
-              <a:t>哪些資料增強對自駕車合理？哪些不合理？</a:t>
+              <a:t>練過頭＝背答案：練習題更熟，新題目反而變差</a:t>
             </a:r>
             <a:endParaRPr lang="en-US" sz="2300" dirty="0"/>
           </a:p>
+          <a:p>
+            <a:pPr indent="0" marL="0">
+              <a:lnSpc>
+                <a:spcPct val="120000"/>
+              </a:lnSpc>
+              <a:spcBef>
+                <a:spcPts val="1440"/>
+              </a:spcBef>
+              <a:buNone/>
+            </a:pPr>
+            <a:r>
+              <a:rPr lang="en-US" sz="1250" dirty="0">
+                <a:solidFill>
+                  <a:srgbClr val="5F7183"/>
+                </a:solidFill>
+                <a:latin typeface="Arial" pitchFamily="34" charset="0"/>
+                <a:ea typeface="Arial" pitchFamily="34" charset="-122"/>
+                <a:cs typeface="Arial" pitchFamily="34" charset="-120"/>
+              </a:rPr>
+              <a:t>Giữ vòng 35 (thi thử tốt nhất). Ảnh kiểm tra có 90 cọc tiêu: vòng 35 khoanh đúng 80, vòng 49 chỉ còn 66.</a:t>
+            </a:r>
+            <a:endParaRPr lang="en-US" sz="2300" dirty="0"/>
+          </a:p>
+          <a:p>
+            <a:pPr indent="0" marL="0">
+              <a:lnSpc>
+                <a:spcPct val="120000"/>
+              </a:lnSpc>
+              <a:buNone/>
+            </a:pPr>
+            <a:r>
+              <a:rPr lang="en-US" sz="1150" dirty="0">
+                <a:solidFill>
+                  <a:srgbClr val="5F7183"/>
+                </a:solidFill>
+                <a:latin typeface="微軟正黑體" pitchFamily="34" charset="0"/>
+                <a:ea typeface="微軟正黑體" pitchFamily="34" charset="-122"/>
+                <a:cs typeface="微軟正黑體" pitchFamily="34" charset="-120"/>
+              </a:rPr>
+              <a:t>留第 35 輪（模擬考最好的那一輪）。測試照片有 90 個三角錐：第 35 輪框對 80 個，第 49 輪只剩 66 個。</a:t>
+            </a:r>
+            <a:endParaRPr lang="en-US" sz="2300" dirty="0"/>
+          </a:p>
         </p:txBody>
       </p:sp>
       <p:sp>
         <p:nvSpPr>
-          <p:cNvPr id="6" name="Shape 4"/>
+          <p:cNvPr id="15" name="Shape 13"/>
           <p:cNvSpPr/>
           <p:nvPr/>
         </p:nvSpPr>
         <p:spPr>
           <a:xfrm>
-            <a:off x="502920" y="1737360"/>
-            <a:ext cx="8138160" cy="621792"/>
+            <a:off x="7054209" y="365760"/>
+            <a:ext cx="1586871" cy="310896"/>
           </a:xfrm>
           <a:prstGeom prst="roundRect">
             <a:avLst>
-              <a:gd name="adj" fmla="val 11765"/>
+              <a:gd name="adj" fmla="val 20588"/>
             </a:avLst>
           </a:prstGeom>
           <a:solidFill>
-            <a:srgbClr val="13314F"/>
+            <a:srgbClr val="EAF6F4"/>
           </a:solidFill>
-          <a:ln/>
-        </p:spPr>
-      </p:sp>
-      <p:sp>
-        <p:nvSpPr>
-          <p:cNvPr id="7" name="Shape 5"/>
-          <p:cNvSpPr/>
-          <p:nvPr/>
-        </p:nvSpPr>
-        <p:spPr>
-          <a:xfrm>
-            <a:off x="667512" y="1883664"/>
-            <a:ext cx="329184" cy="329184"/>
-          </a:xfrm>
-          <a:prstGeom prst="ellipse">
-            <a:avLst/>
-          </a:prstGeom>
-          <a:solidFill>
-            <a:srgbClr val="00A896"/>
-          </a:solidFill>
-          <a:ln/>
-        </p:spPr>
-      </p:sp>
-      <p:sp>
-        <p:nvSpPr>
-          <p:cNvPr id="8" name="Text 6"/>
+          <a:ln w="9525">
+            <a:solidFill>
+              <a:srgbClr val="9FD6CE"/>
+            </a:solidFill>
+            <a:prstDash val="solid"/>
+          </a:ln>
+        </p:spPr>
+      </p:sp>
+      <p:sp>
+        <p:nvSpPr>
+          <p:cNvPr id="16" name="Text 14"/>
           <p:cNvSpPr txBox="1"/>
           <p:nvPr/>
         </p:nvSpPr>
         <p:spPr>
           <a:xfrm>
-            <a:off x="667512" y="1911096"/>
-            <a:ext cx="329184" cy="274320"/>
+            <a:off x="7182225" y="384048"/>
+            <a:ext cx="1403991" cy="274320"/>
           </a:xfrm>
           <a:prstGeom prst="rect">
             <a:avLst/>
@@ -5197,138 +5676,115 @@
           <a:bodyPr wrap="square" lIns="0" tIns="0" rIns="0" bIns="0" rtlCol="0" anchor="ctr"/>
           <a:lstStyle/>
           <a:p>
-            <a:pPr algn="ctr" indent="0" marL="0">
-              <a:buNone/>
-            </a:pPr>
-            <a:r>
-              <a:rPr lang="en-US" sz="1200" b="1" dirty="0">
-                <a:solidFill>
-                  <a:srgbClr val="FFFFFF"/>
+            <a:pPr indent="0" marL="0">
+              <a:lnSpc>
+                <a:spcPct val="100000"/>
+              </a:lnSpc>
+              <a:buNone/>
+            </a:pPr>
+            <a:r>
+              <a:rPr lang="en-US" sz="950" b="1" dirty="0">
+                <a:solidFill>
+                  <a:srgbClr val="007F72"/>
                 </a:solidFill>
                 <a:latin typeface="Arial" pitchFamily="34" charset="0"/>
                 <a:ea typeface="Arial" pitchFamily="34" charset="-122"/>
                 <a:cs typeface="Arial" pitchFamily="34" charset="-120"/>
               </a:rPr>
-              <a:t>1</a:t>
-            </a:r>
-            <a:endParaRPr lang="en-US" sz="1200" dirty="0"/>
-          </a:p>
-        </p:txBody>
-      </p:sp>
-      <p:sp>
-        <p:nvSpPr>
-          <p:cNvPr id="9" name="Text 7"/>
-          <p:cNvSpPr txBox="1"/>
-          <p:nvPr/>
-        </p:nvSpPr>
-        <p:spPr>
-          <a:xfrm>
-            <a:off x="1161288" y="1783080"/>
-            <a:ext cx="7296912" cy="548640"/>
-          </a:xfrm>
-          <a:prstGeom prst="rect">
-            <a:avLst/>
-          </a:prstGeom>
-          <a:noFill/>
-          <a:ln/>
-        </p:spPr>
-        <p:txBody>
-          <a:bodyPr wrap="square" lIns="0" tIns="0" rIns="0" bIns="0" rtlCol="0" anchor="t"/>
-          <a:lstStyle/>
-          <a:p>
+              <a:t>Ví dụ · </a:t>
+            </a:r>
             <a:pPr indent="0" marL="0">
               <a:lnSpc>
-                <a:spcPct val="114000"/>
+                <a:spcPct val="100000"/>
               </a:lnSpc>
               <a:buNone/>
             </a:pPr>
             <a:r>
-              <a:rPr lang="en-US" sz="1250" b="1" dirty="0">
-                <a:solidFill>
-                  <a:srgbClr val="FFFFFF"/>
+              <a:rPr lang="en-US" sz="950" dirty="0">
+                <a:solidFill>
+                  <a:srgbClr val="1A2733"/>
                 </a:solidFill>
                 <a:latin typeface="Arial" pitchFamily="34" charset="0"/>
                 <a:ea typeface="Arial" pitchFamily="34" charset="-122"/>
                 <a:cs typeface="Arial" pitchFamily="34" charset="-120"/>
               </a:rPr>
-              <a:t>Lật trái phải: dạy cọc tiêu được không? Dạy biển báo rẽ trái thì sao?</a:t>
-            </a:r>
-            <a:endParaRPr lang="en-US" sz="1250" dirty="0"/>
+              <a:t>học thuộc đề cũ</a:t>
+            </a:r>
+            <a:endParaRPr lang="en-US" sz="950" dirty="0"/>
           </a:p>
           <a:p>
             <a:pPr indent="0" marL="0">
               <a:lnSpc>
-                <a:spcPct val="114000"/>
+                <a:spcPct val="100000"/>
               </a:lnSpc>
               <a:buNone/>
             </a:pPr>
             <a:r>
-              <a:rPr lang="en-US" sz="1150" dirty="0">
-                <a:solidFill>
-                  <a:srgbClr val="AFC3D4"/>
+              <a:rPr lang="en-US" sz="900" b="1" dirty="0">
+                <a:solidFill>
+                  <a:srgbClr val="007F72"/>
                 </a:solidFill>
                 <a:latin typeface="微軟正黑體" pitchFamily="34" charset="0"/>
                 <a:ea typeface="微軟正黑體" pitchFamily="34" charset="-122"/>
                 <a:cs typeface="微軟正黑體" pitchFamily="34" charset="-120"/>
               </a:rPr>
-              <a:t>左右翻轉：教三角錐可以嗎？教「左轉」標誌呢？</a:t>
-            </a:r>
-            <a:endParaRPr lang="en-US" sz="1250" dirty="0"/>
+              <a:t>例子・</a:t>
+            </a:r>
+            <a:pPr indent="0" marL="0">
+              <a:lnSpc>
+                <a:spcPct val="100000"/>
+              </a:lnSpc>
+              <a:buNone/>
+            </a:pPr>
+            <a:r>
+              <a:rPr lang="en-US" sz="900" dirty="0">
+                <a:solidFill>
+                  <a:srgbClr val="5F7183"/>
+                </a:solidFill>
+                <a:latin typeface="微軟正黑體" pitchFamily="34" charset="0"/>
+                <a:ea typeface="微軟正黑體" pitchFamily="34" charset="-122"/>
+                <a:cs typeface="微軟正黑體" pitchFamily="34" charset="-120"/>
+              </a:rPr>
+              <a:t>背考古題</a:t>
+            </a:r>
+            <a:endParaRPr lang="en-US" sz="950" dirty="0"/>
           </a:p>
         </p:txBody>
       </p:sp>
-      <p:sp>
-        <p:nvSpPr>
-          <p:cNvPr id="10" name="Shape 8"/>
-          <p:cNvSpPr/>
-          <p:nvPr/>
-        </p:nvSpPr>
-        <p:spPr>
-          <a:xfrm>
-            <a:off x="502920" y="2450592"/>
-            <a:ext cx="8138160" cy="621792"/>
-          </a:xfrm>
-          <a:prstGeom prst="roundRect">
-            <a:avLst>
-              <a:gd name="adj" fmla="val 11765"/>
-            </a:avLst>
-          </a:prstGeom>
-          <a:solidFill>
-            <a:srgbClr val="13314F"/>
-          </a:solidFill>
-          <a:ln/>
-        </p:spPr>
-      </p:sp>
-      <p:sp>
-        <p:nvSpPr>
-          <p:cNvPr id="11" name="Shape 9"/>
-          <p:cNvSpPr/>
-          <p:nvPr/>
-        </p:nvSpPr>
-        <p:spPr>
-          <a:xfrm>
-            <a:off x="667512" y="2596896"/>
-            <a:ext cx="329184" cy="329184"/>
-          </a:xfrm>
-          <a:prstGeom prst="ellipse">
-            <a:avLst/>
-          </a:prstGeom>
-          <a:solidFill>
-            <a:srgbClr val="00A896"/>
-          </a:solidFill>
-          <a:ln/>
-        </p:spPr>
-      </p:sp>
-      <p:sp>
-        <p:nvSpPr>
-          <p:cNvPr id="12" name="Text 10"/>
+      <p:pic>
+        <p:nvPicPr>
+          <p:cNvPr id="18" name="Image 0" descr="/Users/tsengchenghsun/Class/carClass/Claude outputs/第十週(11-12)/src/logo.png">    </p:cNvPr>
+          <p:cNvPicPr>
+            <a:picLocks noChangeAspect="1"/>
+          </p:cNvPicPr>
+          <p:nvPr/>
+        </p:nvPicPr>
+        <p:blipFill>
+          <a:blip r:embed="rId1"/>
+          <a:stretch>
+            <a:fillRect/>
+          </a:stretch>
+        </p:blipFill>
+        <p:spPr>
+          <a:xfrm>
+            <a:off x="7882128" y="109728"/>
+            <a:ext cx="1097280" cy="242439"/>
+          </a:xfrm>
+          <a:prstGeom prst="rect">
+            <a:avLst/>
+          </a:prstGeom>
+        </p:spPr>
+      </p:pic>
+      <p:sp>
+        <p:nvSpPr>
+          <p:cNvPr id="19" name="Text 15"/>
           <p:cNvSpPr txBox="1"/>
           <p:nvPr/>
         </p:nvSpPr>
         <p:spPr>
           <a:xfrm>
-            <a:off x="667512" y="2624328"/>
-            <a:ext cx="329184" cy="274320"/>
+            <a:off x="109728" y="128016"/>
+            <a:ext cx="822960" cy="256032"/>
           </a:xfrm>
           <a:prstGeom prst="rect">
             <a:avLst/>
@@ -5340,138 +5796,34 @@
           <a:bodyPr wrap="square" lIns="0" tIns="0" rIns="0" bIns="0" rtlCol="0" anchor="ctr"/>
           <a:lstStyle/>
           <a:p>
-            <a:pPr algn="ctr" indent="0" marL="0">
-              <a:buNone/>
-            </a:pPr>
-            <a:r>
-              <a:rPr lang="en-US" sz="1200" b="1" dirty="0">
-                <a:solidFill>
-                  <a:srgbClr val="FFFFFF"/>
+            <a:pPr indent="0" marL="0">
+              <a:buNone/>
+            </a:pPr>
+            <a:r>
+              <a:rPr lang="en-US" sz="900" dirty="0">
+                <a:solidFill>
+                  <a:srgbClr val="5F7183"/>
                 </a:solidFill>
                 <a:latin typeface="Arial" pitchFamily="34" charset="0"/>
                 <a:ea typeface="Arial" pitchFamily="34" charset="-122"/>
                 <a:cs typeface="Arial" pitchFamily="34" charset="-120"/>
               </a:rPr>
-              <a:t>2</a:t>
-            </a:r>
-            <a:endParaRPr lang="en-US" sz="1200" dirty="0"/>
+              <a:t>11 / 12</a:t>
+            </a:r>
+            <a:endParaRPr lang="en-US" sz="900" dirty="0"/>
           </a:p>
         </p:txBody>
       </p:sp>
       <p:sp>
         <p:nvSpPr>
-          <p:cNvPr id="13" name="Text 11"/>
+          <p:cNvPr id="20" name="Text 16"/>
           <p:cNvSpPr txBox="1"/>
           <p:nvPr/>
         </p:nvSpPr>
         <p:spPr>
           <a:xfrm>
-            <a:off x="1161288" y="2496312"/>
-            <a:ext cx="7296912" cy="548640"/>
-          </a:xfrm>
-          <a:prstGeom prst="rect">
-            <a:avLst/>
-          </a:prstGeom>
-          <a:noFill/>
-          <a:ln/>
-        </p:spPr>
-        <p:txBody>
-          <a:bodyPr wrap="square" lIns="0" tIns="0" rIns="0" bIns="0" rtlCol="0" anchor="t"/>
-          <a:lstStyle/>
-          <a:p>
-            <a:pPr indent="0" marL="0">
-              <a:lnSpc>
-                <a:spcPct val="114000"/>
-              </a:lnSpc>
-              <a:buNone/>
-            </a:pPr>
-            <a:r>
-              <a:rPr lang="en-US" sz="1250" b="1" dirty="0">
-                <a:solidFill>
-                  <a:srgbClr val="FFFFFF"/>
-                </a:solidFill>
-                <a:latin typeface="Arial" pitchFamily="34" charset="0"/>
-                <a:ea typeface="Arial" pitchFamily="34" charset="-122"/>
-                <a:cs typeface="Arial" pitchFamily="34" charset="-120"/>
-              </a:rPr>
-              <a:t>Lật trên dưới: trời ở dưới, đường ở trên. Có nên dùng không?</a:t>
-            </a:r>
-            <a:endParaRPr lang="en-US" sz="1250" dirty="0"/>
-          </a:p>
-          <a:p>
-            <a:pPr indent="0" marL="0">
-              <a:lnSpc>
-                <a:spcPct val="114000"/>
-              </a:lnSpc>
-              <a:buNone/>
-            </a:pPr>
-            <a:r>
-              <a:rPr lang="en-US" sz="1150" dirty="0">
-                <a:solidFill>
-                  <a:srgbClr val="AFC3D4"/>
-                </a:solidFill>
-                <a:latin typeface="微軟正黑體" pitchFamily="34" charset="0"/>
-                <a:ea typeface="微軟正黑體" pitchFamily="34" charset="-122"/>
-                <a:cs typeface="微軟正黑體" pitchFamily="34" charset="-120"/>
-              </a:rPr>
-              <a:t>上下翻轉：天空在下面、馬路在上面。該不該用？</a:t>
-            </a:r>
-            <a:endParaRPr lang="en-US" sz="1250" dirty="0"/>
-          </a:p>
-        </p:txBody>
-      </p:sp>
-      <p:sp>
-        <p:nvSpPr>
-          <p:cNvPr id="14" name="Shape 12"/>
-          <p:cNvSpPr/>
-          <p:nvPr/>
-        </p:nvSpPr>
-        <p:spPr>
-          <a:xfrm>
-            <a:off x="502920" y="3163824"/>
-            <a:ext cx="8138160" cy="621792"/>
-          </a:xfrm>
-          <a:prstGeom prst="roundRect">
-            <a:avLst>
-              <a:gd name="adj" fmla="val 11765"/>
-            </a:avLst>
-          </a:prstGeom>
-          <a:solidFill>
-            <a:srgbClr val="13314F"/>
-          </a:solidFill>
-          <a:ln/>
-        </p:spPr>
-      </p:sp>
-      <p:sp>
-        <p:nvSpPr>
-          <p:cNvPr id="15" name="Shape 13"/>
-          <p:cNvSpPr/>
-          <p:nvPr/>
-        </p:nvSpPr>
-        <p:spPr>
-          <a:xfrm>
-            <a:off x="667512" y="3310128"/>
-            <a:ext cx="329184" cy="329184"/>
-          </a:xfrm>
-          <a:prstGeom prst="ellipse">
-            <a:avLst/>
-          </a:prstGeom>
-          <a:solidFill>
-            <a:srgbClr val="00A896"/>
-          </a:solidFill>
-          <a:ln/>
-        </p:spPr>
-      </p:sp>
-      <p:sp>
-        <p:nvSpPr>
-          <p:cNvPr id="16" name="Text 14"/>
-          <p:cNvSpPr txBox="1"/>
-          <p:nvPr/>
-        </p:nvSpPr>
-        <p:spPr>
-          <a:xfrm>
-            <a:off x="667512" y="3337560"/>
-            <a:ext cx="329184" cy="274320"/>
+            <a:off x="960120" y="128016"/>
+            <a:ext cx="2011680" cy="256032"/>
           </a:xfrm>
           <a:prstGeom prst="rect">
             <a:avLst/>
@@ -5483,215 +5835,13 @@
           <a:bodyPr wrap="square" lIns="0" tIns="0" rIns="0" bIns="0" rtlCol="0" anchor="ctr"/>
           <a:lstStyle/>
           <a:p>
-            <a:pPr algn="ctr" indent="0" marL="0">
-              <a:buNone/>
-            </a:pPr>
-            <a:r>
-              <a:rPr lang="en-US" sz="1200" b="1" dirty="0">
-                <a:solidFill>
-                  <a:srgbClr val="FFFFFF"/>
-                </a:solidFill>
-                <a:latin typeface="Arial" pitchFamily="34" charset="0"/>
-                <a:ea typeface="Arial" pitchFamily="34" charset="-122"/>
-                <a:cs typeface="Arial" pitchFamily="34" charset="-120"/>
-              </a:rPr>
-              <a:t>3</a:t>
-            </a:r>
-            <a:endParaRPr lang="en-US" sz="1200" dirty="0"/>
-          </a:p>
-        </p:txBody>
-      </p:sp>
-      <p:sp>
-        <p:nvSpPr>
-          <p:cNvPr id="17" name="Text 15"/>
-          <p:cNvSpPr txBox="1"/>
-          <p:nvPr/>
-        </p:nvSpPr>
-        <p:spPr>
-          <a:xfrm>
-            <a:off x="1161288" y="3209544"/>
-            <a:ext cx="7296912" cy="548640"/>
-          </a:xfrm>
-          <a:prstGeom prst="rect">
-            <a:avLst/>
-          </a:prstGeom>
-          <a:noFill/>
-          <a:ln/>
-        </p:spPr>
-        <p:txBody>
-          <a:bodyPr wrap="square" lIns="0" tIns="0" rIns="0" bIns="0" rtlCol="0" anchor="t"/>
-          <a:lstStyle/>
-          <a:p>
             <a:pPr indent="0" marL="0">
-              <a:lnSpc>
-                <a:spcPct val="114000"/>
-              </a:lnSpc>
-              <a:buNone/>
-            </a:pPr>
-            <a:r>
-              <a:rPr lang="en-US" sz="1250" b="1" dirty="0">
-                <a:solidFill>
-                  <a:srgbClr val="FFFFFF"/>
-                </a:solidFill>
-                <a:latin typeface="Arial" pitchFamily="34" charset="0"/>
-                <a:ea typeface="Arial" pitchFamily="34" charset="-122"/>
-                <a:cs typeface="Arial" pitchFamily="34" charset="-120"/>
-              </a:rPr>
-              <a:t>Làm tối ảnh ban ngày: có thay được ảnh chụp ban đêm thật không?</a:t>
-            </a:r>
-            <a:endParaRPr lang="en-US" sz="1250" dirty="0"/>
-          </a:p>
-          <a:p>
-            <a:pPr indent="0" marL="0">
-              <a:lnSpc>
-                <a:spcPct val="114000"/>
-              </a:lnSpc>
-              <a:buNone/>
-            </a:pPr>
-            <a:r>
-              <a:rPr lang="en-US" sz="1150" dirty="0">
-                <a:solidFill>
-                  <a:srgbClr val="AFC3D4"/>
-                </a:solidFill>
-                <a:latin typeface="微軟正黑體" pitchFamily="34" charset="0"/>
-                <a:ea typeface="微軟正黑體" pitchFamily="34" charset="-122"/>
-                <a:cs typeface="微軟正黑體" pitchFamily="34" charset="-120"/>
-              </a:rPr>
-              <a:t>把白天的照片調暗：可以取代真的晚上拍的照片嗎？</a:t>
-            </a:r>
-            <a:endParaRPr lang="en-US" sz="1250" dirty="0"/>
-          </a:p>
-        </p:txBody>
-      </p:sp>
-      <p:sp>
-        <p:nvSpPr>
-          <p:cNvPr id="18" name="Text 16"/>
-          <p:cNvSpPr txBox="1"/>
-          <p:nvPr/>
-        </p:nvSpPr>
-        <p:spPr>
-          <a:xfrm>
-            <a:off x="502920" y="3913632"/>
-            <a:ext cx="8046720" cy="457200"/>
-          </a:xfrm>
-          <a:prstGeom prst="rect">
-            <a:avLst/>
-          </a:prstGeom>
-          <a:noFill/>
-          <a:ln/>
-        </p:spPr>
-        <p:txBody>
-          <a:bodyPr wrap="square" lIns="0" tIns="0" rIns="0" bIns="0" rtlCol="0" anchor="t"/>
-          <a:lstStyle/>
-          <a:p>
-            <a:pPr indent="0" marL="0">
-              <a:lnSpc>
-                <a:spcPct val="116000"/>
-              </a:lnSpc>
-              <a:buNone/>
-            </a:pPr>
-            <a:r>
-              <a:rPr lang="en-US" sz="1250" b="1" dirty="0">
-                <a:solidFill>
-                  <a:srgbClr val="FFB020"/>
-                </a:solidFill>
-                <a:latin typeface="Arial" pitchFamily="34" charset="0"/>
-                <a:ea typeface="Arial" pitchFamily="34" charset="-122"/>
-                <a:cs typeface="Arial" pitchFamily="34" charset="-120"/>
-              </a:rPr>
-              <a:t>Ultralytics mặc định: lật trái phải 50% số lần, không lật trên dưới.</a:t>
-            </a:r>
-            <a:endParaRPr lang="en-US" sz="1250" dirty="0"/>
-          </a:p>
-          <a:p>
-            <a:pPr indent="0" marL="0">
-              <a:lnSpc>
-                <a:spcPct val="116000"/>
-              </a:lnSpc>
-              <a:buNone/>
-            </a:pPr>
-            <a:r>
-              <a:rPr lang="en-US" sz="1150" dirty="0">
-                <a:solidFill>
-                  <a:srgbClr val="FFB020"/>
-                </a:solidFill>
-                <a:latin typeface="微軟正黑體" pitchFamily="34" charset="0"/>
-                <a:ea typeface="微軟正黑體" pitchFamily="34" charset="-122"/>
-                <a:cs typeface="微軟正黑體" pitchFamily="34" charset="-120"/>
-              </a:rPr>
-              <a:t>Ultralytics 的預設：一半的機會左右翻轉，不做上下翻轉。</a:t>
-            </a:r>
-            <a:endParaRPr lang="en-US" sz="1250" dirty="0"/>
-          </a:p>
-        </p:txBody>
-      </p:sp>
-      <p:sp>
-        <p:nvSpPr>
-          <p:cNvPr id="20" name="Text 17"/>
-          <p:cNvSpPr txBox="1"/>
-          <p:nvPr/>
-        </p:nvSpPr>
-        <p:spPr>
-          <a:xfrm>
-            <a:off x="109728" y="128016"/>
-            <a:ext cx="822960" cy="256032"/>
-          </a:xfrm>
-          <a:prstGeom prst="rect">
-            <a:avLst/>
-          </a:prstGeom>
-          <a:noFill/>
-          <a:ln/>
-        </p:spPr>
-        <p:txBody>
-          <a:bodyPr wrap="square" lIns="0" tIns="0" rIns="0" bIns="0" rtlCol="0" anchor="ctr"/>
-          <a:lstStyle/>
-          <a:p>
-            <a:pPr indent="0" marL="0">
               <a:buNone/>
             </a:pPr>
             <a:r>
               <a:rPr lang="en-US" sz="900" dirty="0">
                 <a:solidFill>
-                  <a:srgbClr val="9FB3C8"/>
-                </a:solidFill>
-                <a:latin typeface="Arial" pitchFamily="34" charset="0"/>
-                <a:ea typeface="Arial" pitchFamily="34" charset="-122"/>
-                <a:cs typeface="Arial" pitchFamily="34" charset="-120"/>
-              </a:rPr>
-              <a:t>11 / 12</a:t>
-            </a:r>
-            <a:endParaRPr lang="en-US" sz="900" dirty="0"/>
-          </a:p>
-        </p:txBody>
-      </p:sp>
-      <p:sp>
-        <p:nvSpPr>
-          <p:cNvPr id="21" name="Text 18"/>
-          <p:cNvSpPr txBox="1"/>
-          <p:nvPr/>
-        </p:nvSpPr>
-        <p:spPr>
-          <a:xfrm>
-            <a:off x="960120" y="128016"/>
-            <a:ext cx="2011680" cy="256032"/>
-          </a:xfrm>
-          <a:prstGeom prst="rect">
-            <a:avLst/>
-          </a:prstGeom>
-          <a:noFill/>
-          <a:ln/>
-        </p:spPr>
-        <p:txBody>
-          <a:bodyPr wrap="square" lIns="0" tIns="0" rIns="0" bIns="0" rtlCol="0" anchor="ctr"/>
-          <a:lstStyle/>
-          <a:p>
-            <a:pPr indent="0" marL="0">
-              <a:buNone/>
-            </a:pPr>
-            <a:r>
-              <a:rPr lang="en-US" sz="900" dirty="0">
-                <a:solidFill>
-                  <a:srgbClr val="9FB3C8"/>
+                  <a:srgbClr val="5F7183"/>
                 </a:solidFill>
                 <a:latin typeface="Arial" pitchFamily="34" charset="0"/>
                 <a:ea typeface="Arial" pitchFamily="34" charset="-122"/>
@@ -5939,7 +6089,7 @@
                 <a:ea typeface="Arial" pitchFamily="34" charset="-122"/>
                 <a:cs typeface="Arial" pitchFamily="34" charset="-120"/>
               </a:rPr>
-              <a:t>Mỗi vật một khung, mỗi khung một dòng năm con số: loại, tâm x, tâm y, rộng, cao (chia cho kích thước ảnh).</a:t>
+              <a:t>Mỗi vật một khung. Chia ba nhóm theo cả đoạn video: huấn luyện = bài tập, kiểm định = thi thử, kiểm tra = thi thật, chỉ dùng một lần.</a:t>
             </a:r>
             <a:endParaRPr lang="en-US" sz="1350" dirty="0"/>
           </a:p>
@@ -5959,7 +6109,7 @@
                 <a:ea typeface="微軟正黑體" pitchFamily="34" charset="-122"/>
                 <a:cs typeface="微軟正黑體" pitchFamily="34" charset="-120"/>
               </a:rPr>
-              <a:t>一個東西一個框，一個框一行五個數字：類別、中心 x、中心 y、寬、高（都除以照片的寬高）。</a:t>
+              <a:t>一個東西一個框。整段影片分三組：訓練＝練習題、驗證＝模擬考、測試＝期中考，最後只用一次。</a:t>
             </a:r>
             <a:endParaRPr lang="en-US" sz="1350" dirty="0"/>
           </a:p>
@@ -6021,7 +6171,7 @@
                 <a:ea typeface="Arial" pitchFamily="34" charset="-122"/>
                 <a:cs typeface="Arial" pitchFamily="34" charset="-120"/>
               </a:rPr>
-              <a:t>Chia ba nhóm theo đoạn video: huấn luyện = bài tập, kiểm định = thi thử, kiểm tra = thi thật, chỉ dùng một lần.</a:t>
+              <a:t>Không bắt đầu từ số 0: tinh chỉnh từ mô hình đã học. Mỗi vòng: đoán, so đáp án, sửa một chút.</a:t>
             </a:r>
             <a:endParaRPr lang="en-US" sz="1350" dirty="0"/>
           </a:p>
@@ -6041,7 +6191,7 @@
                 <a:ea typeface="微軟正黑體" pitchFamily="34" charset="-122"/>
                 <a:cs typeface="微軟正黑體" pitchFamily="34" charset="-120"/>
               </a:rPr>
-              <a:t>整段影片分三組：訓練＝練習題、驗證＝模擬考、測試＝期中考，最後只用一次。</a:t>
+              <a:t>不從零開始：從練好的模型微調。每一輪：猜、對答案、改一點點。</a:t>
             </a:r>
             <a:endParaRPr lang="en-US" sz="1350" dirty="0"/>
           </a:p>
@@ -6103,7 +6253,7 @@
                 <a:ea typeface="Arial" pitchFamily="34" charset="-122"/>
                 <a:cs typeface="Arial" pitchFamily="34" charset="-120"/>
               </a:rPr>
-              <a:t>Tăng cường dữ liệu: lật, làm tối, đổi màu, phóng to, ghép ảnh — khung đi theo ảnh, và phải hợp lý.</a:t>
+              <a:t>Học quá lâu = học thuộc lòng. Giữ vòng có điểm thi thử (kiểm định) tốt nhất — hôm nay là vòng 35.</a:t>
             </a:r>
             <a:endParaRPr lang="en-US" sz="1350" dirty="0"/>
           </a:p>
@@ -6123,7 +6273,7 @@
                 <a:ea typeface="微軟正黑體" pitchFamily="34" charset="-122"/>
                 <a:cs typeface="微軟正黑體" pitchFamily="34" charset="-120"/>
               </a:rPr>
-              <a:t>資料增強：翻轉、調暗、改顏色、放大、拼圖；框跟著照片變，而且變化要合理。</a:t>
+              <a:t>練過頭＝背答案。留模擬考（驗證組）成績最好的那一輪，今天是第 35 輪。</a:t>
             </a:r>
             <a:endParaRPr lang="en-US" sz="1350" dirty="0"/>
           </a:p>
@@ -6268,7 +6418,7 @@
                 <a:ea typeface="Arial" pitchFamily="34" charset="-122"/>
                 <a:cs typeface="Arial" pitchFamily="34" charset="-120"/>
               </a:rPr>
-              <a:t>Tuần này: từng bước dạy một mô hình</a:t>
+              <a:t>Tuần này: huấn luyện, chấm điểm, theo dõi</a:t>
             </a:r>
             <a:endParaRPr lang="en-US" sz="2200" dirty="0"/>
           </a:p>
@@ -6288,7 +6438,7 @@
                 <a:ea typeface="微軟正黑體" pitchFamily="34" charset="-122"/>
                 <a:cs typeface="微軟正黑體" pitchFamily="34" charset="-120"/>
               </a:rPr>
-              <a:t>這一週：一步一步看模型是怎麼教出來的</a:t>
+              <a:t>這一週三節：訓練、打分數、追蹤</a:t>
             </a:r>
             <a:endParaRPr lang="en-US" sz="2200" dirty="0"/>
           </a:p>
@@ -6423,7 +6573,7 @@
                 <a:ea typeface="Arial" pitchFamily="34" charset="-122"/>
                 <a:cs typeface="Arial" pitchFamily="34" charset="-120"/>
               </a:rPr>
-              <a:t>Tiết 1 · chuẩn bị sách</a:t>
+              <a:t>Tiết 1 · chuẩn bị và huấn luyện</a:t>
             </a:r>
             <a:endParaRPr lang="en-US" sz="1400" dirty="0"/>
           </a:p>
@@ -6443,7 +6593,7 @@
                 <a:ea typeface="微軟正黑體" pitchFamily="34" charset="-122"/>
                 <a:cs typeface="微軟正黑體" pitchFamily="34" charset="-120"/>
               </a:rPr>
-              <a:t>第 1 節・準備課本</a:t>
+              <a:t>第 1 節・準備資料、訓練</a:t>
             </a:r>
             <a:endParaRPr lang="en-US" sz="1400" dirty="0"/>
           </a:p>
@@ -6485,7 +6635,7 @@
                 <a:ea typeface="Arial" pitchFamily="34" charset="-122"/>
                 <a:cs typeface="Arial" pitchFamily="34" charset="-120"/>
               </a:rPr>
-              <a:t>Gán nhãn, lưu thành năm con số, chia ba nhóm, tăng cường dữ liệu.</a:t>
+              <a:t>Gán nhãn, chia ba nhóm. Học từng vòng, chọn vòng tốt nhất.</a:t>
             </a:r>
             <a:endParaRPr lang="en-US" sz="1150" dirty="0"/>
           </a:p>
@@ -6505,7 +6655,7 @@
                 <a:ea typeface="微軟正黑體" pitchFamily="34" charset="-122"/>
                 <a:cs typeface="微軟正黑體" pitchFamily="34" charset="-120"/>
               </a:rPr>
-              <a:t>標註、存成五個數字、分三組、資料增強。</a:t>
+              <a:t>標註、分三組。一輪一輪練，挑出最好的一輪。</a:t>
             </a:r>
             <a:endParaRPr lang="en-US" sz="1150" dirty="0"/>
           </a:p>
@@ -6679,7 +6829,7 @@
                 <a:ea typeface="Arial" pitchFamily="34" charset="-122"/>
                 <a:cs typeface="Arial" pitchFamily="34" charset="-120"/>
               </a:rPr>
-              <a:t>Tiết 2 · huấn luyện</a:t>
+              <a:t>Tiết 2 · suy luận, chấm điểm</a:t>
             </a:r>
             <a:endParaRPr lang="en-US" sz="1400" dirty="0"/>
           </a:p>
@@ -6699,7 +6849,7 @@
                 <a:ea typeface="微軟正黑體" pitchFamily="34" charset="-122"/>
                 <a:cs typeface="微軟正黑體" pitchFamily="34" charset="-120"/>
               </a:rPr>
-              <a:t>第 2 節・訓練</a:t>
+              <a:t>第 2 節・推論、打分數</a:t>
             </a:r>
             <a:endParaRPr lang="en-US" sz="1400" dirty="0"/>
           </a:p>
@@ -6741,7 +6891,7 @@
                 <a:ea typeface="Arial" pitchFamily="34" charset="-122"/>
                 <a:cs typeface="Arial" pitchFamily="34" charset="-120"/>
               </a:rPr>
-              <a:t>Mô hình đoán, so đáp án, sửa tham số — từng vòng một. Chọn vòng tốt nhất.</a:t>
+              <a:t>Ảnh mới vào → khung ra. Đúng, thừa, sót. Ngưỡng cao hay thấp.</a:t>
             </a:r>
             <a:endParaRPr lang="en-US" sz="1150" dirty="0"/>
           </a:p>
@@ -6761,7 +6911,7 @@
                 <a:ea typeface="微軟正黑體" pitchFamily="34" charset="-122"/>
                 <a:cs typeface="微軟正黑體" pitchFamily="34" charset="-120"/>
               </a:rPr>
-              <a:t>模型猜、對答案、改參數，一輪一輪來。挑出最好的一輪。</a:t>
+              <a:t>新照片進來，框出來。框對、多框、漏掉。門檻要高還是低。</a:t>
             </a:r>
             <a:endParaRPr lang="en-US" sz="1150" dirty="0"/>
           </a:p>
@@ -6935,7 +7085,7 @@
                 <a:ea typeface="Arial" pitchFamily="34" charset="-122"/>
                 <a:cs typeface="Arial" pitchFamily="34" charset="-120"/>
               </a:rPr>
-              <a:t>Tiết 3 · suy luận</a:t>
+              <a:t>Tiết 3 · theo dõi</a:t>
             </a:r>
             <a:endParaRPr lang="en-US" sz="1400" dirty="0"/>
           </a:p>
@@ -6955,7 +7105,7 @@
                 <a:ea typeface="微軟正黑體" pitchFamily="34" charset="-122"/>
                 <a:cs typeface="微軟正黑體" pitchFamily="34" charset="-120"/>
               </a:rPr>
-              <a:t>第 3 節・推論、打分數</a:t>
+              <a:t>第 3 節・追蹤</a:t>
             </a:r>
             <a:endParaRPr lang="en-US" sz="1400" dirty="0"/>
           </a:p>
@@ -6997,7 +7147,7 @@
                 <a:ea typeface="Arial" pitchFamily="34" charset="-122"/>
                 <a:cs typeface="Arial" pitchFamily="34" charset="-120"/>
               </a:rPr>
-              <a:t>Ảnh mới vào → khung ra. Đúng, thừa, sót. Ngưỡng cao hay thấp.</a:t>
+              <a:t>Nối từng ảnh lại: mỗi vật một số, biết nó đi đâu, nhanh cỡ nào.</a:t>
             </a:r>
             <a:endParaRPr lang="en-US" sz="1150" dirty="0"/>
           </a:p>
@@ -7017,7 +7167,7 @@
                 <a:ea typeface="微軟正黑體" pitchFamily="34" charset="-122"/>
                 <a:cs typeface="微軟正黑體" pitchFamily="34" charset="-120"/>
               </a:rPr>
-              <a:t>新照片進來，框出來。框對、多框、漏掉。門檻要高還是低。</a:t>
+              <a:t>把一張一張串起來：每個東西一個號碼，知道它往哪走、走多快。</a:t>
             </a:r>
             <a:endParaRPr lang="en-US" sz="1150" dirty="0"/>
           </a:p>
@@ -7395,7 +7545,7 @@
                 <a:ea typeface="Arial" pitchFamily="34" charset="-122"/>
                 <a:cs typeface="Arial" pitchFamily="34" charset="-120"/>
               </a:rPr>
-              <a:t>動畫：本週三節各講哪幾步 · 評估完找出錯在哪裡，再回到第一步</a:t>
+              <a:t>動畫：第 1、2 節各講哪幾步 · 評估完找出錯在哪裡，再回到第一步 · 第 3 節講追蹤</a:t>
             </a:r>
             <a:endParaRPr lang="en-US" sz="850" dirty="0"/>
           </a:p>
@@ -8193,7 +8343,7 @@
                 <a:ea typeface="Arial" pitchFamily="34" charset="-122"/>
                 <a:cs typeface="Arial" pitchFamily="34" charset="-120"/>
               </a:rPr>
-              <a:t>Năm con số · 五個數字</a:t>
+              <a:t>Bước 3 · 第三步：分三組</a:t>
             </a:r>
             <a:endParaRPr lang="en-US" sz="1250" dirty="0"/>
           </a:p>
@@ -8235,7 +8385,7 @@
                 <a:ea typeface="Arial" pitchFamily="34" charset="-122"/>
                 <a:cs typeface="Arial" pitchFamily="34" charset="-120"/>
               </a:rPr>
-              <a:t>Năm con số: loại, tâm x, tâm y, rộng, cao — đều chia cho kích thước ảnh</a:t>
+              <a:t>Chia ba nhóm: bài tập, thi thử, thi thật</a:t>
             </a:r>
             <a:endParaRPr lang="en-US" sz="1700" dirty="0"/>
           </a:p>
@@ -8255,7 +8405,7 @@
                 <a:ea typeface="微軟正黑體" pitchFamily="34" charset="-122"/>
                 <a:cs typeface="微軟正黑體" pitchFamily="34" charset="-120"/>
               </a:rPr>
-              <a:t>五個數字：類別、中心 x、中心 y、寬、高，都除以照片的寬和高</a:t>
+              <a:t>分三組：練習題、模擬考、期中考</a:t>
             </a:r>
             <a:endParaRPr lang="en-US" sz="1700" dirty="0"/>
           </a:p>
@@ -8288,7 +8438,7 @@
       </p:sp>
       <p:pic>
         <p:nvPicPr>
-          <p:cNvPr id="5" name="Image 0" descr="/Users/tsengchenghsun/Class/carClass/Claude outputs/第十週(11-12)/src/img/w10_five.jpg">    </p:cNvPr>
+          <p:cNvPr id="5" name="Image 0" descr="/Users/tsengchenghsun/Class/carClass/Claude outputs/第十週(11-12)/src/img/w10_split.gif">    </p:cNvPr>
           <p:cNvPicPr>
             <a:picLocks noChangeAspect="1"/>
           </p:cNvPicPr>
@@ -8343,7 +8493,7 @@
                 <a:ea typeface="Arial" pitchFamily="34" charset="-122"/>
                 <a:cs typeface="Arial" pitchFamily="34" charset="-120"/>
               </a:rPr>
-              <a:t>scene-0061 #23 中間那個三角錐 · 照片原本 1600 × 900 像素 · 右上是放大，紅點是框的中心</a:t>
+              <a:t>訓練：scene-0061（新加坡）30 張 · 驗證：scene-0655（波士頓）前段 8 張 · 測試：同一段後段 17 張，訓練時完全沒看過</a:t>
             </a:r>
             <a:endParaRPr lang="en-US" sz="850" dirty="0"/>
           </a:p>
@@ -8509,7 +8659,7 @@
                 <a:ea typeface="Arial" pitchFamily="34" charset="-122"/>
                 <a:cs typeface="Arial" pitchFamily="34" charset="-120"/>
               </a:rPr>
-              <a:t>Bước 3 · 第三步：分三組</a:t>
+              <a:t>Chia theo đoạn video · 按影片分</a:t>
             </a:r>
             <a:endParaRPr lang="en-US" sz="1250" dirty="0"/>
           </a:p>
@@ -8551,7 +8701,7 @@
                 <a:ea typeface="Arial" pitchFamily="34" charset="-122"/>
                 <a:cs typeface="Arial" pitchFamily="34" charset="-120"/>
               </a:rPr>
-              <a:t>Chia ba nhóm: bài tập, thi thử, thi thật</a:t>
+              <a:t>Hai ảnh liền nhau cách 0,5 giây: chia theo cả đoạn video</a:t>
             </a:r>
             <a:endParaRPr lang="en-US" sz="1700" dirty="0"/>
           </a:p>
@@ -8571,7 +8721,7 @@
                 <a:ea typeface="微軟正黑體" pitchFamily="34" charset="-122"/>
                 <a:cs typeface="微軟正黑體" pitchFamily="34" charset="-120"/>
               </a:rPr>
-              <a:t>分三組：練習題、模擬考、期中考</a:t>
+              <a:t>相鄰兩張只差 0.5 秒：要整段影片一起分</a:t>
             </a:r>
             <a:endParaRPr lang="en-US" sz="1700" dirty="0"/>
           </a:p>
@@ -8585,8 +8735,8 @@
         </p:nvSpPr>
         <p:spPr>
           <a:xfrm>
-            <a:off x="1020741" y="1371600"/>
-            <a:ext cx="7102517" cy="3017520"/>
+            <a:off x="484632" y="1592907"/>
+            <a:ext cx="8174736" cy="2574907"/>
           </a:xfrm>
           <a:prstGeom prst="rect">
             <a:avLst/>
@@ -8604,7 +8754,7 @@
       </p:sp>
       <p:pic>
         <p:nvPicPr>
-          <p:cNvPr id="5" name="Image 0" descr="/Users/tsengchenghsun/Class/carClass/Claude outputs/第十週(11-12)/src/img/w10_split.gif">    </p:cNvPr>
+          <p:cNvPr id="5" name="Image 0" descr="/Users/tsengchenghsun/Class/carClass/Claude outputs/第十週(11-12)/src/img/w10_adjacent.jpg">    </p:cNvPr>
           <p:cNvPicPr>
             <a:picLocks noChangeAspect="1"/>
           </p:cNvPicPr>
@@ -8618,8 +8768,8 @@
         </p:blipFill>
         <p:spPr>
           <a:xfrm>
-            <a:off x="1039029" y="1389888"/>
-            <a:ext cx="7065941" cy="2980944"/>
+            <a:off x="502920" y="1611195"/>
+            <a:ext cx="8138160" cy="2538331"/>
           </a:xfrm>
           <a:prstGeom prst="rect">
             <a:avLst/>
@@ -8659,15 +8809,138 @@
                 <a:ea typeface="Arial" pitchFamily="34" charset="-122"/>
                 <a:cs typeface="Arial" pitchFamily="34" charset="-120"/>
               </a:rPr>
-              <a:t>訓練：scene-0061（新加坡）30 張 · 驗證：scene-0655（波士頓）前段 8 張 · 測試：同一段後段 17 張，訓練時完全沒看過</a:t>
+              <a:t>nuScenes scene-0061 #21 與 #22 · CC BY-NC-SA 4.0 · 一張放練習題、一張放考卷，就像洩題</a:t>
             </a:r>
             <a:endParaRPr lang="en-US" sz="850" dirty="0"/>
+          </a:p>
+        </p:txBody>
+      </p:sp>
+      <p:sp>
+        <p:nvSpPr>
+          <p:cNvPr id="7" name="Shape 4"/>
+          <p:cNvSpPr/>
+          <p:nvPr/>
+        </p:nvSpPr>
+        <p:spPr>
+          <a:xfrm>
+            <a:off x="6768871" y="365760"/>
+            <a:ext cx="1872209" cy="310896"/>
+          </a:xfrm>
+          <a:prstGeom prst="roundRect">
+            <a:avLst>
+              <a:gd name="adj" fmla="val 20588"/>
+            </a:avLst>
+          </a:prstGeom>
+          <a:solidFill>
+            <a:srgbClr val="EAF6F4"/>
+          </a:solidFill>
+          <a:ln w="9525">
+            <a:solidFill>
+              <a:srgbClr val="9FD6CE"/>
+            </a:solidFill>
+            <a:prstDash val="solid"/>
+          </a:ln>
+        </p:spPr>
+      </p:sp>
+      <p:sp>
+        <p:nvSpPr>
+          <p:cNvPr id="8" name="Text 5"/>
+          <p:cNvSpPr txBox="1"/>
+          <p:nvPr/>
+        </p:nvSpPr>
+        <p:spPr>
+          <a:xfrm>
+            <a:off x="6896887" y="384048"/>
+            <a:ext cx="1689329" cy="274320"/>
+          </a:xfrm>
+          <a:prstGeom prst="rect">
+            <a:avLst/>
+          </a:prstGeom>
+          <a:noFill/>
+          <a:ln/>
+        </p:spPr>
+        <p:txBody>
+          <a:bodyPr wrap="square" lIns="0" tIns="0" rIns="0" bIns="0" rtlCol="0" anchor="ctr"/>
+          <a:lstStyle/>
+          <a:p>
+            <a:pPr indent="0" marL="0">
+              <a:lnSpc>
+                <a:spcPct val="100000"/>
+              </a:lnSpc>
+              <a:buNone/>
+            </a:pPr>
+            <a:r>
+              <a:rPr lang="en-US" sz="950" b="1" dirty="0">
+                <a:solidFill>
+                  <a:srgbClr val="007F72"/>
+                </a:solidFill>
+                <a:latin typeface="Arial" pitchFamily="34" charset="0"/>
+                <a:ea typeface="Arial" pitchFamily="34" charset="-122"/>
+                <a:cs typeface="Arial" pitchFamily="34" charset="-120"/>
+              </a:rPr>
+              <a:t>Ví dụ · </a:t>
+            </a:r>
+            <a:pPr indent="0" marL="0">
+              <a:lnSpc>
+                <a:spcPct val="100000"/>
+              </a:lnSpc>
+              <a:buNone/>
+            </a:pPr>
+            <a:r>
+              <a:rPr lang="en-US" sz="950" dirty="0">
+                <a:solidFill>
+                  <a:srgbClr val="1A2733"/>
+                </a:solidFill>
+                <a:latin typeface="Arial" pitchFamily="34" charset="0"/>
+                <a:ea typeface="Arial" pitchFamily="34" charset="-122"/>
+                <a:cs typeface="Arial" pitchFamily="34" charset="-120"/>
+              </a:rPr>
+              <a:t>đề thi trùng bài tập</a:t>
+            </a:r>
+            <a:endParaRPr lang="en-US" sz="950" dirty="0"/>
+          </a:p>
+          <a:p>
+            <a:pPr indent="0" marL="0">
+              <a:lnSpc>
+                <a:spcPct val="100000"/>
+              </a:lnSpc>
+              <a:buNone/>
+            </a:pPr>
+            <a:r>
+              <a:rPr lang="en-US" sz="900" b="1" dirty="0">
+                <a:solidFill>
+                  <a:srgbClr val="007F72"/>
+                </a:solidFill>
+                <a:latin typeface="微軟正黑體" pitchFamily="34" charset="0"/>
+                <a:ea typeface="微軟正黑體" pitchFamily="34" charset="-122"/>
+                <a:cs typeface="微軟正黑體" pitchFamily="34" charset="-120"/>
+              </a:rPr>
+              <a:t>例子・</a:t>
+            </a:r>
+            <a:pPr indent="0" marL="0">
+              <a:lnSpc>
+                <a:spcPct val="100000"/>
+              </a:lnSpc>
+              <a:buNone/>
+            </a:pPr>
+            <a:r>
+              <a:rPr lang="en-US" sz="900" dirty="0">
+                <a:solidFill>
+                  <a:srgbClr val="5F7183"/>
+                </a:solidFill>
+                <a:latin typeface="微軟正黑體" pitchFamily="34" charset="0"/>
+                <a:ea typeface="微軟正黑體" pitchFamily="34" charset="-122"/>
+                <a:cs typeface="微軟正黑體" pitchFamily="34" charset="-120"/>
+              </a:rPr>
+              <a:t>考題就是練習題</a:t>
+            </a:r>
+            <a:endParaRPr lang="en-US" sz="950" dirty="0"/>
           </a:p>
         </p:txBody>
       </p:sp>
       <p:pic>
         <p:nvPicPr>
-          <p:cNvPr id="8" name="Image 1" descr="/Users/tsengchenghsun/Class/carClass/Claude outputs/第十週(11-12)/src/logo.png">    </p:cNvPr>
+          <p:cNvPr id="10" name="Image 1" descr="/Users/tsengchenghsun/Class/carClass/Claude outputs/第十週(11-12)/src/logo.png">    </p:cNvPr>
           <p:cNvPicPr>
             <a:picLocks noChangeAspect="1"/>
           </p:cNvPicPr>
@@ -8691,7 +8964,7 @@
       </p:pic>
       <p:sp>
         <p:nvSpPr>
-          <p:cNvPr id="9" name="Text 4"/>
+          <p:cNvPr id="11" name="Text 6"/>
           <p:cNvSpPr txBox="1"/>
           <p:nvPr/>
         </p:nvSpPr>
@@ -8730,7 +9003,7 @@
       </p:sp>
       <p:sp>
         <p:nvSpPr>
-          <p:cNvPr id="10" name="Text 5"/>
+          <p:cNvPr id="12" name="Text 7"/>
           <p:cNvSpPr txBox="1"/>
           <p:nvPr/>
         </p:nvSpPr>
@@ -8825,7 +9098,7 @@
                 <a:ea typeface="Arial" pitchFamily="34" charset="-122"/>
                 <a:cs typeface="Arial" pitchFamily="34" charset="-120"/>
               </a:rPr>
-              <a:t>Chia theo đoạn video · 按影片分</a:t>
+              <a:t>Điểm xuất phát · 起點</a:t>
             </a:r>
             <a:endParaRPr lang="en-US" sz="1250" dirty="0"/>
           </a:p>
@@ -8833,82 +9106,22 @@
       </p:sp>
       <p:sp>
         <p:nvSpPr>
-          <p:cNvPr id="3" name="Text 1"/>
-          <p:cNvSpPr txBox="1"/>
-          <p:nvPr/>
-        </p:nvSpPr>
-        <p:spPr>
-          <a:xfrm>
-            <a:off x="502920" y="731520"/>
-            <a:ext cx="8138160" cy="585216"/>
-          </a:xfrm>
-          <a:prstGeom prst="rect">
-            <a:avLst/>
-          </a:prstGeom>
-          <a:noFill/>
-          <a:ln/>
-        </p:spPr>
-        <p:txBody>
-          <a:bodyPr wrap="square" lIns="0" tIns="0" rIns="0" bIns="0" rtlCol="0" anchor="t"/>
-          <a:lstStyle/>
-          <a:p>
-            <a:pPr indent="0" marL="0">
-              <a:lnSpc>
-                <a:spcPct val="120000"/>
-              </a:lnSpc>
-              <a:buNone/>
-            </a:pPr>
-            <a:r>
-              <a:rPr lang="en-US" sz="1700" b="1" dirty="0">
-                <a:solidFill>
-                  <a:srgbClr val="0B1F3A"/>
-                </a:solidFill>
-                <a:latin typeface="Arial" pitchFamily="34" charset="0"/>
-                <a:ea typeface="Arial" pitchFamily="34" charset="-122"/>
-                <a:cs typeface="Arial" pitchFamily="34" charset="-120"/>
-              </a:rPr>
-              <a:t>Hai ảnh liền nhau cách 0,5 giây: chia theo cả đoạn video</a:t>
-            </a:r>
-            <a:endParaRPr lang="en-US" sz="1700" dirty="0"/>
-          </a:p>
-          <a:p>
-            <a:pPr indent="0" marL="0">
-              <a:lnSpc>
-                <a:spcPct val="120000"/>
-              </a:lnSpc>
-              <a:buNone/>
-            </a:pPr>
-            <a:r>
-              <a:rPr lang="en-US" sz="1300" dirty="0">
-                <a:solidFill>
-                  <a:srgbClr val="007F72"/>
-                </a:solidFill>
-                <a:latin typeface="微軟正黑體" pitchFamily="34" charset="0"/>
-                <a:ea typeface="微軟正黑體" pitchFamily="34" charset="-122"/>
-                <a:cs typeface="微軟正黑體" pitchFamily="34" charset="-120"/>
-              </a:rPr>
-              <a:t>相鄰兩張只差 0.5 秒：要整段影片一起分</a:t>
-            </a:r>
-            <a:endParaRPr lang="en-US" sz="1700" dirty="0"/>
-          </a:p>
-        </p:txBody>
-      </p:sp>
-      <p:sp>
-        <p:nvSpPr>
-          <p:cNvPr id="4" name="Shape 2"/>
+          <p:cNvPr id="3" name="Shape 1"/>
           <p:cNvSpPr/>
           <p:nvPr/>
         </p:nvSpPr>
         <p:spPr>
           <a:xfrm>
-            <a:off x="484632" y="1592907"/>
-            <a:ext cx="8174736" cy="2574907"/>
-          </a:xfrm>
-          <a:prstGeom prst="rect">
-            <a:avLst/>
+            <a:off x="502920" y="1412748"/>
+            <a:ext cx="2468880" cy="2514600"/>
+          </a:xfrm>
+          <a:prstGeom prst="roundRect">
+            <a:avLst>
+              <a:gd name="adj" fmla="val 4444"/>
+            </a:avLst>
           </a:prstGeom>
           <a:solidFill>
-            <a:srgbClr val="FFFFFF"/>
+            <a:srgbClr val="F4F7FA"/>
           </a:solidFill>
           <a:ln w="12700">
             <a:solidFill>
@@ -8918,40 +9131,326 @@
           </a:ln>
         </p:spPr>
       </p:sp>
-      <p:pic>
-        <p:nvPicPr>
-          <p:cNvPr id="5" name="Image 0" descr="/Users/tsengchenghsun/Class/carClass/Claude outputs/第十週(11-12)/src/img/w10_adjacent.jpg">    </p:cNvPr>
-          <p:cNvPicPr>
-            <a:picLocks noChangeAspect="1"/>
-          </p:cNvPicPr>
-          <p:nvPr/>
-        </p:nvPicPr>
-        <p:blipFill>
-          <a:blip r:embed="rId1"/>
-          <a:stretch>
-            <a:fillRect/>
-          </a:stretch>
-        </p:blipFill>
-        <p:spPr>
-          <a:xfrm>
-            <a:off x="502920" y="1611195"/>
-            <a:ext cx="8138160" cy="2538331"/>
-          </a:xfrm>
-          <a:prstGeom prst="rect">
-            <a:avLst/>
-          </a:prstGeom>
-        </p:spPr>
-      </p:pic>
-      <p:sp>
-        <p:nvSpPr>
-          <p:cNvPr id="6" name="Text 3"/>
+      <p:sp>
+        <p:nvSpPr>
+          <p:cNvPr id="4" name="Shape 2"/>
+          <p:cNvSpPr/>
+          <p:nvPr/>
+        </p:nvSpPr>
+        <p:spPr>
+          <a:xfrm>
+            <a:off x="848563" y="2384755"/>
+            <a:ext cx="570586" cy="570586"/>
+          </a:xfrm>
+          <a:prstGeom prst="roundRect">
+            <a:avLst>
+              <a:gd name="adj" fmla="val 19231"/>
+            </a:avLst>
+          </a:prstGeom>
+          <a:solidFill>
+            <a:srgbClr val="0B1F3A"/>
+          </a:solidFill>
+          <a:ln/>
+        </p:spPr>
+      </p:sp>
+      <p:sp>
+        <p:nvSpPr>
+          <p:cNvPr id="5" name="Shape 3"/>
+          <p:cNvSpPr/>
+          <p:nvPr/>
+        </p:nvSpPr>
+        <p:spPr>
+          <a:xfrm>
+            <a:off x="981700" y="2517892"/>
+            <a:ext cx="304312" cy="304312"/>
+          </a:xfrm>
+          <a:prstGeom prst="roundRect">
+            <a:avLst>
+              <a:gd name="adj" fmla="val 30048"/>
+            </a:avLst>
+          </a:prstGeom>
+          <a:solidFill>
+            <a:srgbClr val="FFFFFF">
+              <a:alpha val="75000"/>
+            </a:srgbClr>
+          </a:solidFill>
+          <a:ln/>
+        </p:spPr>
+      </p:sp>
+      <p:sp>
+        <p:nvSpPr>
+          <p:cNvPr id="6" name="Shape 4"/>
+          <p:cNvSpPr/>
+          <p:nvPr/>
+        </p:nvSpPr>
+        <p:spPr>
+          <a:xfrm>
+            <a:off x="943661" y="2251619"/>
+            <a:ext cx="76078" cy="133137"/>
+          </a:xfrm>
+          <a:prstGeom prst="rect">
+            <a:avLst/>
+          </a:prstGeom>
+          <a:solidFill>
+            <a:srgbClr val="0B1F3A">
+              <a:alpha val="70000"/>
+            </a:srgbClr>
+          </a:solidFill>
+          <a:ln/>
+        </p:spPr>
+      </p:sp>
+      <p:sp>
+        <p:nvSpPr>
+          <p:cNvPr id="7" name="Shape 5"/>
+          <p:cNvSpPr/>
+          <p:nvPr/>
+        </p:nvSpPr>
+        <p:spPr>
+          <a:xfrm>
+            <a:off x="943661" y="2955341"/>
+            <a:ext cx="76078" cy="133137"/>
+          </a:xfrm>
+          <a:prstGeom prst="rect">
+            <a:avLst/>
+          </a:prstGeom>
+          <a:solidFill>
+            <a:srgbClr val="0B1F3A">
+              <a:alpha val="70000"/>
+            </a:srgbClr>
+          </a:solidFill>
+          <a:ln/>
+        </p:spPr>
+      </p:sp>
+      <p:sp>
+        <p:nvSpPr>
+          <p:cNvPr id="8" name="Shape 6"/>
+          <p:cNvSpPr/>
+          <p:nvPr/>
+        </p:nvSpPr>
+        <p:spPr>
+          <a:xfrm>
+            <a:off x="715427" y="2479853"/>
+            <a:ext cx="133137" cy="76078"/>
+          </a:xfrm>
+          <a:prstGeom prst="rect">
+            <a:avLst/>
+          </a:prstGeom>
+          <a:solidFill>
+            <a:srgbClr val="0B1F3A">
+              <a:alpha val="70000"/>
+            </a:srgbClr>
+          </a:solidFill>
+          <a:ln/>
+        </p:spPr>
+      </p:sp>
+      <p:sp>
+        <p:nvSpPr>
+          <p:cNvPr id="9" name="Shape 7"/>
+          <p:cNvSpPr/>
+          <p:nvPr/>
+        </p:nvSpPr>
+        <p:spPr>
+          <a:xfrm>
+            <a:off x="1419149" y="2479853"/>
+            <a:ext cx="133137" cy="76078"/>
+          </a:xfrm>
+          <a:prstGeom prst="rect">
+            <a:avLst/>
+          </a:prstGeom>
+          <a:solidFill>
+            <a:srgbClr val="0B1F3A">
+              <a:alpha val="70000"/>
+            </a:srgbClr>
+          </a:solidFill>
+          <a:ln/>
+        </p:spPr>
+      </p:sp>
+      <p:sp>
+        <p:nvSpPr>
+          <p:cNvPr id="10" name="Shape 8"/>
+          <p:cNvSpPr/>
+          <p:nvPr/>
+        </p:nvSpPr>
+        <p:spPr>
+          <a:xfrm>
+            <a:off x="1095817" y="2251619"/>
+            <a:ext cx="76078" cy="133137"/>
+          </a:xfrm>
+          <a:prstGeom prst="rect">
+            <a:avLst/>
+          </a:prstGeom>
+          <a:solidFill>
+            <a:srgbClr val="0B1F3A">
+              <a:alpha val="70000"/>
+            </a:srgbClr>
+          </a:solidFill>
+          <a:ln/>
+        </p:spPr>
+      </p:sp>
+      <p:sp>
+        <p:nvSpPr>
+          <p:cNvPr id="11" name="Shape 9"/>
+          <p:cNvSpPr/>
+          <p:nvPr/>
+        </p:nvSpPr>
+        <p:spPr>
+          <a:xfrm>
+            <a:off x="1095817" y="2955341"/>
+            <a:ext cx="76078" cy="133137"/>
+          </a:xfrm>
+          <a:prstGeom prst="rect">
+            <a:avLst/>
+          </a:prstGeom>
+          <a:solidFill>
+            <a:srgbClr val="0B1F3A">
+              <a:alpha val="70000"/>
+            </a:srgbClr>
+          </a:solidFill>
+          <a:ln/>
+        </p:spPr>
+      </p:sp>
+      <p:sp>
+        <p:nvSpPr>
+          <p:cNvPr id="12" name="Shape 10"/>
+          <p:cNvSpPr/>
+          <p:nvPr/>
+        </p:nvSpPr>
+        <p:spPr>
+          <a:xfrm>
+            <a:off x="715427" y="2632009"/>
+            <a:ext cx="133137" cy="76078"/>
+          </a:xfrm>
+          <a:prstGeom prst="rect">
+            <a:avLst/>
+          </a:prstGeom>
+          <a:solidFill>
+            <a:srgbClr val="0B1F3A">
+              <a:alpha val="70000"/>
+            </a:srgbClr>
+          </a:solidFill>
+          <a:ln/>
+        </p:spPr>
+      </p:sp>
+      <p:sp>
+        <p:nvSpPr>
+          <p:cNvPr id="13" name="Shape 11"/>
+          <p:cNvSpPr/>
+          <p:nvPr/>
+        </p:nvSpPr>
+        <p:spPr>
+          <a:xfrm>
+            <a:off x="1419149" y="2632009"/>
+            <a:ext cx="133137" cy="76078"/>
+          </a:xfrm>
+          <a:prstGeom prst="rect">
+            <a:avLst/>
+          </a:prstGeom>
+          <a:solidFill>
+            <a:srgbClr val="0B1F3A">
+              <a:alpha val="70000"/>
+            </a:srgbClr>
+          </a:solidFill>
+          <a:ln/>
+        </p:spPr>
+      </p:sp>
+      <p:sp>
+        <p:nvSpPr>
+          <p:cNvPr id="14" name="Shape 12"/>
+          <p:cNvSpPr/>
+          <p:nvPr/>
+        </p:nvSpPr>
+        <p:spPr>
+          <a:xfrm>
+            <a:off x="1247973" y="2251619"/>
+            <a:ext cx="76078" cy="133137"/>
+          </a:xfrm>
+          <a:prstGeom prst="rect">
+            <a:avLst/>
+          </a:prstGeom>
+          <a:solidFill>
+            <a:srgbClr val="0B1F3A">
+              <a:alpha val="70000"/>
+            </a:srgbClr>
+          </a:solidFill>
+          <a:ln/>
+        </p:spPr>
+      </p:sp>
+      <p:sp>
+        <p:nvSpPr>
+          <p:cNvPr id="15" name="Shape 13"/>
+          <p:cNvSpPr/>
+          <p:nvPr/>
+        </p:nvSpPr>
+        <p:spPr>
+          <a:xfrm>
+            <a:off x="1247973" y="2955341"/>
+            <a:ext cx="76078" cy="133137"/>
+          </a:xfrm>
+          <a:prstGeom prst="rect">
+            <a:avLst/>
+          </a:prstGeom>
+          <a:solidFill>
+            <a:srgbClr val="0B1F3A">
+              <a:alpha val="70000"/>
+            </a:srgbClr>
+          </a:solidFill>
+          <a:ln/>
+        </p:spPr>
+      </p:sp>
+      <p:sp>
+        <p:nvSpPr>
+          <p:cNvPr id="16" name="Shape 14"/>
+          <p:cNvSpPr/>
+          <p:nvPr/>
+        </p:nvSpPr>
+        <p:spPr>
+          <a:xfrm>
+            <a:off x="715427" y="2784165"/>
+            <a:ext cx="133137" cy="76078"/>
+          </a:xfrm>
+          <a:prstGeom prst="rect">
+            <a:avLst/>
+          </a:prstGeom>
+          <a:solidFill>
+            <a:srgbClr val="0B1F3A">
+              <a:alpha val="70000"/>
+            </a:srgbClr>
+          </a:solidFill>
+          <a:ln/>
+        </p:spPr>
+      </p:sp>
+      <p:sp>
+        <p:nvSpPr>
+          <p:cNvPr id="17" name="Shape 15"/>
+          <p:cNvSpPr/>
+          <p:nvPr/>
+        </p:nvSpPr>
+        <p:spPr>
+          <a:xfrm>
+            <a:off x="1419149" y="2784165"/>
+            <a:ext cx="133137" cy="76078"/>
+          </a:xfrm>
+          <a:prstGeom prst="rect">
+            <a:avLst/>
+          </a:prstGeom>
+          <a:solidFill>
+            <a:srgbClr val="0B1F3A">
+              <a:alpha val="70000"/>
+            </a:srgbClr>
+          </a:solidFill>
+          <a:ln/>
+        </p:spPr>
+      </p:sp>
+      <p:sp>
+        <p:nvSpPr>
+          <p:cNvPr id="18" name="Text 16"/>
           <p:cNvSpPr txBox="1"/>
           <p:nvPr/>
         </p:nvSpPr>
         <p:spPr>
           <a:xfrm>
-            <a:off x="502920" y="4407408"/>
-            <a:ext cx="8138160" cy="201168"/>
+            <a:off x="1609344" y="2487168"/>
+            <a:ext cx="256032" cy="365760"/>
           </a:xfrm>
           <a:prstGeom prst="rect">
             <a:avLst/>
@@ -8967,30 +9466,175 @@
               <a:buNone/>
             </a:pPr>
             <a:r>
-              <a:rPr lang="en-US" sz="850" dirty="0">
+              <a:rPr lang="en-US" sz="1700" b="1" dirty="0">
                 <a:solidFill>
                   <a:srgbClr val="5F7183"/>
+                </a:solidFill>
+                <a:latin typeface="微軟正黑體" pitchFamily="34" charset="0"/>
+                <a:ea typeface="微軟正黑體" pitchFamily="34" charset="-122"/>
+                <a:cs typeface="微軟正黑體" pitchFamily="34" charset="-120"/>
+              </a:rPr>
+              <a:t>→</a:t>
+            </a:r>
+            <a:endParaRPr lang="en-US" sz="1700" dirty="0"/>
+          </a:p>
+        </p:txBody>
+      </p:sp>
+      <p:sp>
+        <p:nvSpPr>
+          <p:cNvPr id="19" name="Shape 17"/>
+          <p:cNvSpPr/>
+          <p:nvPr/>
+        </p:nvSpPr>
+        <p:spPr>
+          <a:xfrm rot="3000000">
+            <a:off x="1960474" y="2727107"/>
+            <a:ext cx="323332" cy="123627"/>
+          </a:xfrm>
+          <a:prstGeom prst="rect">
+            <a:avLst/>
+          </a:prstGeom>
+          <a:solidFill>
+            <a:srgbClr val="0B1F3A"/>
+          </a:solidFill>
+          <a:ln/>
+        </p:spPr>
+      </p:sp>
+      <p:sp>
+        <p:nvSpPr>
+          <p:cNvPr id="20" name="Shape 18"/>
+          <p:cNvSpPr/>
+          <p:nvPr/>
+        </p:nvSpPr>
+        <p:spPr>
+          <a:xfrm rot="-2520000">
+            <a:off x="2150669" y="2612989"/>
+            <a:ext cx="589605" cy="123627"/>
+          </a:xfrm>
+          <a:prstGeom prst="rect">
+            <a:avLst/>
+          </a:prstGeom>
+          <a:solidFill>
+            <a:srgbClr val="0B1F3A"/>
+          </a:solidFill>
+          <a:ln/>
+        </p:spPr>
+      </p:sp>
+      <p:sp>
+        <p:nvSpPr>
+          <p:cNvPr id="21" name="Text 19"/>
+          <p:cNvSpPr txBox="1"/>
+          <p:nvPr/>
+        </p:nvSpPr>
+        <p:spPr>
+          <a:xfrm>
+            <a:off x="3429000" y="914400"/>
+            <a:ext cx="5212080" cy="3511296"/>
+          </a:xfrm>
+          <a:prstGeom prst="rect">
+            <a:avLst/>
+          </a:prstGeom>
+          <a:noFill/>
+          <a:ln/>
+        </p:spPr>
+        <p:txBody>
+          <a:bodyPr wrap="square" lIns="0" tIns="0" rIns="0" bIns="0" rtlCol="0" anchor="ctr"/>
+          <a:lstStyle/>
+          <a:p>
+            <a:pPr indent="0" marL="0">
+              <a:lnSpc>
+                <a:spcPct val="120000"/>
+              </a:lnSpc>
+              <a:buNone/>
+            </a:pPr>
+            <a:r>
+              <a:rPr lang="en-US" sz="2300" b="1" dirty="0">
+                <a:solidFill>
+                  <a:srgbClr val="0B1F3A"/>
                 </a:solidFill>
                 <a:latin typeface="Arial" pitchFamily="34" charset="0"/>
                 <a:ea typeface="Arial" pitchFamily="34" charset="-122"/>
                 <a:cs typeface="Arial" pitchFamily="34" charset="-120"/>
               </a:rPr>
-              <a:t>nuScenes scene-0061 #21 與 #22 · CC BY-NC-SA 4.0 · 一張放練習題、一張放考卷，就像洩題</a:t>
-            </a:r>
-            <a:endParaRPr lang="en-US" sz="850" dirty="0"/>
+              <a:t>Không bắt đầu từ số 0: mượn mô hình đã học 11,8 vạn ảnh</a:t>
+            </a:r>
+            <a:endParaRPr lang="en-US" sz="2300" dirty="0"/>
+          </a:p>
+          <a:p>
+            <a:pPr indent="0" marL="0">
+              <a:lnSpc>
+                <a:spcPct val="120000"/>
+              </a:lnSpc>
+              <a:buNone/>
+            </a:pPr>
+            <a:r>
+              <a:rPr lang="en-US" sz="1400" b="1" dirty="0">
+                <a:solidFill>
+                  <a:srgbClr val="007F72"/>
+                </a:solidFill>
+                <a:latin typeface="微軟正黑體" pitchFamily="34" charset="0"/>
+                <a:ea typeface="微軟正黑體" pitchFamily="34" charset="-122"/>
+                <a:cs typeface="微軟正黑體" pitchFamily="34" charset="-120"/>
+              </a:rPr>
+              <a:t>不是從零開始：借一個已經看過 11.8 萬張照片的模型</a:t>
+            </a:r>
+            <a:endParaRPr lang="en-US" sz="2300" dirty="0"/>
+          </a:p>
+          <a:p>
+            <a:pPr indent="0" marL="0">
+              <a:lnSpc>
+                <a:spcPct val="120000"/>
+              </a:lnSpc>
+              <a:spcBef>
+                <a:spcPts val="1440"/>
+              </a:spcBef>
+              <a:buNone/>
+            </a:pPr>
+            <a:r>
+              <a:rPr lang="en-US" sz="1250" dirty="0">
+                <a:solidFill>
+                  <a:srgbClr val="5F7183"/>
+                </a:solidFill>
+                <a:latin typeface="Arial" pitchFamily="34" charset="0"/>
+                <a:ea typeface="Arial" pitchFamily="34" charset="-122"/>
+                <a:cs typeface="Arial" pitchFamily="34" charset="-120"/>
+              </a:rPr>
+              <a:t>Thử thật: học từ đầu bằng 30 ảnh, ảnh kiểm tra có 53 xe, người, xe hai bánh — khoanh đúng 0. Bắt đầu từ mô hình COCO: nó đã biết cạnh, góc, màu, hình dạng — chỉ cần dạy thêm «cọc tiêu».</a:t>
+            </a:r>
+            <a:endParaRPr lang="en-US" sz="2300" dirty="0"/>
+          </a:p>
+          <a:p>
+            <a:pPr indent="0" marL="0">
+              <a:lnSpc>
+                <a:spcPct val="120000"/>
+              </a:lnSpc>
+              <a:buNone/>
+            </a:pPr>
+            <a:r>
+              <a:rPr lang="en-US" sz="1150" dirty="0">
+                <a:solidFill>
+                  <a:srgbClr val="5F7183"/>
+                </a:solidFill>
+                <a:latin typeface="微軟正黑體" pitchFamily="34" charset="0"/>
+                <a:ea typeface="微軟正黑體" pitchFamily="34" charset="-122"/>
+                <a:cs typeface="微軟正黑體" pitchFamily="34" charset="-120"/>
+              </a:rPr>
+              <a:t>實測：30 張從零開始練，測試照片裡車、行人、兩輪車共 53 個，框對 0 個。從 COCO 練好的模型開始：它已經會看邊、角、顏色、形狀，只要再教「三角錐」這一樣。</a:t>
+            </a:r>
+            <a:endParaRPr lang="en-US" sz="2300" dirty="0"/>
           </a:p>
         </p:txBody>
       </p:sp>
       <p:sp>
         <p:nvSpPr>
-          <p:cNvPr id="7" name="Shape 4"/>
+          <p:cNvPr id="22" name="Shape 20"/>
           <p:cNvSpPr/>
           <p:nvPr/>
         </p:nvSpPr>
         <p:spPr>
           <a:xfrm>
-            <a:off x="6768871" y="365760"/>
-            <a:ext cx="1872209" cy="310896"/>
+            <a:off x="6026995" y="365760"/>
+            <a:ext cx="2614085" cy="310896"/>
           </a:xfrm>
           <a:prstGeom prst="roundRect">
             <a:avLst>
@@ -9010,14 +9654,14 @@
       </p:sp>
       <p:sp>
         <p:nvSpPr>
-          <p:cNvPr id="8" name="Text 5"/>
+          <p:cNvPr id="23" name="Text 21"/>
           <p:cNvSpPr txBox="1"/>
           <p:nvPr/>
         </p:nvSpPr>
         <p:spPr>
           <a:xfrm>
-            <a:off x="6896887" y="384048"/>
-            <a:ext cx="1689329" cy="274320"/>
+            <a:off x="6155011" y="384048"/>
+            <a:ext cx="2431205" cy="274320"/>
           </a:xfrm>
           <a:prstGeom prst="rect">
             <a:avLst/>
@@ -9061,7 +9705,7 @@
                 <a:ea typeface="Arial" pitchFamily="34" charset="-122"/>
                 <a:cs typeface="Arial" pitchFamily="34" charset="-120"/>
               </a:rPr>
-              <a:t>đề thi trùng bài tập</a:t>
+              <a:t>biết đi xe đạp rồi mới học xe máy</a:t>
             </a:r>
             <a:endParaRPr lang="en-US" sz="950" dirty="0"/>
           </a:p>
@@ -9098,7 +9742,7 @@
                 <a:ea typeface="微軟正黑體" pitchFamily="34" charset="-122"/>
                 <a:cs typeface="微軟正黑體" pitchFamily="34" charset="-120"/>
               </a:rPr>
-              <a:t>考題就是練習題</a:t>
+              <a:t>會騎腳踏車，再學騎機車</a:t>
             </a:r>
             <a:endParaRPr lang="en-US" sz="950" dirty="0"/>
           </a:p>
@@ -9106,14 +9750,14 @@
       </p:sp>
       <p:pic>
         <p:nvPicPr>
-          <p:cNvPr id="10" name="Image 1" descr="/Users/tsengchenghsun/Class/carClass/Claude outputs/第十週(11-12)/src/logo.png">    </p:cNvPr>
+          <p:cNvPr id="25" name="Image 0" descr="/Users/tsengchenghsun/Class/carClass/Claude outputs/第十週(11-12)/src/logo.png">    </p:cNvPr>
           <p:cNvPicPr>
             <a:picLocks noChangeAspect="1"/>
           </p:cNvPicPr>
           <p:nvPr/>
         </p:nvPicPr>
         <p:blipFill>
-          <a:blip r:embed="rId2"/>
+          <a:blip r:embed="rId1"/>
           <a:stretch>
             <a:fillRect/>
           </a:stretch>
@@ -9130,7 +9774,7 @@
       </p:pic>
       <p:sp>
         <p:nvSpPr>
-          <p:cNvPr id="11" name="Text 6"/>
+          <p:cNvPr id="26" name="Text 22"/>
           <p:cNvSpPr txBox="1"/>
           <p:nvPr/>
         </p:nvSpPr>
@@ -9169,7 +9813,7 @@
       </p:sp>
       <p:sp>
         <p:nvSpPr>
-          <p:cNvPr id="12" name="Text 7"/>
+          <p:cNvPr id="27" name="Text 23"/>
           <p:cNvSpPr txBox="1"/>
           <p:nvPr/>
         </p:nvSpPr>
@@ -9264,7 +9908,7 @@
                 <a:ea typeface="Arial" pitchFamily="34" charset="-122"/>
                 <a:cs typeface="Arial" pitchFamily="34" charset="-120"/>
               </a:rPr>
-              <a:t>Bước 4 · 第四步：資料增強</a:t>
+              <a:t>Từng vòng một · 一輪一輪</a:t>
             </a:r>
             <a:endParaRPr lang="en-US" sz="1250" dirty="0"/>
           </a:p>
@@ -9306,7 +9950,7 @@
                 <a:ea typeface="Arial" pitchFamily="34" charset="-122"/>
                 <a:cs typeface="Arial" pitchFamily="34" charset="-120"/>
               </a:rPr>
-              <a:t>Tăng cường dữ liệu: một ảnh biến thành nhiều ảnh, khung đi theo ảnh</a:t>
+              <a:t>Cùng một ảnh kiểm tra, từ vòng 1 đến vòng 49</a:t>
             </a:r>
             <a:endParaRPr lang="en-US" sz="1700" dirty="0"/>
           </a:p>
@@ -9326,7 +9970,7 @@
                 <a:ea typeface="微軟正黑體" pitchFamily="34" charset="-122"/>
                 <a:cs typeface="微軟正黑體" pitchFamily="34" charset="-120"/>
               </a:rPr>
-              <a:t>資料增強：一張照片變出很多張，框跟著照片一起變</a:t>
+              <a:t>同一張測試照片：第 1 輪到第 49 輪</a:t>
             </a:r>
             <a:endParaRPr lang="en-US" sz="1700" dirty="0"/>
           </a:p>
@@ -9359,7 +10003,7 @@
       </p:sp>
       <p:pic>
         <p:nvPicPr>
-          <p:cNvPr id="5" name="Image 0" descr="/Users/tsengchenghsun/Class/carClass/Claude outputs/第十週(11-12)/src/img/w10_aug.gif">    </p:cNvPr>
+          <p:cNvPr id="5" name="Image 0" descr="/Users/tsengchenghsun/Class/carClass/Claude outputs/第十週(11-12)/src/img/w10_epochs.gif">    </p:cNvPr>
           <p:cNvPicPr>
             <a:picLocks noChangeAspect="1"/>
           </p:cNvPicPr>
@@ -9414,7 +10058,7 @@
                 <a:ea typeface="Arial" pitchFamily="34" charset="-122"/>
                 <a:cs typeface="Arial" pitchFamily="34" charset="-120"/>
               </a:rPr>
-              <a:t>示意動畫：scene-0061 #21；「四張拼一張」另外用了三張訓練照片 · 真的訓練時這些變化是隨機、同時發生的（下一張）</a:t>
+              <a:t>scene-0655 #27（測試照片，訓練時沒看過）· 白色虛線＝標準答案、綠＝框對、紅＝多框 · 分數門檻 0.25 · 為了教學，每一輪都拿測試照片考</a:t>
             </a:r>
             <a:endParaRPr lang="en-US" sz="850" dirty="0"/>
           </a:p>

--- a/第十週(11-12)/第十週_第1節_簡報.pptx
+++ b/第十週(11-12)/第十週_第1節_簡報.pptx
@@ -3573,11 +3573,11 @@
                 <a:spcPts val="0"/>
               </a:spcBef>
               <a:spcAft>
-                <a:spcPts val="267"/>
+                <a:spcPts val="233"/>
               </a:spcAft>
             </a:pPr>
             <a:r>
-              <a:rPr sz="1600" b="1" lang="zh-TW" dirty="0">
+              <a:rPr sz="1400" b="1" lang="zh-TW" dirty="0">
                 <a:solidFill>
                   <a:srgbClr val="000000"/>
                 </a:solidFill>
@@ -3588,15 +3588,15 @@
               <a:t>這一張的目的：</a:t>
             </a:r>
             <a:r>
-              <a:rPr sz="1600" lang="zh-TW" dirty="0">
-                <a:solidFill>
-                  <a:srgbClr val="000000"/>
-                </a:solidFill>
-                <a:latin typeface="Arial Unicode MS"/>
-                <a:ea typeface="Arial Unicode MS"/>
-                <a:cs typeface="Arial Unicode MS"/>
-              </a:rPr>
-              <a:t>讓大家知道，30 張照片從零開始練，模型什麼都學不會；所以實際的做法，是從一個已經用大量照片練好的模型開始，再教它新的東西。
+              <a:rPr sz="1400" lang="zh-TW" dirty="0">
+                <a:solidFill>
+                  <a:srgbClr val="000000"/>
+                </a:solidFill>
+                <a:latin typeface="Arial Unicode MS"/>
+                <a:ea typeface="Arial Unicode MS"/>
+                <a:cs typeface="Arial Unicode MS"/>
+              </a:rPr>
+              <a:t>讓大家知道，30 張照片從零開始練，模型幾乎什麼都學不會；所以實際的做法，是從一個已經用大量照片練好的模型開始，再教它新的東西。
 </a:t>
             </a:r>
           </a:p>
@@ -3606,11 +3606,11 @@
                 <a:spcPts val="0"/>
               </a:spcBef>
               <a:spcAft>
-                <a:spcPts val="267"/>
+                <a:spcPts val="233"/>
               </a:spcAft>
             </a:pPr>
             <a:r>
-              <a:rPr sz="1600" lang="zh-TW" dirty="0">
+              <a:rPr sz="1400" lang="zh-TW" dirty="0">
                 <a:solidFill>
                   <a:srgbClr val="000000"/>
                 </a:solidFill>
@@ -3628,63 +3628,19 @@
                 <a:spcPts val="0"/>
               </a:spcBef>
               <a:spcAft>
-                <a:spcPts val="267"/>
+                <a:spcPts val="233"/>
               </a:spcAft>
             </a:pPr>
             <a:r>
-              <a:rPr sz="1600" lang="zh-TW" dirty="0">
-                <a:solidFill>
-                  <a:srgbClr val="000000"/>
-                </a:solidFill>
-                <a:latin typeface="Arial Unicode MS"/>
-                <a:ea typeface="Arial Unicode MS"/>
-                <a:cs typeface="Arial Unicode MS"/>
-              </a:rPr>
-              <a:t>我真的試過。拿一個</a:t>
-            </a:r>
-            <a:r>
-              <a:rPr sz="1600" b="1" lang="zh-TW" dirty="0">
-                <a:solidFill>
-                  <a:srgbClr val="000000"/>
-                </a:solidFill>
-                <a:latin typeface="Arial Unicode MS"/>
-                <a:ea typeface="Arial Unicode MS"/>
-                <a:cs typeface="Arial Unicode MS"/>
-              </a:rPr>
-              <a:t>從零開始</a:t>
-            </a:r>
-            <a:r>
-              <a:rPr sz="1600" lang="zh-TW" dirty="0">
-                <a:solidFill>
-                  <a:srgbClr val="000000"/>
-                </a:solidFill>
-                <a:latin typeface="Arial Unicode MS"/>
-                <a:ea typeface="Arial Unicode MS"/>
-                <a:cs typeface="Arial Unicode MS"/>
-              </a:rPr>
-              <a:t>的模型，也就是裡面的參數全部是亂數，什麼都還沒學過，用 30 張照片教它認車和行人，練 50 輪。然後拿 10 張它沒看過的照片考它，照片裡車、行人、機車和腳踏車一共 53 個。結果，</a:t>
-            </a:r>
-            <a:r>
-              <a:rPr sz="1600" b="1" lang="zh-TW" dirty="0">
-                <a:solidFill>
-                  <a:srgbClr val="000000"/>
-                </a:solidFill>
-                <a:latin typeface="Arial Unicode MS"/>
-                <a:ea typeface="Arial Unicode MS"/>
-                <a:cs typeface="Arial Unicode MS"/>
-              </a:rPr>
-              <a:t>框對 0 個。</a:t>
-            </a:r>
-            <a:r>
-              <a:rPr sz="1600" lang="zh-TW" dirty="0">
-                <a:solidFill>
-                  <a:srgbClr val="000000"/>
-                </a:solidFill>
-                <a:latin typeface="Arial Unicode MS"/>
-                <a:ea typeface="Arial Unicode MS"/>
-                <a:cs typeface="Arial Unicode MS"/>
-              </a:rPr>
-              <a:t>30 張照片，對一個什麼都不會的模型來說太少了。
+              <a:rPr sz="1400" lang="zh-TW" dirty="0">
+                <a:solidFill>
+                  <a:srgbClr val="000000"/>
+                </a:solidFill>
+                <a:latin typeface="Arial Unicode MS"/>
+                <a:ea typeface="Arial Unicode MS"/>
+                <a:cs typeface="Arial Unicode MS"/>
+              </a:rPr>
+              <a:t>我真的試了兩種起點，用的是同樣 30 張照片、同樣的設定。
 </a:t>
             </a:r>
           </a:p>
@@ -3694,19 +3650,96 @@
                 <a:spcPts val="0"/>
               </a:spcBef>
               <a:spcAft>
-                <a:spcPts val="267"/>
+                <a:spcPts val="233"/>
               </a:spcAft>
             </a:pPr>
             <a:r>
-              <a:rPr sz="1600" lang="zh-TW" dirty="0">
-                <a:solidFill>
-                  <a:srgbClr val="000000"/>
-                </a:solidFill>
-                <a:latin typeface="Arial Unicode MS"/>
-                <a:ea typeface="Arial Unicode MS"/>
-                <a:cs typeface="Arial Unicode MS"/>
-              </a:rPr>
-              <a:t>第八週講過，模型的第一層學的是最小的「筆畫」：邊、角、顏色；後面的層再把筆畫組成輪子、車窗、人的形狀。這些筆畫，要看過非常多張照片才學得起來。
+              <a:rPr sz="1400" b="1" lang="zh-TW" dirty="0">
+                <a:solidFill>
+                  <a:srgbClr val="000000"/>
+                </a:solidFill>
+                <a:latin typeface="Arial Unicode MS"/>
+                <a:ea typeface="Arial Unicode MS"/>
+                <a:cs typeface="Arial Unicode MS"/>
+              </a:rPr>
+              <a:t>先看上排</a:t>
+            </a:r>
+            <a:r>
+              <a:rPr sz="1400" lang="zh-TW" dirty="0">
+                <a:solidFill>
+                  <a:srgbClr val="000000"/>
+                </a:solidFill>
+                <a:latin typeface="Arial Unicode MS"/>
+                <a:ea typeface="Arial Unicode MS"/>
+                <a:cs typeface="Arial Unicode MS"/>
+              </a:rPr>
+              <a:t>，這時候兩個模型都還沒教過三角錐。我把同一張波士頓的照片送進去，看模型</a:t>
+            </a:r>
+            <a:r>
+              <a:rPr sz="1400" b="1" lang="zh-TW" dirty="0">
+                <a:solidFill>
+                  <a:srgbClr val="000000"/>
+                </a:solidFill>
+                <a:latin typeface="Arial Unicode MS"/>
+                <a:ea typeface="Arial Unicode MS"/>
+                <a:cs typeface="Arial Unicode MS"/>
+              </a:rPr>
+              <a:t>第一層</a:t>
+            </a:r>
+            <a:r>
+              <a:rPr sz="1400" lang="zh-TW" dirty="0">
+                <a:solidFill>
+                  <a:srgbClr val="000000"/>
+                </a:solidFill>
+                <a:latin typeface="Arial Unicode MS"/>
+                <a:ea typeface="Arial Unicode MS"/>
+                <a:cs typeface="Arial Unicode MS"/>
+              </a:rPr>
+              <a:t>看到什麼。第八週講過，第一層學的是最小的「筆畫」：邊、角、顏色。左邊是</a:t>
+            </a:r>
+            <a:r>
+              <a:rPr sz="1400" b="1" lang="zh-TW" dirty="0">
+                <a:solidFill>
+                  <a:srgbClr val="000000"/>
+                </a:solidFill>
+                <a:latin typeface="Arial Unicode MS"/>
+                <a:ea typeface="Arial Unicode MS"/>
+                <a:cs typeface="Arial Unicode MS"/>
+              </a:rPr>
+              <a:t>從零開始</a:t>
+            </a:r>
+            <a:r>
+              <a:rPr sz="1400" lang="zh-TW" dirty="0">
+                <a:solidFill>
+                  <a:srgbClr val="000000"/>
+                </a:solidFill>
+                <a:latin typeface="Arial Unicode MS"/>
+                <a:ea typeface="Arial Unicode MS"/>
+                <a:cs typeface="Arial Unicode MS"/>
+              </a:rPr>
+              <a:t>的模型，裡面的參數全部是亂數，第一層只是把照片變成灰階，什麼都沒挑出來。右邊是第四張那個</a:t>
+            </a:r>
+            <a:r>
+              <a:rPr sz="1400" b="1" lang="zh-TW" dirty="0">
+                <a:solidFill>
+                  <a:srgbClr val="000000"/>
+                </a:solidFill>
+                <a:latin typeface="Arial Unicode MS"/>
+                <a:ea typeface="Arial Unicode MS"/>
+                <a:cs typeface="Arial Unicode MS"/>
+              </a:rPr>
+              <a:t>原版模型</a:t>
+            </a:r>
+            <a:r>
+              <a:rPr sz="1400" lang="zh-TW" dirty="0">
+                <a:solidFill>
+                  <a:srgbClr val="000000"/>
+                </a:solidFill>
+                <a:latin typeface="Arial Unicode MS"/>
+                <a:ea typeface="Arial Unicode MS"/>
+                <a:cs typeface="Arial Unicode MS"/>
+              </a:rPr>
+              <a:t>，它已經用 COCO 的十一萬多張照片練過，第一層就把樹、大樓、巴士、車道線的邊和輪廓都挑出來了。這就是「它已經會看」。
 </a:t>
             </a:r>
           </a:p>
@@ -3716,85 +3749,30 @@
                 <a:spcPts val="0"/>
               </a:spcBef>
               <a:spcAft>
-                <a:spcPts val="267"/>
+                <a:spcPts val="233"/>
               </a:spcAft>
             </a:pPr>
             <a:r>
-              <a:rPr sz="1600" lang="zh-TW" dirty="0">
-                <a:solidFill>
-                  <a:srgbClr val="000000"/>
-                </a:solidFill>
-                <a:latin typeface="Arial Unicode MS"/>
-                <a:ea typeface="Arial Unicode MS"/>
-                <a:cs typeface="Arial Unicode MS"/>
-              </a:rPr>
-              <a:t>所以實際的做法是</a:t>
-            </a:r>
-            <a:r>
-              <a:rPr sz="1600" b="1" lang="zh-TW" dirty="0">
-                <a:solidFill>
-                  <a:srgbClr val="000000"/>
-                </a:solidFill>
-                <a:latin typeface="Arial Unicode MS"/>
-                <a:ea typeface="Arial Unicode MS"/>
-                <a:cs typeface="Arial Unicode MS"/>
-              </a:rPr>
-              <a:t>借</a:t>
-            </a:r>
-            <a:r>
-              <a:rPr sz="1600" lang="zh-TW" dirty="0">
-                <a:solidFill>
-                  <a:srgbClr val="000000"/>
-                </a:solidFill>
-                <a:latin typeface="Arial Unicode MS"/>
-                <a:ea typeface="Arial Unicode MS"/>
-                <a:cs typeface="Arial Unicode MS"/>
-              </a:rPr>
-              <a:t>。第四張那個原版模型，已經用 COCO 的十一萬多張照片練過，邊、角、顏色、形狀它都會看了。我們從它開始，只要再教它一樣新東西：三角錐。這個做法叫</a:t>
-            </a:r>
-            <a:r>
-              <a:rPr sz="1600" b="1" lang="zh-TW" dirty="0">
-                <a:solidFill>
-                  <a:srgbClr val="000000"/>
-                </a:solidFill>
-                <a:latin typeface="Arial Unicode MS"/>
-                <a:ea typeface="Arial Unicode MS"/>
-                <a:cs typeface="Arial Unicode MS"/>
-              </a:rPr>
-              <a:t>遷移學習</a:t>
-            </a:r>
-            <a:r>
-              <a:rPr sz="1600" lang="zh-TW" dirty="0">
-                <a:solidFill>
-                  <a:srgbClr val="000000"/>
-                </a:solidFill>
-                <a:latin typeface="Arial Unicode MS"/>
-                <a:ea typeface="Arial Unicode MS"/>
-                <a:cs typeface="Arial Unicode MS"/>
-              </a:rPr>
-              <a:t>，也有人叫</a:t>
-            </a:r>
-            <a:r>
-              <a:rPr sz="1600" b="1" lang="zh-TW" dirty="0">
-                <a:solidFill>
-                  <a:srgbClr val="000000"/>
-                </a:solidFill>
-                <a:latin typeface="Arial Unicode MS"/>
-                <a:ea typeface="Arial Unicode MS"/>
-                <a:cs typeface="Arial Unicode MS"/>
-              </a:rPr>
-              <a:t>微調</a:t>
-            </a:r>
-            <a:r>
-              <a:rPr sz="1600" lang="zh-TW" dirty="0">
-                <a:solidFill>
-                  <a:srgbClr val="000000"/>
-                </a:solidFill>
-                <a:latin typeface="Arial Unicode MS"/>
-                <a:ea typeface="Arial Unicode MS"/>
-                <a:cs typeface="Arial Unicode MS"/>
-              </a:rPr>
-              <a:t>。
+              <a:rPr sz="1400" b="1" lang="zh-TW" dirty="0">
+                <a:solidFill>
+                  <a:srgbClr val="000000"/>
+                </a:solidFill>
+                <a:latin typeface="Arial Unicode MS"/>
+                <a:ea typeface="Arial Unicode MS"/>
+                <a:cs typeface="Arial Unicode MS"/>
+              </a:rPr>
+              <a:t>再看下排</a:t>
+            </a:r>
+            <a:r>
+              <a:rPr sz="1400" lang="zh-TW" dirty="0">
+                <a:solidFill>
+                  <a:srgbClr val="000000"/>
+                </a:solidFill>
+                <a:latin typeface="Arial Unicode MS"/>
+                <a:ea typeface="Arial Unicode MS"/>
+                <a:cs typeface="Arial Unicode MS"/>
+              </a:rPr>
+              <a:t>，兩個模型都用那 30 張照片練 50 輪，再考這張照片。左邊從零開始：這張 8 個三角錐只框對 1 個；17 張測試照片、90 個三角錐，只框對 4 個。右邊從 COCO 開始：這張 8 個全部框對；90 個框對 80 個。車和行人我也試過，從零開始一樣學不會，53 個框對 0 個。
 </a:t>
             </a:r>
           </a:p>
@@ -3804,11 +3782,99 @@
                 <a:spcPts val="0"/>
               </a:spcBef>
               <a:spcAft>
-                <a:spcPts val="267"/>
+                <a:spcPts val="233"/>
               </a:spcAft>
             </a:pPr>
             <a:r>
-              <a:rPr sz="1600" lang="zh-TW" dirty="0">
+              <a:rPr sz="1400" lang="zh-TW" dirty="0">
+                <a:solidFill>
+                  <a:srgbClr val="000000"/>
+                </a:solidFill>
+                <a:latin typeface="Arial Unicode MS"/>
+                <a:ea typeface="Arial Unicode MS"/>
+                <a:cs typeface="Arial Unicode MS"/>
+              </a:rPr>
+              <a:t>所以實際的做法是</a:t>
+            </a:r>
+            <a:r>
+              <a:rPr sz="1400" b="1" lang="zh-TW" dirty="0">
+                <a:solidFill>
+                  <a:srgbClr val="000000"/>
+                </a:solidFill>
+                <a:latin typeface="Arial Unicode MS"/>
+                <a:ea typeface="Arial Unicode MS"/>
+                <a:cs typeface="Arial Unicode MS"/>
+              </a:rPr>
+              <a:t>借</a:t>
+            </a:r>
+            <a:r>
+              <a:rPr sz="1400" lang="zh-TW" dirty="0">
+                <a:solidFill>
+                  <a:srgbClr val="000000"/>
+                </a:solidFill>
+                <a:latin typeface="Arial Unicode MS"/>
+                <a:ea typeface="Arial Unicode MS"/>
+                <a:cs typeface="Arial Unicode MS"/>
+              </a:rPr>
+              <a:t>。從一個已經會看邊、角、形狀的模型開始，只要再教它一樣新東西：三角錐。這個做法叫</a:t>
+            </a:r>
+            <a:r>
+              <a:rPr sz="1400" b="1" lang="zh-TW" dirty="0">
+                <a:solidFill>
+                  <a:srgbClr val="000000"/>
+                </a:solidFill>
+                <a:latin typeface="Arial Unicode MS"/>
+                <a:ea typeface="Arial Unicode MS"/>
+                <a:cs typeface="Arial Unicode MS"/>
+              </a:rPr>
+              <a:t>遷移學習</a:t>
+            </a:r>
+            <a:r>
+              <a:rPr sz="1400" lang="zh-TW" dirty="0">
+                <a:solidFill>
+                  <a:srgbClr val="000000"/>
+                </a:solidFill>
+                <a:latin typeface="Arial Unicode MS"/>
+                <a:ea typeface="Arial Unicode MS"/>
+                <a:cs typeface="Arial Unicode MS"/>
+              </a:rPr>
+              <a:t>，也有人叫</a:t>
+            </a:r>
+            <a:r>
+              <a:rPr sz="1400" b="1" lang="zh-TW" dirty="0">
+                <a:solidFill>
+                  <a:srgbClr val="000000"/>
+                </a:solidFill>
+                <a:latin typeface="Arial Unicode MS"/>
+                <a:ea typeface="Arial Unicode MS"/>
+                <a:cs typeface="Arial Unicode MS"/>
+              </a:rPr>
+              <a:t>微調</a:t>
+            </a:r>
+            <a:r>
+              <a:rPr sz="1400" lang="zh-TW" dirty="0">
+                <a:solidFill>
+                  <a:srgbClr val="000000"/>
+                </a:solidFill>
+                <a:latin typeface="Arial Unicode MS"/>
+                <a:ea typeface="Arial Unicode MS"/>
+                <a:cs typeface="Arial Unicode MS"/>
+              </a:rPr>
+              <a:t>。
+</a:t>
+            </a:r>
+          </a:p>
+          <a:p>
+            <a:pPr algn="l">
+              <a:spcBef>
+                <a:spcPts val="0"/>
+              </a:spcBef>
+              <a:spcAft>
+                <a:spcPts val="233"/>
+              </a:spcAft>
+            </a:pPr>
+            <a:r>
+              <a:rPr sz="1400" lang="zh-TW" dirty="0">
                 <a:solidFill>
                   <a:srgbClr val="000000"/>
                 </a:solidFill>
@@ -9106,22 +9172,82 @@
       </p:sp>
       <p:sp>
         <p:nvSpPr>
-          <p:cNvPr id="3" name="Shape 1"/>
+          <p:cNvPr id="3" name="Text 1"/>
+          <p:cNvSpPr txBox="1"/>
+          <p:nvPr/>
+        </p:nvSpPr>
+        <p:spPr>
+          <a:xfrm>
+            <a:off x="502920" y="731520"/>
+            <a:ext cx="8138160" cy="585216"/>
+          </a:xfrm>
+          <a:prstGeom prst="rect">
+            <a:avLst/>
+          </a:prstGeom>
+          <a:noFill/>
+          <a:ln/>
+        </p:spPr>
+        <p:txBody>
+          <a:bodyPr wrap="square" lIns="0" tIns="0" rIns="0" bIns="0" rtlCol="0" anchor="t"/>
+          <a:lstStyle/>
+          <a:p>
+            <a:pPr indent="0" marL="0">
+              <a:lnSpc>
+                <a:spcPct val="120000"/>
+              </a:lnSpc>
+              <a:buNone/>
+            </a:pPr>
+            <a:r>
+              <a:rPr lang="en-US" sz="1700" b="1" dirty="0">
+                <a:solidFill>
+                  <a:srgbClr val="0B1F3A"/>
+                </a:solidFill>
+                <a:latin typeface="Arial" pitchFamily="34" charset="0"/>
+                <a:ea typeface="Arial" pitchFamily="34" charset="-122"/>
+                <a:cs typeface="Arial" pitchFamily="34" charset="-120"/>
+              </a:rPr>
+              <a:t>Không bắt đầu từ số 0: mượn mô hình đã học 11,8 vạn ảnh</a:t>
+            </a:r>
+            <a:endParaRPr lang="en-US" sz="1700" dirty="0"/>
+          </a:p>
+          <a:p>
+            <a:pPr indent="0" marL="0">
+              <a:lnSpc>
+                <a:spcPct val="120000"/>
+              </a:lnSpc>
+              <a:buNone/>
+            </a:pPr>
+            <a:r>
+              <a:rPr lang="en-US" sz="1300" dirty="0">
+                <a:solidFill>
+                  <a:srgbClr val="007F72"/>
+                </a:solidFill>
+                <a:latin typeface="微軟正黑體" pitchFamily="34" charset="0"/>
+                <a:ea typeface="微軟正黑體" pitchFamily="34" charset="-122"/>
+                <a:cs typeface="微軟正黑體" pitchFamily="34" charset="-120"/>
+              </a:rPr>
+              <a:t>不是從零開始：借一個已經看過 11.8 萬張照片的模型</a:t>
+            </a:r>
+            <a:endParaRPr lang="en-US" sz="1700" dirty="0"/>
+          </a:p>
+        </p:txBody>
+      </p:sp>
+      <p:sp>
+        <p:nvSpPr>
+          <p:cNvPr id="4" name="Shape 2"/>
           <p:cNvSpPr/>
           <p:nvPr/>
         </p:nvSpPr>
         <p:spPr>
           <a:xfrm>
-            <a:off x="502920" y="1412748"/>
-            <a:ext cx="2468880" cy="2514600"/>
-          </a:xfrm>
-          <a:prstGeom prst="roundRect">
-            <a:avLst>
-              <a:gd name="adj" fmla="val 4444"/>
-            </a:avLst>
+            <a:off x="2099043" y="1371600"/>
+            <a:ext cx="4945914" cy="3017520"/>
+          </a:xfrm>
+          <a:prstGeom prst="rect">
+            <a:avLst/>
           </a:prstGeom>
           <a:solidFill>
-            <a:srgbClr val="F4F7FA"/>
+            <a:srgbClr val="FFFFFF"/>
           </a:solidFill>
           <a:ln w="12700">
             <a:solidFill>
@@ -9131,326 +9257,40 @@
           </a:ln>
         </p:spPr>
       </p:sp>
-      <p:sp>
-        <p:nvSpPr>
-          <p:cNvPr id="4" name="Shape 2"/>
-          <p:cNvSpPr/>
-          <p:nvPr/>
-        </p:nvSpPr>
-        <p:spPr>
-          <a:xfrm>
-            <a:off x="848563" y="2384755"/>
-            <a:ext cx="570586" cy="570586"/>
-          </a:xfrm>
-          <a:prstGeom prst="roundRect">
-            <a:avLst>
-              <a:gd name="adj" fmla="val 19231"/>
-            </a:avLst>
-          </a:prstGeom>
-          <a:solidFill>
-            <a:srgbClr val="0B1F3A"/>
-          </a:solidFill>
-          <a:ln/>
-        </p:spPr>
-      </p:sp>
-      <p:sp>
-        <p:nvSpPr>
-          <p:cNvPr id="5" name="Shape 3"/>
-          <p:cNvSpPr/>
-          <p:nvPr/>
-        </p:nvSpPr>
-        <p:spPr>
-          <a:xfrm>
-            <a:off x="981700" y="2517892"/>
-            <a:ext cx="304312" cy="304312"/>
-          </a:xfrm>
-          <a:prstGeom prst="roundRect">
-            <a:avLst>
-              <a:gd name="adj" fmla="val 30048"/>
-            </a:avLst>
-          </a:prstGeom>
-          <a:solidFill>
-            <a:srgbClr val="FFFFFF">
-              <a:alpha val="75000"/>
-            </a:srgbClr>
-          </a:solidFill>
-          <a:ln/>
-        </p:spPr>
-      </p:sp>
-      <p:sp>
-        <p:nvSpPr>
-          <p:cNvPr id="6" name="Shape 4"/>
-          <p:cNvSpPr/>
-          <p:nvPr/>
-        </p:nvSpPr>
-        <p:spPr>
-          <a:xfrm>
-            <a:off x="943661" y="2251619"/>
-            <a:ext cx="76078" cy="133137"/>
-          </a:xfrm>
-          <a:prstGeom prst="rect">
-            <a:avLst/>
-          </a:prstGeom>
-          <a:solidFill>
-            <a:srgbClr val="0B1F3A">
-              <a:alpha val="70000"/>
-            </a:srgbClr>
-          </a:solidFill>
-          <a:ln/>
-        </p:spPr>
-      </p:sp>
-      <p:sp>
-        <p:nvSpPr>
-          <p:cNvPr id="7" name="Shape 5"/>
-          <p:cNvSpPr/>
-          <p:nvPr/>
-        </p:nvSpPr>
-        <p:spPr>
-          <a:xfrm>
-            <a:off x="943661" y="2955341"/>
-            <a:ext cx="76078" cy="133137"/>
-          </a:xfrm>
-          <a:prstGeom prst="rect">
-            <a:avLst/>
-          </a:prstGeom>
-          <a:solidFill>
-            <a:srgbClr val="0B1F3A">
-              <a:alpha val="70000"/>
-            </a:srgbClr>
-          </a:solidFill>
-          <a:ln/>
-        </p:spPr>
-      </p:sp>
-      <p:sp>
-        <p:nvSpPr>
-          <p:cNvPr id="8" name="Shape 6"/>
-          <p:cNvSpPr/>
-          <p:nvPr/>
-        </p:nvSpPr>
-        <p:spPr>
-          <a:xfrm>
-            <a:off x="715427" y="2479853"/>
-            <a:ext cx="133137" cy="76078"/>
-          </a:xfrm>
-          <a:prstGeom prst="rect">
-            <a:avLst/>
-          </a:prstGeom>
-          <a:solidFill>
-            <a:srgbClr val="0B1F3A">
-              <a:alpha val="70000"/>
-            </a:srgbClr>
-          </a:solidFill>
-          <a:ln/>
-        </p:spPr>
-      </p:sp>
-      <p:sp>
-        <p:nvSpPr>
-          <p:cNvPr id="9" name="Shape 7"/>
-          <p:cNvSpPr/>
-          <p:nvPr/>
-        </p:nvSpPr>
-        <p:spPr>
-          <a:xfrm>
-            <a:off x="1419149" y="2479853"/>
-            <a:ext cx="133137" cy="76078"/>
-          </a:xfrm>
-          <a:prstGeom prst="rect">
-            <a:avLst/>
-          </a:prstGeom>
-          <a:solidFill>
-            <a:srgbClr val="0B1F3A">
-              <a:alpha val="70000"/>
-            </a:srgbClr>
-          </a:solidFill>
-          <a:ln/>
-        </p:spPr>
-      </p:sp>
-      <p:sp>
-        <p:nvSpPr>
-          <p:cNvPr id="10" name="Shape 8"/>
-          <p:cNvSpPr/>
-          <p:nvPr/>
-        </p:nvSpPr>
-        <p:spPr>
-          <a:xfrm>
-            <a:off x="1095817" y="2251619"/>
-            <a:ext cx="76078" cy="133137"/>
-          </a:xfrm>
-          <a:prstGeom prst="rect">
-            <a:avLst/>
-          </a:prstGeom>
-          <a:solidFill>
-            <a:srgbClr val="0B1F3A">
-              <a:alpha val="70000"/>
-            </a:srgbClr>
-          </a:solidFill>
-          <a:ln/>
-        </p:spPr>
-      </p:sp>
-      <p:sp>
-        <p:nvSpPr>
-          <p:cNvPr id="11" name="Shape 9"/>
-          <p:cNvSpPr/>
-          <p:nvPr/>
-        </p:nvSpPr>
-        <p:spPr>
-          <a:xfrm>
-            <a:off x="1095817" y="2955341"/>
-            <a:ext cx="76078" cy="133137"/>
-          </a:xfrm>
-          <a:prstGeom prst="rect">
-            <a:avLst/>
-          </a:prstGeom>
-          <a:solidFill>
-            <a:srgbClr val="0B1F3A">
-              <a:alpha val="70000"/>
-            </a:srgbClr>
-          </a:solidFill>
-          <a:ln/>
-        </p:spPr>
-      </p:sp>
-      <p:sp>
-        <p:nvSpPr>
-          <p:cNvPr id="12" name="Shape 10"/>
-          <p:cNvSpPr/>
-          <p:nvPr/>
-        </p:nvSpPr>
-        <p:spPr>
-          <a:xfrm>
-            <a:off x="715427" y="2632009"/>
-            <a:ext cx="133137" cy="76078"/>
-          </a:xfrm>
-          <a:prstGeom prst="rect">
-            <a:avLst/>
-          </a:prstGeom>
-          <a:solidFill>
-            <a:srgbClr val="0B1F3A">
-              <a:alpha val="70000"/>
-            </a:srgbClr>
-          </a:solidFill>
-          <a:ln/>
-        </p:spPr>
-      </p:sp>
-      <p:sp>
-        <p:nvSpPr>
-          <p:cNvPr id="13" name="Shape 11"/>
-          <p:cNvSpPr/>
-          <p:nvPr/>
-        </p:nvSpPr>
-        <p:spPr>
-          <a:xfrm>
-            <a:off x="1419149" y="2632009"/>
-            <a:ext cx="133137" cy="76078"/>
-          </a:xfrm>
-          <a:prstGeom prst="rect">
-            <a:avLst/>
-          </a:prstGeom>
-          <a:solidFill>
-            <a:srgbClr val="0B1F3A">
-              <a:alpha val="70000"/>
-            </a:srgbClr>
-          </a:solidFill>
-          <a:ln/>
-        </p:spPr>
-      </p:sp>
-      <p:sp>
-        <p:nvSpPr>
-          <p:cNvPr id="14" name="Shape 12"/>
-          <p:cNvSpPr/>
-          <p:nvPr/>
-        </p:nvSpPr>
-        <p:spPr>
-          <a:xfrm>
-            <a:off x="1247973" y="2251619"/>
-            <a:ext cx="76078" cy="133137"/>
-          </a:xfrm>
-          <a:prstGeom prst="rect">
-            <a:avLst/>
-          </a:prstGeom>
-          <a:solidFill>
-            <a:srgbClr val="0B1F3A">
-              <a:alpha val="70000"/>
-            </a:srgbClr>
-          </a:solidFill>
-          <a:ln/>
-        </p:spPr>
-      </p:sp>
-      <p:sp>
-        <p:nvSpPr>
-          <p:cNvPr id="15" name="Shape 13"/>
-          <p:cNvSpPr/>
-          <p:nvPr/>
-        </p:nvSpPr>
-        <p:spPr>
-          <a:xfrm>
-            <a:off x="1247973" y="2955341"/>
-            <a:ext cx="76078" cy="133137"/>
-          </a:xfrm>
-          <a:prstGeom prst="rect">
-            <a:avLst/>
-          </a:prstGeom>
-          <a:solidFill>
-            <a:srgbClr val="0B1F3A">
-              <a:alpha val="70000"/>
-            </a:srgbClr>
-          </a:solidFill>
-          <a:ln/>
-        </p:spPr>
-      </p:sp>
-      <p:sp>
-        <p:nvSpPr>
-          <p:cNvPr id="16" name="Shape 14"/>
-          <p:cNvSpPr/>
-          <p:nvPr/>
-        </p:nvSpPr>
-        <p:spPr>
-          <a:xfrm>
-            <a:off x="715427" y="2784165"/>
-            <a:ext cx="133137" cy="76078"/>
-          </a:xfrm>
-          <a:prstGeom prst="rect">
-            <a:avLst/>
-          </a:prstGeom>
-          <a:solidFill>
-            <a:srgbClr val="0B1F3A">
-              <a:alpha val="70000"/>
-            </a:srgbClr>
-          </a:solidFill>
-          <a:ln/>
-        </p:spPr>
-      </p:sp>
-      <p:sp>
-        <p:nvSpPr>
-          <p:cNvPr id="17" name="Shape 15"/>
-          <p:cNvSpPr/>
-          <p:nvPr/>
-        </p:nvSpPr>
-        <p:spPr>
-          <a:xfrm>
-            <a:off x="1419149" y="2784165"/>
-            <a:ext cx="133137" cy="76078"/>
-          </a:xfrm>
-          <a:prstGeom prst="rect">
-            <a:avLst/>
-          </a:prstGeom>
-          <a:solidFill>
-            <a:srgbClr val="0B1F3A">
-              <a:alpha val="70000"/>
-            </a:srgbClr>
-          </a:solidFill>
-          <a:ln/>
-        </p:spPr>
-      </p:sp>
-      <p:sp>
-        <p:nvSpPr>
-          <p:cNvPr id="18" name="Text 16"/>
+      <p:pic>
+        <p:nvPicPr>
+          <p:cNvPr id="5" name="Image 0" descr="/Users/tsengchenghsun/Class/carClass/Claude outputs/第十週(11-12)/src/img/w10_transfer.gif">    </p:cNvPr>
+          <p:cNvPicPr>
+            <a:picLocks noChangeAspect="1"/>
+          </p:cNvPicPr>
+          <p:nvPr/>
+        </p:nvPicPr>
+        <p:blipFill>
+          <a:blip r:embed="rId1"/>
+          <a:stretch>
+            <a:fillRect/>
+          </a:stretch>
+        </p:blipFill>
+        <p:spPr>
+          <a:xfrm>
+            <a:off x="2117331" y="1389888"/>
+            <a:ext cx="4909338" cy="2980944"/>
+          </a:xfrm>
+          <a:prstGeom prst="rect">
+            <a:avLst/>
+          </a:prstGeom>
+        </p:spPr>
+      </p:pic>
+      <p:sp>
+        <p:nvSpPr>
+          <p:cNvPr id="6" name="Text 3"/>
           <p:cNvSpPr txBox="1"/>
           <p:nvPr/>
         </p:nvSpPr>
         <p:spPr>
           <a:xfrm>
-            <a:off x="1609344" y="2487168"/>
-            <a:ext cx="256032" cy="365760"/>
+            <a:off x="502920" y="4407408"/>
+            <a:ext cx="8138160" cy="201168"/>
           </a:xfrm>
           <a:prstGeom prst="rect">
             <a:avLst/>
@@ -9466,168 +9306,23 @@
               <a:buNone/>
             </a:pPr>
             <a:r>
-              <a:rPr lang="en-US" sz="1700" b="1" dirty="0">
+              <a:rPr lang="en-US" sz="850" dirty="0">
                 <a:solidFill>
                   <a:srgbClr val="5F7183"/>
-                </a:solidFill>
-                <a:latin typeface="微軟正黑體" pitchFamily="34" charset="0"/>
-                <a:ea typeface="微軟正黑體" pitchFamily="34" charset="-122"/>
-                <a:cs typeface="微軟正黑體" pitchFamily="34" charset="-120"/>
-              </a:rPr>
-              <a:t>→</a:t>
-            </a:r>
-            <a:endParaRPr lang="en-US" sz="1700" dirty="0"/>
-          </a:p>
-        </p:txBody>
-      </p:sp>
-      <p:sp>
-        <p:nvSpPr>
-          <p:cNvPr id="19" name="Shape 17"/>
-          <p:cNvSpPr/>
-          <p:nvPr/>
-        </p:nvSpPr>
-        <p:spPr>
-          <a:xfrm rot="3000000">
-            <a:off x="1960474" y="2727107"/>
-            <a:ext cx="323332" cy="123627"/>
-          </a:xfrm>
-          <a:prstGeom prst="rect">
-            <a:avLst/>
-          </a:prstGeom>
-          <a:solidFill>
-            <a:srgbClr val="0B1F3A"/>
-          </a:solidFill>
-          <a:ln/>
-        </p:spPr>
-      </p:sp>
-      <p:sp>
-        <p:nvSpPr>
-          <p:cNvPr id="20" name="Shape 18"/>
-          <p:cNvSpPr/>
-          <p:nvPr/>
-        </p:nvSpPr>
-        <p:spPr>
-          <a:xfrm rot="-2520000">
-            <a:off x="2150669" y="2612989"/>
-            <a:ext cx="589605" cy="123627"/>
-          </a:xfrm>
-          <a:prstGeom prst="rect">
-            <a:avLst/>
-          </a:prstGeom>
-          <a:solidFill>
-            <a:srgbClr val="0B1F3A"/>
-          </a:solidFill>
-          <a:ln/>
-        </p:spPr>
-      </p:sp>
-      <p:sp>
-        <p:nvSpPr>
-          <p:cNvPr id="21" name="Text 19"/>
-          <p:cNvSpPr txBox="1"/>
-          <p:nvPr/>
-        </p:nvSpPr>
-        <p:spPr>
-          <a:xfrm>
-            <a:off x="3429000" y="914400"/>
-            <a:ext cx="5212080" cy="3511296"/>
-          </a:xfrm>
-          <a:prstGeom prst="rect">
-            <a:avLst/>
-          </a:prstGeom>
-          <a:noFill/>
-          <a:ln/>
-        </p:spPr>
-        <p:txBody>
-          <a:bodyPr wrap="square" lIns="0" tIns="0" rIns="0" bIns="0" rtlCol="0" anchor="ctr"/>
-          <a:lstStyle/>
-          <a:p>
-            <a:pPr indent="0" marL="0">
-              <a:lnSpc>
-                <a:spcPct val="120000"/>
-              </a:lnSpc>
-              <a:buNone/>
-            </a:pPr>
-            <a:r>
-              <a:rPr lang="en-US" sz="2300" b="1" dirty="0">
-                <a:solidFill>
-                  <a:srgbClr val="0B1F3A"/>
                 </a:solidFill>
                 <a:latin typeface="Arial" pitchFamily="34" charset="0"/>
                 <a:ea typeface="Arial" pitchFamily="34" charset="-122"/>
                 <a:cs typeface="Arial" pitchFamily="34" charset="-120"/>
               </a:rPr>
-              <a:t>Không bắt đầu từ số 0: mượn mô hình đã học 11,8 vạn ảnh</a:t>
-            </a:r>
-            <a:endParaRPr lang="en-US" sz="2300" dirty="0"/>
-          </a:p>
-          <a:p>
-            <a:pPr indent="0" marL="0">
-              <a:lnSpc>
-                <a:spcPct val="120000"/>
-              </a:lnSpc>
-              <a:buNone/>
-            </a:pPr>
-            <a:r>
-              <a:rPr lang="en-US" sz="1400" b="1" dirty="0">
-                <a:solidFill>
-                  <a:srgbClr val="007F72"/>
-                </a:solidFill>
-                <a:latin typeface="微軟正黑體" pitchFamily="34" charset="0"/>
-                <a:ea typeface="微軟正黑體" pitchFamily="34" charset="-122"/>
-                <a:cs typeface="微軟正黑體" pitchFamily="34" charset="-120"/>
-              </a:rPr>
-              <a:t>不是從零開始：借一個已經看過 11.8 萬張照片的模型</a:t>
-            </a:r>
-            <a:endParaRPr lang="en-US" sz="2300" dirty="0"/>
-          </a:p>
-          <a:p>
-            <a:pPr indent="0" marL="0">
-              <a:lnSpc>
-                <a:spcPct val="120000"/>
-              </a:lnSpc>
-              <a:spcBef>
-                <a:spcPts val="1440"/>
-              </a:spcBef>
-              <a:buNone/>
-            </a:pPr>
-            <a:r>
-              <a:rPr lang="en-US" sz="1250" dirty="0">
-                <a:solidFill>
-                  <a:srgbClr val="5F7183"/>
-                </a:solidFill>
-                <a:latin typeface="Arial" pitchFamily="34" charset="0"/>
-                <a:ea typeface="Arial" pitchFamily="34" charset="-122"/>
-                <a:cs typeface="Arial" pitchFamily="34" charset="-120"/>
-              </a:rPr>
-              <a:t>Thử thật: học từ đầu bằng 30 ảnh, ảnh kiểm tra có 53 xe, người, xe hai bánh — khoanh đúng 0. Bắt đầu từ mô hình COCO: nó đã biết cạnh, góc, màu, hình dạng — chỉ cần dạy thêm «cọc tiêu».</a:t>
-            </a:r>
-            <a:endParaRPr lang="en-US" sz="2300" dirty="0"/>
-          </a:p>
-          <a:p>
-            <a:pPr indent="0" marL="0">
-              <a:lnSpc>
-                <a:spcPct val="120000"/>
-              </a:lnSpc>
-              <a:buNone/>
-            </a:pPr>
-            <a:r>
-              <a:rPr lang="en-US" sz="1150" dirty="0">
-                <a:solidFill>
-                  <a:srgbClr val="5F7183"/>
-                </a:solidFill>
-                <a:latin typeface="微軟正黑體" pitchFamily="34" charset="0"/>
-                <a:ea typeface="微軟正黑體" pitchFamily="34" charset="-122"/>
-                <a:cs typeface="微軟正黑體" pitchFamily="34" charset="-120"/>
-              </a:rPr>
-              <a:t>實測：30 張從零開始練，測試照片裡車、行人、兩輪車共 53 個，框對 0 個。從 COCO 練好的模型開始：它已經會看邊、角、顏色、形狀，只要再教「三角錐」這一樣。</a:t>
-            </a:r>
-            <a:endParaRPr lang="en-US" sz="2300" dirty="0"/>
+              <a:t>scene-0655 #27（測試照片）· 上排：模型第一層的輸出（平均強度）· 下排：同樣 30 張、同樣設定練 50 輪，各留驗證組最好的一輪 · 分數門檻 0.25</a:t>
+            </a:r>
+            <a:endParaRPr lang="en-US" sz="850" dirty="0"/>
           </a:p>
         </p:txBody>
       </p:sp>
       <p:sp>
         <p:nvSpPr>
-          <p:cNvPr id="22" name="Shape 20"/>
+          <p:cNvPr id="7" name="Shape 4"/>
           <p:cNvSpPr/>
           <p:nvPr/>
         </p:nvSpPr>
@@ -9654,7 +9349,7 @@
       </p:sp>
       <p:sp>
         <p:nvSpPr>
-          <p:cNvPr id="23" name="Text 21"/>
+          <p:cNvPr id="8" name="Text 5"/>
           <p:cNvSpPr txBox="1"/>
           <p:nvPr/>
         </p:nvSpPr>
@@ -9750,14 +9445,14 @@
       </p:sp>
       <p:pic>
         <p:nvPicPr>
-          <p:cNvPr id="25" name="Image 0" descr="/Users/tsengchenghsun/Class/carClass/Claude outputs/第十週(11-12)/src/logo.png">    </p:cNvPr>
+          <p:cNvPr id="10" name="Image 1" descr="/Users/tsengchenghsun/Class/carClass/Claude outputs/第十週(11-12)/src/logo.png">    </p:cNvPr>
           <p:cNvPicPr>
             <a:picLocks noChangeAspect="1"/>
           </p:cNvPicPr>
           <p:nvPr/>
         </p:nvPicPr>
         <p:blipFill>
-          <a:blip r:embed="rId1"/>
+          <a:blip r:embed="rId2"/>
           <a:stretch>
             <a:fillRect/>
           </a:stretch>
@@ -9774,7 +9469,7 @@
       </p:pic>
       <p:sp>
         <p:nvSpPr>
-          <p:cNvPr id="26" name="Text 22"/>
+          <p:cNvPr id="11" name="Text 6"/>
           <p:cNvSpPr txBox="1"/>
           <p:nvPr/>
         </p:nvSpPr>
@@ -9813,7 +9508,7 @@
       </p:sp>
       <p:sp>
         <p:nvSpPr>
-          <p:cNvPr id="27" name="Text 23"/>
+          <p:cNvPr id="12" name="Text 7"/>
           <p:cNvSpPr txBox="1"/>
           <p:nvPr/>
         </p:nvSpPr>
